--- a/public/fun/pack/pptx/review/보장점검양식_17_부부점검_해바라기담장.pptx
+++ b/public/fun/pack/pptx/review/보장점검양식_17_부부점검_해바라기담장.pptx
@@ -3347,7 +3347,7 @@
             <a:r>
               <a:rPr sz="3600" b="1" i="0">
                 <a:solidFill>
-                  <a:srgbClr val="6E570C"/>
+                  <a:srgbClr val="115F25"/>
                 </a:solidFill>
               </a:rPr>
               <a:t>우리 보험 점검 시간</a:t>
@@ -3385,7 +3385,7 @@
             <a:r>
               <a:rPr sz="1700" b="0" i="1">
                 <a:solidFill>
-                  <a:srgbClr val="6E570C"/>
+                  <a:srgbClr val="115F25"/>
                 </a:solidFill>
               </a:rPr>
               <a:t>겹치는 항목이 있는지 같이 봅니다</a:t>
@@ -3460,7 +3460,7 @@
     <p:bg>
       <p:bgPr>
         <a:solidFill>
-          <a:srgbClr val="CAA016"/>
+          <a:srgbClr val="26C54E"/>
         </a:solidFill>
         <a:effectLst/>
       </p:bgPr>
@@ -3533,7 +3533,7 @@
             <a:r>
               <a:rPr sz="3000" b="1" i="0">
                 <a:solidFill>
-                  <a:srgbClr val="6E570C"/>
+                  <a:srgbClr val="115F25"/>
                 </a:solidFill>
               </a:rPr>
               <a:t>점검 대상 현황</a:t>
@@ -3584,30 +3584,30 @@
                   <a:tcPr anchor="ctr" marL="73152" marR="73152">
                     <a:lnL w="9525" cap="flat" cmpd="sng" algn="ctr">
                       <a:solidFill>
-                        <a:srgbClr val="CAA016"/>
+                        <a:srgbClr val="26C54E"/>
                       </a:solidFill>
                       <a:prstDash val="solid"/>
                     </a:lnL>
                     <a:lnR w="9525" cap="flat" cmpd="sng" algn="ctr">
                       <a:solidFill>
-                        <a:srgbClr val="CAA016"/>
+                        <a:srgbClr val="26C54E"/>
                       </a:solidFill>
                       <a:prstDash val="solid"/>
                     </a:lnR>
                     <a:lnT w="9525" cap="flat" cmpd="sng" algn="ctr">
                       <a:solidFill>
-                        <a:srgbClr val="CAA016"/>
+                        <a:srgbClr val="26C54E"/>
                       </a:solidFill>
                       <a:prstDash val="solid"/>
                     </a:lnT>
                     <a:lnB w="9525" cap="flat" cmpd="sng" algn="ctr">
                       <a:solidFill>
-                        <a:srgbClr val="CAA016"/>
+                        <a:srgbClr val="26C54E"/>
                       </a:solidFill>
                       <a:prstDash val="solid"/>
                     </a:lnB>
                     <a:solidFill>
-                      <a:srgbClr val="CAA016"/>
+                      <a:srgbClr val="26C54E"/>
                     </a:solidFill>
                   </a:tcPr>
                 </a:tc>
@@ -3630,30 +3630,30 @@
                   <a:tcPr anchor="ctr" marL="73152" marR="73152">
                     <a:lnL w="9525" cap="flat" cmpd="sng" algn="ctr">
                       <a:solidFill>
-                        <a:srgbClr val="CAA016"/>
+                        <a:srgbClr val="26C54E"/>
                       </a:solidFill>
                       <a:prstDash val="solid"/>
                     </a:lnL>
                     <a:lnR w="9525" cap="flat" cmpd="sng" algn="ctr">
                       <a:solidFill>
-                        <a:srgbClr val="CAA016"/>
+                        <a:srgbClr val="26C54E"/>
                       </a:solidFill>
                       <a:prstDash val="solid"/>
                     </a:lnR>
                     <a:lnT w="9525" cap="flat" cmpd="sng" algn="ctr">
                       <a:solidFill>
-                        <a:srgbClr val="CAA016"/>
+                        <a:srgbClr val="26C54E"/>
                       </a:solidFill>
                       <a:prstDash val="solid"/>
                     </a:lnT>
                     <a:lnB w="9525" cap="flat" cmpd="sng" algn="ctr">
                       <a:solidFill>
-                        <a:srgbClr val="CAA016"/>
+                        <a:srgbClr val="26C54E"/>
                       </a:solidFill>
                       <a:prstDash val="solid"/>
                     </a:lnB>
                     <a:solidFill>
-                      <a:srgbClr val="CAA016"/>
+                      <a:srgbClr val="26C54E"/>
                     </a:solidFill>
                   </a:tcPr>
                 </a:tc>
@@ -3676,30 +3676,30 @@
                   <a:tcPr anchor="ctr" marL="73152" marR="73152">
                     <a:lnL w="9525" cap="flat" cmpd="sng" algn="ctr">
                       <a:solidFill>
-                        <a:srgbClr val="CAA016"/>
+                        <a:srgbClr val="26C54E"/>
                       </a:solidFill>
                       <a:prstDash val="solid"/>
                     </a:lnL>
                     <a:lnR w="9525" cap="flat" cmpd="sng" algn="ctr">
                       <a:solidFill>
-                        <a:srgbClr val="CAA016"/>
+                        <a:srgbClr val="26C54E"/>
                       </a:solidFill>
                       <a:prstDash val="solid"/>
                     </a:lnR>
                     <a:lnT w="9525" cap="flat" cmpd="sng" algn="ctr">
                       <a:solidFill>
-                        <a:srgbClr val="CAA016"/>
+                        <a:srgbClr val="26C54E"/>
                       </a:solidFill>
                       <a:prstDash val="solid"/>
                     </a:lnT>
                     <a:lnB w="9525" cap="flat" cmpd="sng" algn="ctr">
                       <a:solidFill>
-                        <a:srgbClr val="CAA016"/>
+                        <a:srgbClr val="26C54E"/>
                       </a:solidFill>
                       <a:prstDash val="solid"/>
                     </a:lnB>
                     <a:solidFill>
-                      <a:srgbClr val="CAA016"/>
+                      <a:srgbClr val="26C54E"/>
                     </a:solidFill>
                   </a:tcPr>
                 </a:tc>
@@ -3714,7 +3714,7 @@
                       <a:r>
                         <a:rPr sz="1600" b="1">
                           <a:solidFill>
-                            <a:srgbClr val="6E570C"/>
+                            <a:srgbClr val="115F25"/>
                           </a:solidFill>
                         </a:rPr>
                         <a:t>이름</a:t>
@@ -3724,30 +3724,30 @@
                   <a:tcPr anchor="ctr" marL="73152" marR="73152">
                     <a:lnL w="9525" cap="flat" cmpd="sng" algn="ctr">
                       <a:solidFill>
-                        <a:srgbClr val="FAEEC6"/>
+                        <a:srgbClr val="D1FADC"/>
                       </a:solidFill>
                       <a:prstDash val="solid"/>
                     </a:lnL>
                     <a:lnR w="9525" cap="flat" cmpd="sng" algn="ctr">
                       <a:solidFill>
-                        <a:srgbClr val="FAEEC6"/>
+                        <a:srgbClr val="D1FADC"/>
                       </a:solidFill>
                       <a:prstDash val="solid"/>
                     </a:lnR>
                     <a:lnT w="9525" cap="flat" cmpd="sng" algn="ctr">
                       <a:solidFill>
-                        <a:srgbClr val="FAEEC6"/>
+                        <a:srgbClr val="D1FADC"/>
                       </a:solidFill>
                       <a:prstDash val="solid"/>
                     </a:lnT>
                     <a:lnB w="9525" cap="flat" cmpd="sng" algn="ctr">
                       <a:solidFill>
-                        <a:srgbClr val="FAEEC6"/>
+                        <a:srgbClr val="D1FADC"/>
                       </a:solidFill>
                       <a:prstDash val="solid"/>
                     </a:lnB>
                     <a:solidFill>
-                      <a:srgbClr val="FAEEC6"/>
+                      <a:srgbClr val="D1FADC"/>
                     </a:solidFill>
                   </a:tcPr>
                 </a:tc>
@@ -3770,25 +3770,25 @@
                   <a:tcPr anchor="ctr" marL="73152" marR="73152">
                     <a:lnL w="9525" cap="flat" cmpd="sng" algn="ctr">
                       <a:solidFill>
-                        <a:srgbClr val="FAEEC6"/>
+                        <a:srgbClr val="D1FADC"/>
                       </a:solidFill>
                       <a:prstDash val="solid"/>
                     </a:lnL>
                     <a:lnR w="9525" cap="flat" cmpd="sng" algn="ctr">
                       <a:solidFill>
-                        <a:srgbClr val="FAEEC6"/>
+                        <a:srgbClr val="D1FADC"/>
                       </a:solidFill>
                       <a:prstDash val="solid"/>
                     </a:lnR>
                     <a:lnT w="9525" cap="flat" cmpd="sng" algn="ctr">
                       <a:solidFill>
-                        <a:srgbClr val="FAEEC6"/>
+                        <a:srgbClr val="D1FADC"/>
                       </a:solidFill>
                       <a:prstDash val="solid"/>
                     </a:lnT>
                     <a:lnB w="9525" cap="flat" cmpd="sng" algn="ctr">
                       <a:solidFill>
-                        <a:srgbClr val="FAEEC6"/>
+                        <a:srgbClr val="D1FADC"/>
                       </a:solidFill>
                       <a:prstDash val="solid"/>
                     </a:lnB>
@@ -3816,25 +3816,25 @@
                   <a:tcPr anchor="ctr" marL="73152" marR="73152">
                     <a:lnL w="9525" cap="flat" cmpd="sng" algn="ctr">
                       <a:solidFill>
-                        <a:srgbClr val="FAEEC6"/>
+                        <a:srgbClr val="D1FADC"/>
                       </a:solidFill>
                       <a:prstDash val="solid"/>
                     </a:lnL>
                     <a:lnR w="9525" cap="flat" cmpd="sng" algn="ctr">
                       <a:solidFill>
-                        <a:srgbClr val="FAEEC6"/>
+                        <a:srgbClr val="D1FADC"/>
                       </a:solidFill>
                       <a:prstDash val="solid"/>
                     </a:lnR>
                     <a:lnT w="9525" cap="flat" cmpd="sng" algn="ctr">
                       <a:solidFill>
-                        <a:srgbClr val="FAEEC6"/>
+                        <a:srgbClr val="D1FADC"/>
                       </a:solidFill>
                       <a:prstDash val="solid"/>
                     </a:lnT>
                     <a:lnB w="9525" cap="flat" cmpd="sng" algn="ctr">
                       <a:solidFill>
-                        <a:srgbClr val="FAEEC6"/>
+                        <a:srgbClr val="D1FADC"/>
                       </a:solidFill>
                       <a:prstDash val="solid"/>
                     </a:lnB>
@@ -3854,7 +3854,7 @@
                       <a:r>
                         <a:rPr sz="1600" b="1">
                           <a:solidFill>
-                            <a:srgbClr val="6E570C"/>
+                            <a:srgbClr val="115F25"/>
                           </a:solidFill>
                         </a:rPr>
                         <a:t>나이</a:t>
@@ -3864,30 +3864,30 @@
                   <a:tcPr anchor="ctr" marL="73152" marR="73152">
                     <a:lnL w="9525" cap="flat" cmpd="sng" algn="ctr">
                       <a:solidFill>
-                        <a:srgbClr val="FAEEC6"/>
+                        <a:srgbClr val="D1FADC"/>
                       </a:solidFill>
                       <a:prstDash val="solid"/>
                     </a:lnL>
                     <a:lnR w="9525" cap="flat" cmpd="sng" algn="ctr">
                       <a:solidFill>
-                        <a:srgbClr val="FAEEC6"/>
+                        <a:srgbClr val="D1FADC"/>
                       </a:solidFill>
                       <a:prstDash val="solid"/>
                     </a:lnR>
                     <a:lnT w="9525" cap="flat" cmpd="sng" algn="ctr">
                       <a:solidFill>
-                        <a:srgbClr val="FAEEC6"/>
+                        <a:srgbClr val="D1FADC"/>
                       </a:solidFill>
                       <a:prstDash val="solid"/>
                     </a:lnT>
                     <a:lnB w="9525" cap="flat" cmpd="sng" algn="ctr">
                       <a:solidFill>
-                        <a:srgbClr val="FAEEC6"/>
+                        <a:srgbClr val="D1FADC"/>
                       </a:solidFill>
                       <a:prstDash val="solid"/>
                     </a:lnB>
                     <a:solidFill>
-                      <a:srgbClr val="FAEEC6"/>
+                      <a:srgbClr val="D1FADC"/>
                     </a:solidFill>
                   </a:tcPr>
                 </a:tc>
@@ -3910,30 +3910,30 @@
                   <a:tcPr anchor="ctr" marL="73152" marR="73152">
                     <a:lnL w="9525" cap="flat" cmpd="sng" algn="ctr">
                       <a:solidFill>
-                        <a:srgbClr val="FAEEC6"/>
+                        <a:srgbClr val="D1FADC"/>
                       </a:solidFill>
                       <a:prstDash val="solid"/>
                     </a:lnL>
                     <a:lnR w="9525" cap="flat" cmpd="sng" algn="ctr">
                       <a:solidFill>
-                        <a:srgbClr val="FAEEC6"/>
+                        <a:srgbClr val="D1FADC"/>
                       </a:solidFill>
                       <a:prstDash val="solid"/>
                     </a:lnR>
                     <a:lnT w="9525" cap="flat" cmpd="sng" algn="ctr">
                       <a:solidFill>
-                        <a:srgbClr val="FAEEC6"/>
+                        <a:srgbClr val="D1FADC"/>
                       </a:solidFill>
                       <a:prstDash val="solid"/>
                     </a:lnT>
                     <a:lnB w="9525" cap="flat" cmpd="sng" algn="ctr">
                       <a:solidFill>
-                        <a:srgbClr val="FAEEC6"/>
+                        <a:srgbClr val="D1FADC"/>
                       </a:solidFill>
                       <a:prstDash val="solid"/>
                     </a:lnB>
                     <a:solidFill>
-                      <a:srgbClr val="FDF9ED"/>
+                      <a:srgbClr val="EEFCF1"/>
                     </a:solidFill>
                   </a:tcPr>
                 </a:tc>
@@ -3956,30 +3956,30 @@
                   <a:tcPr anchor="ctr" marL="73152" marR="73152">
                     <a:lnL w="9525" cap="flat" cmpd="sng" algn="ctr">
                       <a:solidFill>
-                        <a:srgbClr val="FAEEC6"/>
+                        <a:srgbClr val="D1FADC"/>
                       </a:solidFill>
                       <a:prstDash val="solid"/>
                     </a:lnL>
                     <a:lnR w="9525" cap="flat" cmpd="sng" algn="ctr">
                       <a:solidFill>
-                        <a:srgbClr val="FAEEC6"/>
+                        <a:srgbClr val="D1FADC"/>
                       </a:solidFill>
                       <a:prstDash val="solid"/>
                     </a:lnR>
                     <a:lnT w="9525" cap="flat" cmpd="sng" algn="ctr">
                       <a:solidFill>
-                        <a:srgbClr val="FAEEC6"/>
+                        <a:srgbClr val="D1FADC"/>
                       </a:solidFill>
                       <a:prstDash val="solid"/>
                     </a:lnT>
                     <a:lnB w="9525" cap="flat" cmpd="sng" algn="ctr">
                       <a:solidFill>
-                        <a:srgbClr val="FAEEC6"/>
+                        <a:srgbClr val="D1FADC"/>
                       </a:solidFill>
                       <a:prstDash val="solid"/>
                     </a:lnB>
                     <a:solidFill>
-                      <a:srgbClr val="FDF9ED"/>
+                      <a:srgbClr val="EEFCF1"/>
                     </a:solidFill>
                   </a:tcPr>
                 </a:tc>
@@ -3994,7 +3994,7 @@
                       <a:r>
                         <a:rPr sz="1600" b="1">
                           <a:solidFill>
-                            <a:srgbClr val="6E570C"/>
+                            <a:srgbClr val="115F25"/>
                           </a:solidFill>
                         </a:rPr>
                         <a:t>직업</a:t>
@@ -4004,30 +4004,30 @@
                   <a:tcPr anchor="ctr" marL="73152" marR="73152">
                     <a:lnL w="9525" cap="flat" cmpd="sng" algn="ctr">
                       <a:solidFill>
-                        <a:srgbClr val="FAEEC6"/>
+                        <a:srgbClr val="D1FADC"/>
                       </a:solidFill>
                       <a:prstDash val="solid"/>
                     </a:lnL>
                     <a:lnR w="9525" cap="flat" cmpd="sng" algn="ctr">
                       <a:solidFill>
-                        <a:srgbClr val="FAEEC6"/>
+                        <a:srgbClr val="D1FADC"/>
                       </a:solidFill>
                       <a:prstDash val="solid"/>
                     </a:lnR>
                     <a:lnT w="9525" cap="flat" cmpd="sng" algn="ctr">
                       <a:solidFill>
-                        <a:srgbClr val="FAEEC6"/>
+                        <a:srgbClr val="D1FADC"/>
                       </a:solidFill>
                       <a:prstDash val="solid"/>
                     </a:lnT>
                     <a:lnB w="9525" cap="flat" cmpd="sng" algn="ctr">
                       <a:solidFill>
-                        <a:srgbClr val="FAEEC6"/>
+                        <a:srgbClr val="D1FADC"/>
                       </a:solidFill>
                       <a:prstDash val="solid"/>
                     </a:lnB>
                     <a:solidFill>
-                      <a:srgbClr val="FAEEC6"/>
+                      <a:srgbClr val="D1FADC"/>
                     </a:solidFill>
                   </a:tcPr>
                 </a:tc>
@@ -4050,25 +4050,25 @@
                   <a:tcPr anchor="ctr" marL="73152" marR="73152">
                     <a:lnL w="9525" cap="flat" cmpd="sng" algn="ctr">
                       <a:solidFill>
-                        <a:srgbClr val="FAEEC6"/>
+                        <a:srgbClr val="D1FADC"/>
                       </a:solidFill>
                       <a:prstDash val="solid"/>
                     </a:lnL>
                     <a:lnR w="9525" cap="flat" cmpd="sng" algn="ctr">
                       <a:solidFill>
-                        <a:srgbClr val="FAEEC6"/>
+                        <a:srgbClr val="D1FADC"/>
                       </a:solidFill>
                       <a:prstDash val="solid"/>
                     </a:lnR>
                     <a:lnT w="9525" cap="flat" cmpd="sng" algn="ctr">
                       <a:solidFill>
-                        <a:srgbClr val="FAEEC6"/>
+                        <a:srgbClr val="D1FADC"/>
                       </a:solidFill>
                       <a:prstDash val="solid"/>
                     </a:lnT>
                     <a:lnB w="9525" cap="flat" cmpd="sng" algn="ctr">
                       <a:solidFill>
-                        <a:srgbClr val="FAEEC6"/>
+                        <a:srgbClr val="D1FADC"/>
                       </a:solidFill>
                       <a:prstDash val="solid"/>
                     </a:lnB>
@@ -4096,25 +4096,25 @@
                   <a:tcPr anchor="ctr" marL="73152" marR="73152">
                     <a:lnL w="9525" cap="flat" cmpd="sng" algn="ctr">
                       <a:solidFill>
-                        <a:srgbClr val="FAEEC6"/>
+                        <a:srgbClr val="D1FADC"/>
                       </a:solidFill>
                       <a:prstDash val="solid"/>
                     </a:lnL>
                     <a:lnR w="9525" cap="flat" cmpd="sng" algn="ctr">
                       <a:solidFill>
-                        <a:srgbClr val="FAEEC6"/>
+                        <a:srgbClr val="D1FADC"/>
                       </a:solidFill>
                       <a:prstDash val="solid"/>
                     </a:lnR>
                     <a:lnT w="9525" cap="flat" cmpd="sng" algn="ctr">
                       <a:solidFill>
-                        <a:srgbClr val="FAEEC6"/>
+                        <a:srgbClr val="D1FADC"/>
                       </a:solidFill>
                       <a:prstDash val="solid"/>
                     </a:lnT>
                     <a:lnB w="9525" cap="flat" cmpd="sng" algn="ctr">
                       <a:solidFill>
-                        <a:srgbClr val="FAEEC6"/>
+                        <a:srgbClr val="D1FADC"/>
                       </a:solidFill>
                       <a:prstDash val="solid"/>
                     </a:lnB>
@@ -4134,7 +4134,7 @@
                       <a:r>
                         <a:rPr sz="1600" b="1">
                           <a:solidFill>
-                            <a:srgbClr val="6E570C"/>
+                            <a:srgbClr val="115F25"/>
                           </a:solidFill>
                         </a:rPr>
                         <a:t>건강 상태 메모</a:t>
@@ -4144,30 +4144,30 @@
                   <a:tcPr anchor="ctr" marL="73152" marR="73152">
                     <a:lnL w="9525" cap="flat" cmpd="sng" algn="ctr">
                       <a:solidFill>
-                        <a:srgbClr val="FAEEC6"/>
+                        <a:srgbClr val="D1FADC"/>
                       </a:solidFill>
                       <a:prstDash val="solid"/>
                     </a:lnL>
                     <a:lnR w="9525" cap="flat" cmpd="sng" algn="ctr">
                       <a:solidFill>
-                        <a:srgbClr val="FAEEC6"/>
+                        <a:srgbClr val="D1FADC"/>
                       </a:solidFill>
                       <a:prstDash val="solid"/>
                     </a:lnR>
                     <a:lnT w="9525" cap="flat" cmpd="sng" algn="ctr">
                       <a:solidFill>
-                        <a:srgbClr val="FAEEC6"/>
+                        <a:srgbClr val="D1FADC"/>
                       </a:solidFill>
                       <a:prstDash val="solid"/>
                     </a:lnT>
                     <a:lnB w="9525" cap="flat" cmpd="sng" algn="ctr">
                       <a:solidFill>
-                        <a:srgbClr val="FAEEC6"/>
+                        <a:srgbClr val="D1FADC"/>
                       </a:solidFill>
                       <a:prstDash val="solid"/>
                     </a:lnB>
                     <a:solidFill>
-                      <a:srgbClr val="FAEEC6"/>
+                      <a:srgbClr val="D1FADC"/>
                     </a:solidFill>
                   </a:tcPr>
                 </a:tc>
@@ -4190,30 +4190,30 @@
                   <a:tcPr anchor="ctr" marL="73152" marR="73152">
                     <a:lnL w="9525" cap="flat" cmpd="sng" algn="ctr">
                       <a:solidFill>
-                        <a:srgbClr val="FAEEC6"/>
+                        <a:srgbClr val="D1FADC"/>
                       </a:solidFill>
                       <a:prstDash val="solid"/>
                     </a:lnL>
                     <a:lnR w="9525" cap="flat" cmpd="sng" algn="ctr">
                       <a:solidFill>
-                        <a:srgbClr val="FAEEC6"/>
+                        <a:srgbClr val="D1FADC"/>
                       </a:solidFill>
                       <a:prstDash val="solid"/>
                     </a:lnR>
                     <a:lnT w="9525" cap="flat" cmpd="sng" algn="ctr">
                       <a:solidFill>
-                        <a:srgbClr val="FAEEC6"/>
+                        <a:srgbClr val="D1FADC"/>
                       </a:solidFill>
                       <a:prstDash val="solid"/>
                     </a:lnT>
                     <a:lnB w="9525" cap="flat" cmpd="sng" algn="ctr">
                       <a:solidFill>
-                        <a:srgbClr val="FAEEC6"/>
+                        <a:srgbClr val="D1FADC"/>
                       </a:solidFill>
                       <a:prstDash val="solid"/>
                     </a:lnB>
                     <a:solidFill>
-                      <a:srgbClr val="FDF9ED"/>
+                      <a:srgbClr val="EEFCF1"/>
                     </a:solidFill>
                   </a:tcPr>
                 </a:tc>
@@ -4236,30 +4236,30 @@
                   <a:tcPr anchor="ctr" marL="73152" marR="73152">
                     <a:lnL w="9525" cap="flat" cmpd="sng" algn="ctr">
                       <a:solidFill>
-                        <a:srgbClr val="FAEEC6"/>
+                        <a:srgbClr val="D1FADC"/>
                       </a:solidFill>
                       <a:prstDash val="solid"/>
                     </a:lnL>
                     <a:lnR w="9525" cap="flat" cmpd="sng" algn="ctr">
                       <a:solidFill>
-                        <a:srgbClr val="FAEEC6"/>
+                        <a:srgbClr val="D1FADC"/>
                       </a:solidFill>
                       <a:prstDash val="solid"/>
                     </a:lnR>
                     <a:lnT w="9525" cap="flat" cmpd="sng" algn="ctr">
                       <a:solidFill>
-                        <a:srgbClr val="FAEEC6"/>
+                        <a:srgbClr val="D1FADC"/>
                       </a:solidFill>
                       <a:prstDash val="solid"/>
                     </a:lnT>
                     <a:lnB w="9525" cap="flat" cmpd="sng" algn="ctr">
                       <a:solidFill>
-                        <a:srgbClr val="FAEEC6"/>
+                        <a:srgbClr val="D1FADC"/>
                       </a:solidFill>
                       <a:prstDash val="solid"/>
                     </a:lnB>
                     <a:solidFill>
-                      <a:srgbClr val="FDF9ED"/>
+                      <a:srgbClr val="EEFCF1"/>
                     </a:solidFill>
                   </a:tcPr>
                 </a:tc>
@@ -4282,7 +4282,7 @@
     <p:bg>
       <p:bgPr>
         <a:solidFill>
-          <a:srgbClr val="CAA016"/>
+          <a:srgbClr val="26C54E"/>
         </a:solidFill>
         <a:effectLst/>
       </p:bgPr>
@@ -4355,7 +4355,7 @@
             <a:r>
               <a:rPr sz="3000" b="1" i="0">
                 <a:solidFill>
-                  <a:srgbClr val="6E570C"/>
+                  <a:srgbClr val="115F25"/>
                 </a:solidFill>
               </a:rPr>
               <a:t>가입한 보험 목록</a:t>
@@ -4408,30 +4408,30 @@
                   <a:tcPr anchor="ctr" marL="73152" marR="73152">
                     <a:lnL w="9525" cap="flat" cmpd="sng" algn="ctr">
                       <a:solidFill>
-                        <a:srgbClr val="CAA016"/>
+                        <a:srgbClr val="26C54E"/>
                       </a:solidFill>
                       <a:prstDash val="solid"/>
                     </a:lnL>
                     <a:lnR w="9525" cap="flat" cmpd="sng" algn="ctr">
                       <a:solidFill>
-                        <a:srgbClr val="CAA016"/>
+                        <a:srgbClr val="26C54E"/>
                       </a:solidFill>
                       <a:prstDash val="solid"/>
                     </a:lnR>
                     <a:lnT w="9525" cap="flat" cmpd="sng" algn="ctr">
                       <a:solidFill>
-                        <a:srgbClr val="CAA016"/>
+                        <a:srgbClr val="26C54E"/>
                       </a:solidFill>
                       <a:prstDash val="solid"/>
                     </a:lnT>
                     <a:lnB w="9525" cap="flat" cmpd="sng" algn="ctr">
                       <a:solidFill>
-                        <a:srgbClr val="CAA016"/>
+                        <a:srgbClr val="26C54E"/>
                       </a:solidFill>
                       <a:prstDash val="solid"/>
                     </a:lnB>
                     <a:solidFill>
-                      <a:srgbClr val="CAA016"/>
+                      <a:srgbClr val="26C54E"/>
                     </a:solidFill>
                   </a:tcPr>
                 </a:tc>
@@ -4454,30 +4454,30 @@
                   <a:tcPr anchor="ctr" marL="73152" marR="73152">
                     <a:lnL w="9525" cap="flat" cmpd="sng" algn="ctr">
                       <a:solidFill>
-                        <a:srgbClr val="CAA016"/>
+                        <a:srgbClr val="26C54E"/>
                       </a:solidFill>
                       <a:prstDash val="solid"/>
                     </a:lnL>
                     <a:lnR w="9525" cap="flat" cmpd="sng" algn="ctr">
                       <a:solidFill>
-                        <a:srgbClr val="CAA016"/>
+                        <a:srgbClr val="26C54E"/>
                       </a:solidFill>
                       <a:prstDash val="solid"/>
                     </a:lnR>
                     <a:lnT w="9525" cap="flat" cmpd="sng" algn="ctr">
                       <a:solidFill>
-                        <a:srgbClr val="CAA016"/>
+                        <a:srgbClr val="26C54E"/>
                       </a:solidFill>
                       <a:prstDash val="solid"/>
                     </a:lnT>
                     <a:lnB w="9525" cap="flat" cmpd="sng" algn="ctr">
                       <a:solidFill>
-                        <a:srgbClr val="CAA016"/>
+                        <a:srgbClr val="26C54E"/>
                       </a:solidFill>
                       <a:prstDash val="solid"/>
                     </a:lnB>
                     <a:solidFill>
-                      <a:srgbClr val="CAA016"/>
+                      <a:srgbClr val="26C54E"/>
                     </a:solidFill>
                   </a:tcPr>
                 </a:tc>
@@ -4500,30 +4500,30 @@
                   <a:tcPr anchor="ctr" marL="73152" marR="73152">
                     <a:lnL w="9525" cap="flat" cmpd="sng" algn="ctr">
                       <a:solidFill>
-                        <a:srgbClr val="CAA016"/>
+                        <a:srgbClr val="26C54E"/>
                       </a:solidFill>
                       <a:prstDash val="solid"/>
                     </a:lnL>
                     <a:lnR w="9525" cap="flat" cmpd="sng" algn="ctr">
                       <a:solidFill>
-                        <a:srgbClr val="CAA016"/>
+                        <a:srgbClr val="26C54E"/>
                       </a:solidFill>
                       <a:prstDash val="solid"/>
                     </a:lnR>
                     <a:lnT w="9525" cap="flat" cmpd="sng" algn="ctr">
                       <a:solidFill>
-                        <a:srgbClr val="CAA016"/>
+                        <a:srgbClr val="26C54E"/>
                       </a:solidFill>
                       <a:prstDash val="solid"/>
                     </a:lnT>
                     <a:lnB w="9525" cap="flat" cmpd="sng" algn="ctr">
                       <a:solidFill>
-                        <a:srgbClr val="CAA016"/>
+                        <a:srgbClr val="26C54E"/>
                       </a:solidFill>
                       <a:prstDash val="solid"/>
                     </a:lnB>
                     <a:solidFill>
-                      <a:srgbClr val="CAA016"/>
+                      <a:srgbClr val="26C54E"/>
                     </a:solidFill>
                   </a:tcPr>
                 </a:tc>
@@ -4546,30 +4546,30 @@
                   <a:tcPr anchor="ctr" marL="73152" marR="73152">
                     <a:lnL w="9525" cap="flat" cmpd="sng" algn="ctr">
                       <a:solidFill>
-                        <a:srgbClr val="CAA016"/>
+                        <a:srgbClr val="26C54E"/>
                       </a:solidFill>
                       <a:prstDash val="solid"/>
                     </a:lnL>
                     <a:lnR w="9525" cap="flat" cmpd="sng" algn="ctr">
                       <a:solidFill>
-                        <a:srgbClr val="CAA016"/>
+                        <a:srgbClr val="26C54E"/>
                       </a:solidFill>
                       <a:prstDash val="solid"/>
                     </a:lnR>
                     <a:lnT w="9525" cap="flat" cmpd="sng" algn="ctr">
                       <a:solidFill>
-                        <a:srgbClr val="CAA016"/>
+                        <a:srgbClr val="26C54E"/>
                       </a:solidFill>
                       <a:prstDash val="solid"/>
                     </a:lnT>
                     <a:lnB w="9525" cap="flat" cmpd="sng" algn="ctr">
                       <a:solidFill>
-                        <a:srgbClr val="CAA016"/>
+                        <a:srgbClr val="26C54E"/>
                       </a:solidFill>
                       <a:prstDash val="solid"/>
                     </a:lnB>
                     <a:solidFill>
-                      <a:srgbClr val="CAA016"/>
+                      <a:srgbClr val="26C54E"/>
                     </a:solidFill>
                   </a:tcPr>
                 </a:tc>
@@ -4592,30 +4592,30 @@
                   <a:tcPr anchor="ctr" marL="73152" marR="73152">
                     <a:lnL w="9525" cap="flat" cmpd="sng" algn="ctr">
                       <a:solidFill>
-                        <a:srgbClr val="CAA016"/>
+                        <a:srgbClr val="26C54E"/>
                       </a:solidFill>
                       <a:prstDash val="solid"/>
                     </a:lnL>
                     <a:lnR w="9525" cap="flat" cmpd="sng" algn="ctr">
                       <a:solidFill>
-                        <a:srgbClr val="CAA016"/>
+                        <a:srgbClr val="26C54E"/>
                       </a:solidFill>
                       <a:prstDash val="solid"/>
                     </a:lnR>
                     <a:lnT w="9525" cap="flat" cmpd="sng" algn="ctr">
                       <a:solidFill>
-                        <a:srgbClr val="CAA016"/>
+                        <a:srgbClr val="26C54E"/>
                       </a:solidFill>
                       <a:prstDash val="solid"/>
                     </a:lnT>
                     <a:lnB w="9525" cap="flat" cmpd="sng" algn="ctr">
                       <a:solidFill>
-                        <a:srgbClr val="CAA016"/>
+                        <a:srgbClr val="26C54E"/>
                       </a:solidFill>
                       <a:prstDash val="solid"/>
                     </a:lnB>
                     <a:solidFill>
-                      <a:srgbClr val="CAA016"/>
+                      <a:srgbClr val="26C54E"/>
                     </a:solidFill>
                   </a:tcPr>
                 </a:tc>
@@ -4640,25 +4640,25 @@
                   <a:tcPr anchor="ctr" marL="73152" marR="73152">
                     <a:lnL w="9525" cap="flat" cmpd="sng" algn="ctr">
                       <a:solidFill>
-                        <a:srgbClr val="FAEEC6"/>
+                        <a:srgbClr val="D1FADC"/>
                       </a:solidFill>
                       <a:prstDash val="solid"/>
                     </a:lnL>
                     <a:lnR w="9525" cap="flat" cmpd="sng" algn="ctr">
                       <a:solidFill>
-                        <a:srgbClr val="FAEEC6"/>
+                        <a:srgbClr val="D1FADC"/>
                       </a:solidFill>
                       <a:prstDash val="solid"/>
                     </a:lnR>
                     <a:lnT w="9525" cap="flat" cmpd="sng" algn="ctr">
                       <a:solidFill>
-                        <a:srgbClr val="FAEEC6"/>
+                        <a:srgbClr val="D1FADC"/>
                       </a:solidFill>
                       <a:prstDash val="solid"/>
                     </a:lnT>
                     <a:lnB w="9525" cap="flat" cmpd="sng" algn="ctr">
                       <a:solidFill>
-                        <a:srgbClr val="FAEEC6"/>
+                        <a:srgbClr val="D1FADC"/>
                       </a:solidFill>
                       <a:prstDash val="solid"/>
                     </a:lnB>
@@ -4686,25 +4686,25 @@
                   <a:tcPr anchor="ctr" marL="73152" marR="73152">
                     <a:lnL w="9525" cap="flat" cmpd="sng" algn="ctr">
                       <a:solidFill>
-                        <a:srgbClr val="FAEEC6"/>
+                        <a:srgbClr val="D1FADC"/>
                       </a:solidFill>
                       <a:prstDash val="solid"/>
                     </a:lnL>
                     <a:lnR w="9525" cap="flat" cmpd="sng" algn="ctr">
                       <a:solidFill>
-                        <a:srgbClr val="FAEEC6"/>
+                        <a:srgbClr val="D1FADC"/>
                       </a:solidFill>
                       <a:prstDash val="solid"/>
                     </a:lnR>
                     <a:lnT w="9525" cap="flat" cmpd="sng" algn="ctr">
                       <a:solidFill>
-                        <a:srgbClr val="FAEEC6"/>
+                        <a:srgbClr val="D1FADC"/>
                       </a:solidFill>
                       <a:prstDash val="solid"/>
                     </a:lnT>
                     <a:lnB w="9525" cap="flat" cmpd="sng" algn="ctr">
                       <a:solidFill>
-                        <a:srgbClr val="FAEEC6"/>
+                        <a:srgbClr val="D1FADC"/>
                       </a:solidFill>
                       <a:prstDash val="solid"/>
                     </a:lnB>
@@ -4732,25 +4732,25 @@
                   <a:tcPr anchor="ctr" marL="73152" marR="73152">
                     <a:lnL w="9525" cap="flat" cmpd="sng" algn="ctr">
                       <a:solidFill>
-                        <a:srgbClr val="FAEEC6"/>
+                        <a:srgbClr val="D1FADC"/>
                       </a:solidFill>
                       <a:prstDash val="solid"/>
                     </a:lnL>
                     <a:lnR w="9525" cap="flat" cmpd="sng" algn="ctr">
                       <a:solidFill>
-                        <a:srgbClr val="FAEEC6"/>
+                        <a:srgbClr val="D1FADC"/>
                       </a:solidFill>
                       <a:prstDash val="solid"/>
                     </a:lnR>
                     <a:lnT w="9525" cap="flat" cmpd="sng" algn="ctr">
                       <a:solidFill>
-                        <a:srgbClr val="FAEEC6"/>
+                        <a:srgbClr val="D1FADC"/>
                       </a:solidFill>
                       <a:prstDash val="solid"/>
                     </a:lnT>
                     <a:lnB w="9525" cap="flat" cmpd="sng" algn="ctr">
                       <a:solidFill>
-                        <a:srgbClr val="FAEEC6"/>
+                        <a:srgbClr val="D1FADC"/>
                       </a:solidFill>
                       <a:prstDash val="solid"/>
                     </a:lnB>
@@ -4778,25 +4778,25 @@
                   <a:tcPr anchor="ctr" marL="73152" marR="73152">
                     <a:lnL w="9525" cap="flat" cmpd="sng" algn="ctr">
                       <a:solidFill>
-                        <a:srgbClr val="FAEEC6"/>
+                        <a:srgbClr val="D1FADC"/>
                       </a:solidFill>
                       <a:prstDash val="solid"/>
                     </a:lnL>
                     <a:lnR w="9525" cap="flat" cmpd="sng" algn="ctr">
                       <a:solidFill>
-                        <a:srgbClr val="FAEEC6"/>
+                        <a:srgbClr val="D1FADC"/>
                       </a:solidFill>
                       <a:prstDash val="solid"/>
                     </a:lnR>
                     <a:lnT w="9525" cap="flat" cmpd="sng" algn="ctr">
                       <a:solidFill>
-                        <a:srgbClr val="FAEEC6"/>
+                        <a:srgbClr val="D1FADC"/>
                       </a:solidFill>
                       <a:prstDash val="solid"/>
                     </a:lnT>
                     <a:lnB w="9525" cap="flat" cmpd="sng" algn="ctr">
                       <a:solidFill>
-                        <a:srgbClr val="FAEEC6"/>
+                        <a:srgbClr val="D1FADC"/>
                       </a:solidFill>
                       <a:prstDash val="solid"/>
                     </a:lnB>
@@ -4824,25 +4824,25 @@
                   <a:tcPr anchor="ctr" marL="73152" marR="73152">
                     <a:lnL w="9525" cap="flat" cmpd="sng" algn="ctr">
                       <a:solidFill>
-                        <a:srgbClr val="FAEEC6"/>
+                        <a:srgbClr val="D1FADC"/>
                       </a:solidFill>
                       <a:prstDash val="solid"/>
                     </a:lnL>
                     <a:lnR w="9525" cap="flat" cmpd="sng" algn="ctr">
                       <a:solidFill>
-                        <a:srgbClr val="FAEEC6"/>
+                        <a:srgbClr val="D1FADC"/>
                       </a:solidFill>
                       <a:prstDash val="solid"/>
                     </a:lnR>
                     <a:lnT w="9525" cap="flat" cmpd="sng" algn="ctr">
                       <a:solidFill>
-                        <a:srgbClr val="FAEEC6"/>
+                        <a:srgbClr val="D1FADC"/>
                       </a:solidFill>
                       <a:prstDash val="solid"/>
                     </a:lnT>
                     <a:lnB w="9525" cap="flat" cmpd="sng" algn="ctr">
                       <a:solidFill>
-                        <a:srgbClr val="FAEEC6"/>
+                        <a:srgbClr val="D1FADC"/>
                       </a:solidFill>
                       <a:prstDash val="solid"/>
                     </a:lnB>
@@ -4872,30 +4872,30 @@
                   <a:tcPr anchor="ctr" marL="73152" marR="73152">
                     <a:lnL w="9525" cap="flat" cmpd="sng" algn="ctr">
                       <a:solidFill>
-                        <a:srgbClr val="FAEEC6"/>
+                        <a:srgbClr val="D1FADC"/>
                       </a:solidFill>
                       <a:prstDash val="solid"/>
                     </a:lnL>
                     <a:lnR w="9525" cap="flat" cmpd="sng" algn="ctr">
                       <a:solidFill>
-                        <a:srgbClr val="FAEEC6"/>
+                        <a:srgbClr val="D1FADC"/>
                       </a:solidFill>
                       <a:prstDash val="solid"/>
                     </a:lnR>
                     <a:lnT w="9525" cap="flat" cmpd="sng" algn="ctr">
                       <a:solidFill>
-                        <a:srgbClr val="FAEEC6"/>
+                        <a:srgbClr val="D1FADC"/>
                       </a:solidFill>
                       <a:prstDash val="solid"/>
                     </a:lnT>
                     <a:lnB w="9525" cap="flat" cmpd="sng" algn="ctr">
                       <a:solidFill>
-                        <a:srgbClr val="FAEEC6"/>
+                        <a:srgbClr val="D1FADC"/>
                       </a:solidFill>
                       <a:prstDash val="solid"/>
                     </a:lnB>
                     <a:solidFill>
-                      <a:srgbClr val="FDF9ED"/>
+                      <a:srgbClr val="EEFCF1"/>
                     </a:solidFill>
                   </a:tcPr>
                 </a:tc>
@@ -4918,30 +4918,30 @@
                   <a:tcPr anchor="ctr" marL="73152" marR="73152">
                     <a:lnL w="9525" cap="flat" cmpd="sng" algn="ctr">
                       <a:solidFill>
-                        <a:srgbClr val="FAEEC6"/>
+                        <a:srgbClr val="D1FADC"/>
                       </a:solidFill>
                       <a:prstDash val="solid"/>
                     </a:lnL>
                     <a:lnR w="9525" cap="flat" cmpd="sng" algn="ctr">
                       <a:solidFill>
-                        <a:srgbClr val="FAEEC6"/>
+                        <a:srgbClr val="D1FADC"/>
                       </a:solidFill>
                       <a:prstDash val="solid"/>
                     </a:lnR>
                     <a:lnT w="9525" cap="flat" cmpd="sng" algn="ctr">
                       <a:solidFill>
-                        <a:srgbClr val="FAEEC6"/>
+                        <a:srgbClr val="D1FADC"/>
                       </a:solidFill>
                       <a:prstDash val="solid"/>
                     </a:lnT>
                     <a:lnB w="9525" cap="flat" cmpd="sng" algn="ctr">
                       <a:solidFill>
-                        <a:srgbClr val="FAEEC6"/>
+                        <a:srgbClr val="D1FADC"/>
                       </a:solidFill>
                       <a:prstDash val="solid"/>
                     </a:lnB>
                     <a:solidFill>
-                      <a:srgbClr val="FDF9ED"/>
+                      <a:srgbClr val="EEFCF1"/>
                     </a:solidFill>
                   </a:tcPr>
                 </a:tc>
@@ -4964,30 +4964,30 @@
                   <a:tcPr anchor="ctr" marL="73152" marR="73152">
                     <a:lnL w="9525" cap="flat" cmpd="sng" algn="ctr">
                       <a:solidFill>
-                        <a:srgbClr val="FAEEC6"/>
+                        <a:srgbClr val="D1FADC"/>
                       </a:solidFill>
                       <a:prstDash val="solid"/>
                     </a:lnL>
                     <a:lnR w="9525" cap="flat" cmpd="sng" algn="ctr">
                       <a:solidFill>
-                        <a:srgbClr val="FAEEC6"/>
+                        <a:srgbClr val="D1FADC"/>
                       </a:solidFill>
                       <a:prstDash val="solid"/>
                     </a:lnR>
                     <a:lnT w="9525" cap="flat" cmpd="sng" algn="ctr">
                       <a:solidFill>
-                        <a:srgbClr val="FAEEC6"/>
+                        <a:srgbClr val="D1FADC"/>
                       </a:solidFill>
                       <a:prstDash val="solid"/>
                     </a:lnT>
                     <a:lnB w="9525" cap="flat" cmpd="sng" algn="ctr">
                       <a:solidFill>
-                        <a:srgbClr val="FAEEC6"/>
+                        <a:srgbClr val="D1FADC"/>
                       </a:solidFill>
                       <a:prstDash val="solid"/>
                     </a:lnB>
                     <a:solidFill>
-                      <a:srgbClr val="FDF9ED"/>
+                      <a:srgbClr val="EEFCF1"/>
                     </a:solidFill>
                   </a:tcPr>
                 </a:tc>
@@ -5010,30 +5010,30 @@
                   <a:tcPr anchor="ctr" marL="73152" marR="73152">
                     <a:lnL w="9525" cap="flat" cmpd="sng" algn="ctr">
                       <a:solidFill>
-                        <a:srgbClr val="FAEEC6"/>
+                        <a:srgbClr val="D1FADC"/>
                       </a:solidFill>
                       <a:prstDash val="solid"/>
                     </a:lnL>
                     <a:lnR w="9525" cap="flat" cmpd="sng" algn="ctr">
                       <a:solidFill>
-                        <a:srgbClr val="FAEEC6"/>
+                        <a:srgbClr val="D1FADC"/>
                       </a:solidFill>
                       <a:prstDash val="solid"/>
                     </a:lnR>
                     <a:lnT w="9525" cap="flat" cmpd="sng" algn="ctr">
                       <a:solidFill>
-                        <a:srgbClr val="FAEEC6"/>
+                        <a:srgbClr val="D1FADC"/>
                       </a:solidFill>
                       <a:prstDash val="solid"/>
                     </a:lnT>
                     <a:lnB w="9525" cap="flat" cmpd="sng" algn="ctr">
                       <a:solidFill>
-                        <a:srgbClr val="FAEEC6"/>
+                        <a:srgbClr val="D1FADC"/>
                       </a:solidFill>
                       <a:prstDash val="solid"/>
                     </a:lnB>
                     <a:solidFill>
-                      <a:srgbClr val="FDF9ED"/>
+                      <a:srgbClr val="EEFCF1"/>
                     </a:solidFill>
                   </a:tcPr>
                 </a:tc>
@@ -5056,30 +5056,30 @@
                   <a:tcPr anchor="ctr" marL="73152" marR="73152">
                     <a:lnL w="9525" cap="flat" cmpd="sng" algn="ctr">
                       <a:solidFill>
-                        <a:srgbClr val="FAEEC6"/>
+                        <a:srgbClr val="D1FADC"/>
                       </a:solidFill>
                       <a:prstDash val="solid"/>
                     </a:lnL>
                     <a:lnR w="9525" cap="flat" cmpd="sng" algn="ctr">
                       <a:solidFill>
-                        <a:srgbClr val="FAEEC6"/>
+                        <a:srgbClr val="D1FADC"/>
                       </a:solidFill>
                       <a:prstDash val="solid"/>
                     </a:lnR>
                     <a:lnT w="9525" cap="flat" cmpd="sng" algn="ctr">
                       <a:solidFill>
-                        <a:srgbClr val="FAEEC6"/>
+                        <a:srgbClr val="D1FADC"/>
                       </a:solidFill>
                       <a:prstDash val="solid"/>
                     </a:lnT>
                     <a:lnB w="9525" cap="flat" cmpd="sng" algn="ctr">
                       <a:solidFill>
-                        <a:srgbClr val="FAEEC6"/>
+                        <a:srgbClr val="D1FADC"/>
                       </a:solidFill>
                       <a:prstDash val="solid"/>
                     </a:lnB>
                     <a:solidFill>
-                      <a:srgbClr val="FDF9ED"/>
+                      <a:srgbClr val="EEFCF1"/>
                     </a:solidFill>
                   </a:tcPr>
                 </a:tc>
@@ -5104,25 +5104,25 @@
                   <a:tcPr anchor="ctr" marL="73152" marR="73152">
                     <a:lnL w="9525" cap="flat" cmpd="sng" algn="ctr">
                       <a:solidFill>
-                        <a:srgbClr val="FAEEC6"/>
+                        <a:srgbClr val="D1FADC"/>
                       </a:solidFill>
                       <a:prstDash val="solid"/>
                     </a:lnL>
                     <a:lnR w="9525" cap="flat" cmpd="sng" algn="ctr">
                       <a:solidFill>
-                        <a:srgbClr val="FAEEC6"/>
+                        <a:srgbClr val="D1FADC"/>
                       </a:solidFill>
                       <a:prstDash val="solid"/>
                     </a:lnR>
                     <a:lnT w="9525" cap="flat" cmpd="sng" algn="ctr">
                       <a:solidFill>
-                        <a:srgbClr val="FAEEC6"/>
+                        <a:srgbClr val="D1FADC"/>
                       </a:solidFill>
                       <a:prstDash val="solid"/>
                     </a:lnT>
                     <a:lnB w="9525" cap="flat" cmpd="sng" algn="ctr">
                       <a:solidFill>
-                        <a:srgbClr val="FAEEC6"/>
+                        <a:srgbClr val="D1FADC"/>
                       </a:solidFill>
                       <a:prstDash val="solid"/>
                     </a:lnB>
@@ -5150,25 +5150,25 @@
                   <a:tcPr anchor="ctr" marL="73152" marR="73152">
                     <a:lnL w="9525" cap="flat" cmpd="sng" algn="ctr">
                       <a:solidFill>
-                        <a:srgbClr val="FAEEC6"/>
+                        <a:srgbClr val="D1FADC"/>
                       </a:solidFill>
                       <a:prstDash val="solid"/>
                     </a:lnL>
                     <a:lnR w="9525" cap="flat" cmpd="sng" algn="ctr">
                       <a:solidFill>
-                        <a:srgbClr val="FAEEC6"/>
+                        <a:srgbClr val="D1FADC"/>
                       </a:solidFill>
                       <a:prstDash val="solid"/>
                     </a:lnR>
                     <a:lnT w="9525" cap="flat" cmpd="sng" algn="ctr">
                       <a:solidFill>
-                        <a:srgbClr val="FAEEC6"/>
+                        <a:srgbClr val="D1FADC"/>
                       </a:solidFill>
                       <a:prstDash val="solid"/>
                     </a:lnT>
                     <a:lnB w="9525" cap="flat" cmpd="sng" algn="ctr">
                       <a:solidFill>
-                        <a:srgbClr val="FAEEC6"/>
+                        <a:srgbClr val="D1FADC"/>
                       </a:solidFill>
                       <a:prstDash val="solid"/>
                     </a:lnB>
@@ -5196,25 +5196,25 @@
                   <a:tcPr anchor="ctr" marL="73152" marR="73152">
                     <a:lnL w="9525" cap="flat" cmpd="sng" algn="ctr">
                       <a:solidFill>
-                        <a:srgbClr val="FAEEC6"/>
+                        <a:srgbClr val="D1FADC"/>
                       </a:solidFill>
                       <a:prstDash val="solid"/>
                     </a:lnL>
                     <a:lnR w="9525" cap="flat" cmpd="sng" algn="ctr">
                       <a:solidFill>
-                        <a:srgbClr val="FAEEC6"/>
+                        <a:srgbClr val="D1FADC"/>
                       </a:solidFill>
                       <a:prstDash val="solid"/>
                     </a:lnR>
                     <a:lnT w="9525" cap="flat" cmpd="sng" algn="ctr">
                       <a:solidFill>
-                        <a:srgbClr val="FAEEC6"/>
+                        <a:srgbClr val="D1FADC"/>
                       </a:solidFill>
                       <a:prstDash val="solid"/>
                     </a:lnT>
                     <a:lnB w="9525" cap="flat" cmpd="sng" algn="ctr">
                       <a:solidFill>
-                        <a:srgbClr val="FAEEC6"/>
+                        <a:srgbClr val="D1FADC"/>
                       </a:solidFill>
                       <a:prstDash val="solid"/>
                     </a:lnB>
@@ -5242,25 +5242,25 @@
                   <a:tcPr anchor="ctr" marL="73152" marR="73152">
                     <a:lnL w="9525" cap="flat" cmpd="sng" algn="ctr">
                       <a:solidFill>
-                        <a:srgbClr val="FAEEC6"/>
+                        <a:srgbClr val="D1FADC"/>
                       </a:solidFill>
                       <a:prstDash val="solid"/>
                     </a:lnL>
                     <a:lnR w="9525" cap="flat" cmpd="sng" algn="ctr">
                       <a:solidFill>
-                        <a:srgbClr val="FAEEC6"/>
+                        <a:srgbClr val="D1FADC"/>
                       </a:solidFill>
                       <a:prstDash val="solid"/>
                     </a:lnR>
                     <a:lnT w="9525" cap="flat" cmpd="sng" algn="ctr">
                       <a:solidFill>
-                        <a:srgbClr val="FAEEC6"/>
+                        <a:srgbClr val="D1FADC"/>
                       </a:solidFill>
                       <a:prstDash val="solid"/>
                     </a:lnT>
                     <a:lnB w="9525" cap="flat" cmpd="sng" algn="ctr">
                       <a:solidFill>
-                        <a:srgbClr val="FAEEC6"/>
+                        <a:srgbClr val="D1FADC"/>
                       </a:solidFill>
                       <a:prstDash val="solid"/>
                     </a:lnB>
@@ -5288,25 +5288,25 @@
                   <a:tcPr anchor="ctr" marL="73152" marR="73152">
                     <a:lnL w="9525" cap="flat" cmpd="sng" algn="ctr">
                       <a:solidFill>
-                        <a:srgbClr val="FAEEC6"/>
+                        <a:srgbClr val="D1FADC"/>
                       </a:solidFill>
                       <a:prstDash val="solid"/>
                     </a:lnL>
                     <a:lnR w="9525" cap="flat" cmpd="sng" algn="ctr">
                       <a:solidFill>
-                        <a:srgbClr val="FAEEC6"/>
+                        <a:srgbClr val="D1FADC"/>
                       </a:solidFill>
                       <a:prstDash val="solid"/>
                     </a:lnR>
                     <a:lnT w="9525" cap="flat" cmpd="sng" algn="ctr">
                       <a:solidFill>
-                        <a:srgbClr val="FAEEC6"/>
+                        <a:srgbClr val="D1FADC"/>
                       </a:solidFill>
                       <a:prstDash val="solid"/>
                     </a:lnT>
                     <a:lnB w="9525" cap="flat" cmpd="sng" algn="ctr">
                       <a:solidFill>
-                        <a:srgbClr val="FAEEC6"/>
+                        <a:srgbClr val="D1FADC"/>
                       </a:solidFill>
                       <a:prstDash val="solid"/>
                     </a:lnB>
@@ -5336,30 +5336,30 @@
                   <a:tcPr anchor="ctr" marL="73152" marR="73152">
                     <a:lnL w="9525" cap="flat" cmpd="sng" algn="ctr">
                       <a:solidFill>
-                        <a:srgbClr val="FAEEC6"/>
+                        <a:srgbClr val="D1FADC"/>
                       </a:solidFill>
                       <a:prstDash val="solid"/>
                     </a:lnL>
                     <a:lnR w="9525" cap="flat" cmpd="sng" algn="ctr">
                       <a:solidFill>
-                        <a:srgbClr val="FAEEC6"/>
+                        <a:srgbClr val="D1FADC"/>
                       </a:solidFill>
                       <a:prstDash val="solid"/>
                     </a:lnR>
                     <a:lnT w="9525" cap="flat" cmpd="sng" algn="ctr">
                       <a:solidFill>
-                        <a:srgbClr val="FAEEC6"/>
+                        <a:srgbClr val="D1FADC"/>
                       </a:solidFill>
                       <a:prstDash val="solid"/>
                     </a:lnT>
                     <a:lnB w="9525" cap="flat" cmpd="sng" algn="ctr">
                       <a:solidFill>
-                        <a:srgbClr val="FAEEC6"/>
+                        <a:srgbClr val="D1FADC"/>
                       </a:solidFill>
                       <a:prstDash val="solid"/>
                     </a:lnB>
                     <a:solidFill>
-                      <a:srgbClr val="FDF9ED"/>
+                      <a:srgbClr val="EEFCF1"/>
                     </a:solidFill>
                   </a:tcPr>
                 </a:tc>
@@ -5382,30 +5382,30 @@
                   <a:tcPr anchor="ctr" marL="73152" marR="73152">
                     <a:lnL w="9525" cap="flat" cmpd="sng" algn="ctr">
                       <a:solidFill>
-                        <a:srgbClr val="FAEEC6"/>
+                        <a:srgbClr val="D1FADC"/>
                       </a:solidFill>
                       <a:prstDash val="solid"/>
                     </a:lnL>
                     <a:lnR w="9525" cap="flat" cmpd="sng" algn="ctr">
                       <a:solidFill>
-                        <a:srgbClr val="FAEEC6"/>
+                        <a:srgbClr val="D1FADC"/>
                       </a:solidFill>
                       <a:prstDash val="solid"/>
                     </a:lnR>
                     <a:lnT w="9525" cap="flat" cmpd="sng" algn="ctr">
                       <a:solidFill>
-                        <a:srgbClr val="FAEEC6"/>
+                        <a:srgbClr val="D1FADC"/>
                       </a:solidFill>
                       <a:prstDash val="solid"/>
                     </a:lnT>
                     <a:lnB w="9525" cap="flat" cmpd="sng" algn="ctr">
                       <a:solidFill>
-                        <a:srgbClr val="FAEEC6"/>
+                        <a:srgbClr val="D1FADC"/>
                       </a:solidFill>
                       <a:prstDash val="solid"/>
                     </a:lnB>
                     <a:solidFill>
-                      <a:srgbClr val="FDF9ED"/>
+                      <a:srgbClr val="EEFCF1"/>
                     </a:solidFill>
                   </a:tcPr>
                 </a:tc>
@@ -5428,30 +5428,30 @@
                   <a:tcPr anchor="ctr" marL="73152" marR="73152">
                     <a:lnL w="9525" cap="flat" cmpd="sng" algn="ctr">
                       <a:solidFill>
-                        <a:srgbClr val="FAEEC6"/>
+                        <a:srgbClr val="D1FADC"/>
                       </a:solidFill>
                       <a:prstDash val="solid"/>
                     </a:lnL>
                     <a:lnR w="9525" cap="flat" cmpd="sng" algn="ctr">
                       <a:solidFill>
-                        <a:srgbClr val="FAEEC6"/>
+                        <a:srgbClr val="D1FADC"/>
                       </a:solidFill>
                       <a:prstDash val="solid"/>
                     </a:lnR>
                     <a:lnT w="9525" cap="flat" cmpd="sng" algn="ctr">
                       <a:solidFill>
-                        <a:srgbClr val="FAEEC6"/>
+                        <a:srgbClr val="D1FADC"/>
                       </a:solidFill>
                       <a:prstDash val="solid"/>
                     </a:lnT>
                     <a:lnB w="9525" cap="flat" cmpd="sng" algn="ctr">
                       <a:solidFill>
-                        <a:srgbClr val="FAEEC6"/>
+                        <a:srgbClr val="D1FADC"/>
                       </a:solidFill>
                       <a:prstDash val="solid"/>
                     </a:lnB>
                     <a:solidFill>
-                      <a:srgbClr val="FDF9ED"/>
+                      <a:srgbClr val="EEFCF1"/>
                     </a:solidFill>
                   </a:tcPr>
                 </a:tc>
@@ -5474,30 +5474,30 @@
                   <a:tcPr anchor="ctr" marL="73152" marR="73152">
                     <a:lnL w="9525" cap="flat" cmpd="sng" algn="ctr">
                       <a:solidFill>
-                        <a:srgbClr val="FAEEC6"/>
+                        <a:srgbClr val="D1FADC"/>
                       </a:solidFill>
                       <a:prstDash val="solid"/>
                     </a:lnL>
                     <a:lnR w="9525" cap="flat" cmpd="sng" algn="ctr">
                       <a:solidFill>
-                        <a:srgbClr val="FAEEC6"/>
+                        <a:srgbClr val="D1FADC"/>
                       </a:solidFill>
                       <a:prstDash val="solid"/>
                     </a:lnR>
                     <a:lnT w="9525" cap="flat" cmpd="sng" algn="ctr">
                       <a:solidFill>
-                        <a:srgbClr val="FAEEC6"/>
+                        <a:srgbClr val="D1FADC"/>
                       </a:solidFill>
                       <a:prstDash val="solid"/>
                     </a:lnT>
                     <a:lnB w="9525" cap="flat" cmpd="sng" algn="ctr">
                       <a:solidFill>
-                        <a:srgbClr val="FAEEC6"/>
+                        <a:srgbClr val="D1FADC"/>
                       </a:solidFill>
                       <a:prstDash val="solid"/>
                     </a:lnB>
                     <a:solidFill>
-                      <a:srgbClr val="FDF9ED"/>
+                      <a:srgbClr val="EEFCF1"/>
                     </a:solidFill>
                   </a:tcPr>
                 </a:tc>
@@ -5520,30 +5520,30 @@
                   <a:tcPr anchor="ctr" marL="73152" marR="73152">
                     <a:lnL w="9525" cap="flat" cmpd="sng" algn="ctr">
                       <a:solidFill>
-                        <a:srgbClr val="FAEEC6"/>
+                        <a:srgbClr val="D1FADC"/>
                       </a:solidFill>
                       <a:prstDash val="solid"/>
                     </a:lnL>
                     <a:lnR w="9525" cap="flat" cmpd="sng" algn="ctr">
                       <a:solidFill>
-                        <a:srgbClr val="FAEEC6"/>
+                        <a:srgbClr val="D1FADC"/>
                       </a:solidFill>
                       <a:prstDash val="solid"/>
                     </a:lnR>
                     <a:lnT w="9525" cap="flat" cmpd="sng" algn="ctr">
                       <a:solidFill>
-                        <a:srgbClr val="FAEEC6"/>
+                        <a:srgbClr val="D1FADC"/>
                       </a:solidFill>
                       <a:prstDash val="solid"/>
                     </a:lnT>
                     <a:lnB w="9525" cap="flat" cmpd="sng" algn="ctr">
                       <a:solidFill>
-                        <a:srgbClr val="FAEEC6"/>
+                        <a:srgbClr val="D1FADC"/>
                       </a:solidFill>
                       <a:prstDash val="solid"/>
                     </a:lnB>
                     <a:solidFill>
-                      <a:srgbClr val="FDF9ED"/>
+                      <a:srgbClr val="EEFCF1"/>
                     </a:solidFill>
                   </a:tcPr>
                 </a:tc>
@@ -5568,25 +5568,25 @@
                   <a:tcPr anchor="ctr" marL="73152" marR="73152">
                     <a:lnL w="9525" cap="flat" cmpd="sng" algn="ctr">
                       <a:solidFill>
-                        <a:srgbClr val="FAEEC6"/>
+                        <a:srgbClr val="D1FADC"/>
                       </a:solidFill>
                       <a:prstDash val="solid"/>
                     </a:lnL>
                     <a:lnR w="9525" cap="flat" cmpd="sng" algn="ctr">
                       <a:solidFill>
-                        <a:srgbClr val="FAEEC6"/>
+                        <a:srgbClr val="D1FADC"/>
                       </a:solidFill>
                       <a:prstDash val="solid"/>
                     </a:lnR>
                     <a:lnT w="9525" cap="flat" cmpd="sng" algn="ctr">
                       <a:solidFill>
-                        <a:srgbClr val="FAEEC6"/>
+                        <a:srgbClr val="D1FADC"/>
                       </a:solidFill>
                       <a:prstDash val="solid"/>
                     </a:lnT>
                     <a:lnB w="9525" cap="flat" cmpd="sng" algn="ctr">
                       <a:solidFill>
-                        <a:srgbClr val="FAEEC6"/>
+                        <a:srgbClr val="D1FADC"/>
                       </a:solidFill>
                       <a:prstDash val="solid"/>
                     </a:lnB>
@@ -5614,25 +5614,25 @@
                   <a:tcPr anchor="ctr" marL="73152" marR="73152">
                     <a:lnL w="9525" cap="flat" cmpd="sng" algn="ctr">
                       <a:solidFill>
-                        <a:srgbClr val="FAEEC6"/>
+                        <a:srgbClr val="D1FADC"/>
                       </a:solidFill>
                       <a:prstDash val="solid"/>
                     </a:lnL>
                     <a:lnR w="9525" cap="flat" cmpd="sng" algn="ctr">
                       <a:solidFill>
-                        <a:srgbClr val="FAEEC6"/>
+                        <a:srgbClr val="D1FADC"/>
                       </a:solidFill>
                       <a:prstDash val="solid"/>
                     </a:lnR>
                     <a:lnT w="9525" cap="flat" cmpd="sng" algn="ctr">
                       <a:solidFill>
-                        <a:srgbClr val="FAEEC6"/>
+                        <a:srgbClr val="D1FADC"/>
                       </a:solidFill>
                       <a:prstDash val="solid"/>
                     </a:lnT>
                     <a:lnB w="9525" cap="flat" cmpd="sng" algn="ctr">
                       <a:solidFill>
-                        <a:srgbClr val="FAEEC6"/>
+                        <a:srgbClr val="D1FADC"/>
                       </a:solidFill>
                       <a:prstDash val="solid"/>
                     </a:lnB>
@@ -5660,25 +5660,25 @@
                   <a:tcPr anchor="ctr" marL="73152" marR="73152">
                     <a:lnL w="9525" cap="flat" cmpd="sng" algn="ctr">
                       <a:solidFill>
-                        <a:srgbClr val="FAEEC6"/>
+                        <a:srgbClr val="D1FADC"/>
                       </a:solidFill>
                       <a:prstDash val="solid"/>
                     </a:lnL>
                     <a:lnR w="9525" cap="flat" cmpd="sng" algn="ctr">
                       <a:solidFill>
-                        <a:srgbClr val="FAEEC6"/>
+                        <a:srgbClr val="D1FADC"/>
                       </a:solidFill>
                       <a:prstDash val="solid"/>
                     </a:lnR>
                     <a:lnT w="9525" cap="flat" cmpd="sng" algn="ctr">
                       <a:solidFill>
-                        <a:srgbClr val="FAEEC6"/>
+                        <a:srgbClr val="D1FADC"/>
                       </a:solidFill>
                       <a:prstDash val="solid"/>
                     </a:lnT>
                     <a:lnB w="9525" cap="flat" cmpd="sng" algn="ctr">
                       <a:solidFill>
-                        <a:srgbClr val="FAEEC6"/>
+                        <a:srgbClr val="D1FADC"/>
                       </a:solidFill>
                       <a:prstDash val="solid"/>
                     </a:lnB>
@@ -5706,25 +5706,25 @@
                   <a:tcPr anchor="ctr" marL="73152" marR="73152">
                     <a:lnL w="9525" cap="flat" cmpd="sng" algn="ctr">
                       <a:solidFill>
-                        <a:srgbClr val="FAEEC6"/>
+                        <a:srgbClr val="D1FADC"/>
                       </a:solidFill>
                       <a:prstDash val="solid"/>
                     </a:lnL>
                     <a:lnR w="9525" cap="flat" cmpd="sng" algn="ctr">
                       <a:solidFill>
-                        <a:srgbClr val="FAEEC6"/>
+                        <a:srgbClr val="D1FADC"/>
                       </a:solidFill>
                       <a:prstDash val="solid"/>
                     </a:lnR>
                     <a:lnT w="9525" cap="flat" cmpd="sng" algn="ctr">
                       <a:solidFill>
-                        <a:srgbClr val="FAEEC6"/>
+                        <a:srgbClr val="D1FADC"/>
                       </a:solidFill>
                       <a:prstDash val="solid"/>
                     </a:lnT>
                     <a:lnB w="9525" cap="flat" cmpd="sng" algn="ctr">
                       <a:solidFill>
-                        <a:srgbClr val="FAEEC6"/>
+                        <a:srgbClr val="D1FADC"/>
                       </a:solidFill>
                       <a:prstDash val="solid"/>
                     </a:lnB>
@@ -5752,25 +5752,25 @@
                   <a:tcPr anchor="ctr" marL="73152" marR="73152">
                     <a:lnL w="9525" cap="flat" cmpd="sng" algn="ctr">
                       <a:solidFill>
-                        <a:srgbClr val="FAEEC6"/>
+                        <a:srgbClr val="D1FADC"/>
                       </a:solidFill>
                       <a:prstDash val="solid"/>
                     </a:lnL>
                     <a:lnR w="9525" cap="flat" cmpd="sng" algn="ctr">
                       <a:solidFill>
-                        <a:srgbClr val="FAEEC6"/>
+                        <a:srgbClr val="D1FADC"/>
                       </a:solidFill>
                       <a:prstDash val="solid"/>
                     </a:lnR>
                     <a:lnT w="9525" cap="flat" cmpd="sng" algn="ctr">
                       <a:solidFill>
-                        <a:srgbClr val="FAEEC6"/>
+                        <a:srgbClr val="D1FADC"/>
                       </a:solidFill>
                       <a:prstDash val="solid"/>
                     </a:lnT>
                     <a:lnB w="9525" cap="flat" cmpd="sng" algn="ctr">
                       <a:solidFill>
-                        <a:srgbClr val="FAEEC6"/>
+                        <a:srgbClr val="D1FADC"/>
                       </a:solidFill>
                       <a:prstDash val="solid"/>
                     </a:lnB>
@@ -5800,30 +5800,30 @@
                   <a:tcPr anchor="ctr" marL="73152" marR="73152">
                     <a:lnL w="9525" cap="flat" cmpd="sng" algn="ctr">
                       <a:solidFill>
-                        <a:srgbClr val="FAEEC6"/>
+                        <a:srgbClr val="D1FADC"/>
                       </a:solidFill>
                       <a:prstDash val="solid"/>
                     </a:lnL>
                     <a:lnR w="9525" cap="flat" cmpd="sng" algn="ctr">
                       <a:solidFill>
-                        <a:srgbClr val="FAEEC6"/>
+                        <a:srgbClr val="D1FADC"/>
                       </a:solidFill>
                       <a:prstDash val="solid"/>
                     </a:lnR>
                     <a:lnT w="9525" cap="flat" cmpd="sng" algn="ctr">
                       <a:solidFill>
-                        <a:srgbClr val="FAEEC6"/>
+                        <a:srgbClr val="D1FADC"/>
                       </a:solidFill>
                       <a:prstDash val="solid"/>
                     </a:lnT>
                     <a:lnB w="9525" cap="flat" cmpd="sng" algn="ctr">
                       <a:solidFill>
-                        <a:srgbClr val="FAEEC6"/>
+                        <a:srgbClr val="D1FADC"/>
                       </a:solidFill>
                       <a:prstDash val="solid"/>
                     </a:lnB>
                     <a:solidFill>
-                      <a:srgbClr val="FDF9ED"/>
+                      <a:srgbClr val="EEFCF1"/>
                     </a:solidFill>
                   </a:tcPr>
                 </a:tc>
@@ -5846,30 +5846,30 @@
                   <a:tcPr anchor="ctr" marL="73152" marR="73152">
                     <a:lnL w="9525" cap="flat" cmpd="sng" algn="ctr">
                       <a:solidFill>
-                        <a:srgbClr val="FAEEC6"/>
+                        <a:srgbClr val="D1FADC"/>
                       </a:solidFill>
                       <a:prstDash val="solid"/>
                     </a:lnL>
                     <a:lnR w="9525" cap="flat" cmpd="sng" algn="ctr">
                       <a:solidFill>
-                        <a:srgbClr val="FAEEC6"/>
+                        <a:srgbClr val="D1FADC"/>
                       </a:solidFill>
                       <a:prstDash val="solid"/>
                     </a:lnR>
                     <a:lnT w="9525" cap="flat" cmpd="sng" algn="ctr">
                       <a:solidFill>
-                        <a:srgbClr val="FAEEC6"/>
+                        <a:srgbClr val="D1FADC"/>
                       </a:solidFill>
                       <a:prstDash val="solid"/>
                     </a:lnT>
                     <a:lnB w="9525" cap="flat" cmpd="sng" algn="ctr">
                       <a:solidFill>
-                        <a:srgbClr val="FAEEC6"/>
+                        <a:srgbClr val="D1FADC"/>
                       </a:solidFill>
                       <a:prstDash val="solid"/>
                     </a:lnB>
                     <a:solidFill>
-                      <a:srgbClr val="FDF9ED"/>
+                      <a:srgbClr val="EEFCF1"/>
                     </a:solidFill>
                   </a:tcPr>
                 </a:tc>
@@ -5892,30 +5892,30 @@
                   <a:tcPr anchor="ctr" marL="73152" marR="73152">
                     <a:lnL w="9525" cap="flat" cmpd="sng" algn="ctr">
                       <a:solidFill>
-                        <a:srgbClr val="FAEEC6"/>
+                        <a:srgbClr val="D1FADC"/>
                       </a:solidFill>
                       <a:prstDash val="solid"/>
                     </a:lnL>
                     <a:lnR w="9525" cap="flat" cmpd="sng" algn="ctr">
                       <a:solidFill>
-                        <a:srgbClr val="FAEEC6"/>
+                        <a:srgbClr val="D1FADC"/>
                       </a:solidFill>
                       <a:prstDash val="solid"/>
                     </a:lnR>
                     <a:lnT w="9525" cap="flat" cmpd="sng" algn="ctr">
                       <a:solidFill>
-                        <a:srgbClr val="FAEEC6"/>
+                        <a:srgbClr val="D1FADC"/>
                       </a:solidFill>
                       <a:prstDash val="solid"/>
                     </a:lnT>
                     <a:lnB w="9525" cap="flat" cmpd="sng" algn="ctr">
                       <a:solidFill>
-                        <a:srgbClr val="FAEEC6"/>
+                        <a:srgbClr val="D1FADC"/>
                       </a:solidFill>
                       <a:prstDash val="solid"/>
                     </a:lnB>
                     <a:solidFill>
-                      <a:srgbClr val="FDF9ED"/>
+                      <a:srgbClr val="EEFCF1"/>
                     </a:solidFill>
                   </a:tcPr>
                 </a:tc>
@@ -5938,30 +5938,30 @@
                   <a:tcPr anchor="ctr" marL="73152" marR="73152">
                     <a:lnL w="9525" cap="flat" cmpd="sng" algn="ctr">
                       <a:solidFill>
-                        <a:srgbClr val="FAEEC6"/>
+                        <a:srgbClr val="D1FADC"/>
                       </a:solidFill>
                       <a:prstDash val="solid"/>
                     </a:lnL>
                     <a:lnR w="9525" cap="flat" cmpd="sng" algn="ctr">
                       <a:solidFill>
-                        <a:srgbClr val="FAEEC6"/>
+                        <a:srgbClr val="D1FADC"/>
                       </a:solidFill>
                       <a:prstDash val="solid"/>
                     </a:lnR>
                     <a:lnT w="9525" cap="flat" cmpd="sng" algn="ctr">
                       <a:solidFill>
-                        <a:srgbClr val="FAEEC6"/>
+                        <a:srgbClr val="D1FADC"/>
                       </a:solidFill>
                       <a:prstDash val="solid"/>
                     </a:lnT>
                     <a:lnB w="9525" cap="flat" cmpd="sng" algn="ctr">
                       <a:solidFill>
-                        <a:srgbClr val="FAEEC6"/>
+                        <a:srgbClr val="D1FADC"/>
                       </a:solidFill>
                       <a:prstDash val="solid"/>
                     </a:lnB>
                     <a:solidFill>
-                      <a:srgbClr val="FDF9ED"/>
+                      <a:srgbClr val="EEFCF1"/>
                     </a:solidFill>
                   </a:tcPr>
                 </a:tc>
@@ -5984,30 +5984,30 @@
                   <a:tcPr anchor="ctr" marL="73152" marR="73152">
                     <a:lnL w="9525" cap="flat" cmpd="sng" algn="ctr">
                       <a:solidFill>
-                        <a:srgbClr val="FAEEC6"/>
+                        <a:srgbClr val="D1FADC"/>
                       </a:solidFill>
                       <a:prstDash val="solid"/>
                     </a:lnL>
                     <a:lnR w="9525" cap="flat" cmpd="sng" algn="ctr">
                       <a:solidFill>
-                        <a:srgbClr val="FAEEC6"/>
+                        <a:srgbClr val="D1FADC"/>
                       </a:solidFill>
                       <a:prstDash val="solid"/>
                     </a:lnR>
                     <a:lnT w="9525" cap="flat" cmpd="sng" algn="ctr">
                       <a:solidFill>
-                        <a:srgbClr val="FAEEC6"/>
+                        <a:srgbClr val="D1FADC"/>
                       </a:solidFill>
                       <a:prstDash val="solid"/>
                     </a:lnT>
                     <a:lnB w="9525" cap="flat" cmpd="sng" algn="ctr">
                       <a:solidFill>
-                        <a:srgbClr val="FAEEC6"/>
+                        <a:srgbClr val="D1FADC"/>
                       </a:solidFill>
                       <a:prstDash val="solid"/>
                     </a:lnB>
                     <a:solidFill>
-                      <a:srgbClr val="FDF9ED"/>
+                      <a:srgbClr val="EEFCF1"/>
                     </a:solidFill>
                   </a:tcPr>
                 </a:tc>
@@ -6030,7 +6030,7 @@
     <p:bg>
       <p:bgPr>
         <a:solidFill>
-          <a:srgbClr val="CAA016"/>
+          <a:srgbClr val="26C54E"/>
         </a:solidFill>
         <a:effectLst/>
       </p:bgPr>
@@ -6103,7 +6103,7 @@
             <a:r>
               <a:rPr sz="3000" b="1" i="0">
                 <a:solidFill>
-                  <a:srgbClr val="6E570C"/>
+                  <a:srgbClr val="115F25"/>
                 </a:solidFill>
               </a:rPr>
               <a:t>보장 항목 체크</a:t>
@@ -6155,30 +6155,30 @@
                   <a:tcPr anchor="ctr" marL="73152" marR="73152">
                     <a:lnL w="9525" cap="flat" cmpd="sng" algn="ctr">
                       <a:solidFill>
-                        <a:srgbClr val="CAA016"/>
+                        <a:srgbClr val="26C54E"/>
                       </a:solidFill>
                       <a:prstDash val="solid"/>
                     </a:lnL>
                     <a:lnR w="9525" cap="flat" cmpd="sng" algn="ctr">
                       <a:solidFill>
-                        <a:srgbClr val="CAA016"/>
+                        <a:srgbClr val="26C54E"/>
                       </a:solidFill>
                       <a:prstDash val="solid"/>
                     </a:lnR>
                     <a:lnT w="9525" cap="flat" cmpd="sng" algn="ctr">
                       <a:solidFill>
-                        <a:srgbClr val="CAA016"/>
+                        <a:srgbClr val="26C54E"/>
                       </a:solidFill>
                       <a:prstDash val="solid"/>
                     </a:lnT>
                     <a:lnB w="9525" cap="flat" cmpd="sng" algn="ctr">
                       <a:solidFill>
-                        <a:srgbClr val="CAA016"/>
+                        <a:srgbClr val="26C54E"/>
                       </a:solidFill>
                       <a:prstDash val="solid"/>
                     </a:lnB>
                     <a:solidFill>
-                      <a:srgbClr val="CAA016"/>
+                      <a:srgbClr val="26C54E"/>
                     </a:solidFill>
                   </a:tcPr>
                 </a:tc>
@@ -6201,30 +6201,30 @@
                   <a:tcPr anchor="ctr" marL="73152" marR="73152">
                     <a:lnL w="9525" cap="flat" cmpd="sng" algn="ctr">
                       <a:solidFill>
-                        <a:srgbClr val="CAA016"/>
+                        <a:srgbClr val="26C54E"/>
                       </a:solidFill>
                       <a:prstDash val="solid"/>
                     </a:lnL>
                     <a:lnR w="9525" cap="flat" cmpd="sng" algn="ctr">
                       <a:solidFill>
-                        <a:srgbClr val="CAA016"/>
+                        <a:srgbClr val="26C54E"/>
                       </a:solidFill>
                       <a:prstDash val="solid"/>
                     </a:lnR>
                     <a:lnT w="9525" cap="flat" cmpd="sng" algn="ctr">
                       <a:solidFill>
-                        <a:srgbClr val="CAA016"/>
+                        <a:srgbClr val="26C54E"/>
                       </a:solidFill>
                       <a:prstDash val="solid"/>
                     </a:lnT>
                     <a:lnB w="9525" cap="flat" cmpd="sng" algn="ctr">
                       <a:solidFill>
-                        <a:srgbClr val="CAA016"/>
+                        <a:srgbClr val="26C54E"/>
                       </a:solidFill>
                       <a:prstDash val="solid"/>
                     </a:lnB>
                     <a:solidFill>
-                      <a:srgbClr val="CAA016"/>
+                      <a:srgbClr val="26C54E"/>
                     </a:solidFill>
                   </a:tcPr>
                 </a:tc>
@@ -6247,30 +6247,30 @@
                   <a:tcPr anchor="ctr" marL="73152" marR="73152">
                     <a:lnL w="9525" cap="flat" cmpd="sng" algn="ctr">
                       <a:solidFill>
-                        <a:srgbClr val="CAA016"/>
+                        <a:srgbClr val="26C54E"/>
                       </a:solidFill>
                       <a:prstDash val="solid"/>
                     </a:lnL>
                     <a:lnR w="9525" cap="flat" cmpd="sng" algn="ctr">
                       <a:solidFill>
-                        <a:srgbClr val="CAA016"/>
+                        <a:srgbClr val="26C54E"/>
                       </a:solidFill>
                       <a:prstDash val="solid"/>
                     </a:lnR>
                     <a:lnT w="9525" cap="flat" cmpd="sng" algn="ctr">
                       <a:solidFill>
-                        <a:srgbClr val="CAA016"/>
+                        <a:srgbClr val="26C54E"/>
                       </a:solidFill>
                       <a:prstDash val="solid"/>
                     </a:lnT>
                     <a:lnB w="9525" cap="flat" cmpd="sng" algn="ctr">
                       <a:solidFill>
-                        <a:srgbClr val="CAA016"/>
+                        <a:srgbClr val="26C54E"/>
                       </a:solidFill>
                       <a:prstDash val="solid"/>
                     </a:lnB>
                     <a:solidFill>
-                      <a:srgbClr val="CAA016"/>
+                      <a:srgbClr val="26C54E"/>
                     </a:solidFill>
                   </a:tcPr>
                 </a:tc>
@@ -6293,30 +6293,30 @@
                   <a:tcPr anchor="ctr" marL="73152" marR="73152">
                     <a:lnL w="9525" cap="flat" cmpd="sng" algn="ctr">
                       <a:solidFill>
-                        <a:srgbClr val="CAA016"/>
+                        <a:srgbClr val="26C54E"/>
                       </a:solidFill>
                       <a:prstDash val="solid"/>
                     </a:lnL>
                     <a:lnR w="9525" cap="flat" cmpd="sng" algn="ctr">
                       <a:solidFill>
-                        <a:srgbClr val="CAA016"/>
+                        <a:srgbClr val="26C54E"/>
                       </a:solidFill>
                       <a:prstDash val="solid"/>
                     </a:lnR>
                     <a:lnT w="9525" cap="flat" cmpd="sng" algn="ctr">
                       <a:solidFill>
-                        <a:srgbClr val="CAA016"/>
+                        <a:srgbClr val="26C54E"/>
                       </a:solidFill>
                       <a:prstDash val="solid"/>
                     </a:lnT>
                     <a:lnB w="9525" cap="flat" cmpd="sng" algn="ctr">
                       <a:solidFill>
-                        <a:srgbClr val="CAA016"/>
+                        <a:srgbClr val="26C54E"/>
                       </a:solidFill>
                       <a:prstDash val="solid"/>
                     </a:lnB>
                     <a:solidFill>
-                      <a:srgbClr val="CAA016"/>
+                      <a:srgbClr val="26C54E"/>
                     </a:solidFill>
                   </a:tcPr>
                 </a:tc>
@@ -6331,7 +6331,7 @@
                       <a:r>
                         <a:rPr sz="1400" b="1">
                           <a:solidFill>
-                            <a:srgbClr val="6E570C"/>
+                            <a:srgbClr val="115F25"/>
                           </a:solidFill>
                         </a:rPr>
                         <a:t>사망·재해</a:t>
@@ -6341,30 +6341,30 @@
                   <a:tcPr anchor="ctr" marL="73152" marR="73152">
                     <a:lnL w="9525" cap="flat" cmpd="sng" algn="ctr">
                       <a:solidFill>
-                        <a:srgbClr val="FAEEC6"/>
+                        <a:srgbClr val="D1FADC"/>
                       </a:solidFill>
                       <a:prstDash val="solid"/>
                     </a:lnL>
                     <a:lnR w="9525" cap="flat" cmpd="sng" algn="ctr">
                       <a:solidFill>
-                        <a:srgbClr val="FAEEC6"/>
+                        <a:srgbClr val="D1FADC"/>
                       </a:solidFill>
                       <a:prstDash val="solid"/>
                     </a:lnR>
                     <a:lnT w="9525" cap="flat" cmpd="sng" algn="ctr">
                       <a:solidFill>
-                        <a:srgbClr val="FAEEC6"/>
+                        <a:srgbClr val="D1FADC"/>
                       </a:solidFill>
                       <a:prstDash val="solid"/>
                     </a:lnT>
                     <a:lnB w="9525" cap="flat" cmpd="sng" algn="ctr">
                       <a:solidFill>
-                        <a:srgbClr val="FAEEC6"/>
+                        <a:srgbClr val="D1FADC"/>
                       </a:solidFill>
                       <a:prstDash val="solid"/>
                     </a:lnB>
                     <a:solidFill>
-                      <a:srgbClr val="FAEEC6"/>
+                      <a:srgbClr val="D1FADC"/>
                     </a:solidFill>
                   </a:tcPr>
                 </a:tc>
@@ -6387,25 +6387,25 @@
                   <a:tcPr anchor="ctr" marL="73152" marR="73152">
                     <a:lnL w="9525" cap="flat" cmpd="sng" algn="ctr">
                       <a:solidFill>
-                        <a:srgbClr val="FAEEC6"/>
+                        <a:srgbClr val="D1FADC"/>
                       </a:solidFill>
                       <a:prstDash val="solid"/>
                     </a:lnL>
                     <a:lnR w="9525" cap="flat" cmpd="sng" algn="ctr">
                       <a:solidFill>
-                        <a:srgbClr val="FAEEC6"/>
+                        <a:srgbClr val="D1FADC"/>
                       </a:solidFill>
                       <a:prstDash val="solid"/>
                     </a:lnR>
                     <a:lnT w="9525" cap="flat" cmpd="sng" algn="ctr">
                       <a:solidFill>
-                        <a:srgbClr val="FAEEC6"/>
+                        <a:srgbClr val="D1FADC"/>
                       </a:solidFill>
                       <a:prstDash val="solid"/>
                     </a:lnT>
                     <a:lnB w="9525" cap="flat" cmpd="sng" algn="ctr">
                       <a:solidFill>
-                        <a:srgbClr val="FAEEC6"/>
+                        <a:srgbClr val="D1FADC"/>
                       </a:solidFill>
                       <a:prstDash val="solid"/>
                     </a:lnB>
@@ -6433,25 +6433,25 @@
                   <a:tcPr anchor="ctr" marL="73152" marR="73152">
                     <a:lnL w="9525" cap="flat" cmpd="sng" algn="ctr">
                       <a:solidFill>
-                        <a:srgbClr val="FAEEC6"/>
+                        <a:srgbClr val="D1FADC"/>
                       </a:solidFill>
                       <a:prstDash val="solid"/>
                     </a:lnL>
                     <a:lnR w="9525" cap="flat" cmpd="sng" algn="ctr">
                       <a:solidFill>
-                        <a:srgbClr val="FAEEC6"/>
+                        <a:srgbClr val="D1FADC"/>
                       </a:solidFill>
                       <a:prstDash val="solid"/>
                     </a:lnR>
                     <a:lnT w="9525" cap="flat" cmpd="sng" algn="ctr">
                       <a:solidFill>
-                        <a:srgbClr val="FAEEC6"/>
+                        <a:srgbClr val="D1FADC"/>
                       </a:solidFill>
                       <a:prstDash val="solid"/>
                     </a:lnT>
                     <a:lnB w="9525" cap="flat" cmpd="sng" algn="ctr">
                       <a:solidFill>
-                        <a:srgbClr val="FAEEC6"/>
+                        <a:srgbClr val="D1FADC"/>
                       </a:solidFill>
                       <a:prstDash val="solid"/>
                     </a:lnB>
@@ -6479,25 +6479,25 @@
                   <a:tcPr anchor="ctr" marL="73152" marR="73152">
                     <a:lnL w="9525" cap="flat" cmpd="sng" algn="ctr">
                       <a:solidFill>
-                        <a:srgbClr val="FAEEC6"/>
+                        <a:srgbClr val="D1FADC"/>
                       </a:solidFill>
                       <a:prstDash val="solid"/>
                     </a:lnL>
                     <a:lnR w="9525" cap="flat" cmpd="sng" algn="ctr">
                       <a:solidFill>
-                        <a:srgbClr val="FAEEC6"/>
+                        <a:srgbClr val="D1FADC"/>
                       </a:solidFill>
                       <a:prstDash val="solid"/>
                     </a:lnR>
                     <a:lnT w="9525" cap="flat" cmpd="sng" algn="ctr">
                       <a:solidFill>
-                        <a:srgbClr val="FAEEC6"/>
+                        <a:srgbClr val="D1FADC"/>
                       </a:solidFill>
                       <a:prstDash val="solid"/>
                     </a:lnT>
                     <a:lnB w="9525" cap="flat" cmpd="sng" algn="ctr">
                       <a:solidFill>
-                        <a:srgbClr val="FAEEC6"/>
+                        <a:srgbClr val="D1FADC"/>
                       </a:solidFill>
                       <a:prstDash val="solid"/>
                     </a:lnB>
@@ -6517,7 +6517,7 @@
                       <a:r>
                         <a:rPr sz="1400" b="1">
                           <a:solidFill>
-                            <a:srgbClr val="6E570C"/>
+                            <a:srgbClr val="115F25"/>
                           </a:solidFill>
                         </a:rPr>
                         <a:t>질병 진단</a:t>
@@ -6527,30 +6527,30 @@
                   <a:tcPr anchor="ctr" marL="73152" marR="73152">
                     <a:lnL w="9525" cap="flat" cmpd="sng" algn="ctr">
                       <a:solidFill>
-                        <a:srgbClr val="FAEEC6"/>
+                        <a:srgbClr val="D1FADC"/>
                       </a:solidFill>
                       <a:prstDash val="solid"/>
                     </a:lnL>
                     <a:lnR w="9525" cap="flat" cmpd="sng" algn="ctr">
                       <a:solidFill>
-                        <a:srgbClr val="FAEEC6"/>
+                        <a:srgbClr val="D1FADC"/>
                       </a:solidFill>
                       <a:prstDash val="solid"/>
                     </a:lnR>
                     <a:lnT w="9525" cap="flat" cmpd="sng" algn="ctr">
                       <a:solidFill>
-                        <a:srgbClr val="FAEEC6"/>
+                        <a:srgbClr val="D1FADC"/>
                       </a:solidFill>
                       <a:prstDash val="solid"/>
                     </a:lnT>
                     <a:lnB w="9525" cap="flat" cmpd="sng" algn="ctr">
                       <a:solidFill>
-                        <a:srgbClr val="FAEEC6"/>
+                        <a:srgbClr val="D1FADC"/>
                       </a:solidFill>
                       <a:prstDash val="solid"/>
                     </a:lnB>
                     <a:solidFill>
-                      <a:srgbClr val="FAEEC6"/>
+                      <a:srgbClr val="D1FADC"/>
                     </a:solidFill>
                   </a:tcPr>
                 </a:tc>
@@ -6573,30 +6573,30 @@
                   <a:tcPr anchor="ctr" marL="73152" marR="73152">
                     <a:lnL w="9525" cap="flat" cmpd="sng" algn="ctr">
                       <a:solidFill>
-                        <a:srgbClr val="FAEEC6"/>
+                        <a:srgbClr val="D1FADC"/>
                       </a:solidFill>
                       <a:prstDash val="solid"/>
                     </a:lnL>
                     <a:lnR w="9525" cap="flat" cmpd="sng" algn="ctr">
                       <a:solidFill>
-                        <a:srgbClr val="FAEEC6"/>
+                        <a:srgbClr val="D1FADC"/>
                       </a:solidFill>
                       <a:prstDash val="solid"/>
                     </a:lnR>
                     <a:lnT w="9525" cap="flat" cmpd="sng" algn="ctr">
                       <a:solidFill>
-                        <a:srgbClr val="FAEEC6"/>
+                        <a:srgbClr val="D1FADC"/>
                       </a:solidFill>
                       <a:prstDash val="solid"/>
                     </a:lnT>
                     <a:lnB w="9525" cap="flat" cmpd="sng" algn="ctr">
                       <a:solidFill>
-                        <a:srgbClr val="FAEEC6"/>
+                        <a:srgbClr val="D1FADC"/>
                       </a:solidFill>
                       <a:prstDash val="solid"/>
                     </a:lnB>
                     <a:solidFill>
-                      <a:srgbClr val="FDF9ED"/>
+                      <a:srgbClr val="EEFCF1"/>
                     </a:solidFill>
                   </a:tcPr>
                 </a:tc>
@@ -6619,30 +6619,30 @@
                   <a:tcPr anchor="ctr" marL="73152" marR="73152">
                     <a:lnL w="9525" cap="flat" cmpd="sng" algn="ctr">
                       <a:solidFill>
-                        <a:srgbClr val="FAEEC6"/>
+                        <a:srgbClr val="D1FADC"/>
                       </a:solidFill>
                       <a:prstDash val="solid"/>
                     </a:lnL>
                     <a:lnR w="9525" cap="flat" cmpd="sng" algn="ctr">
                       <a:solidFill>
-                        <a:srgbClr val="FAEEC6"/>
+                        <a:srgbClr val="D1FADC"/>
                       </a:solidFill>
                       <a:prstDash val="solid"/>
                     </a:lnR>
                     <a:lnT w="9525" cap="flat" cmpd="sng" algn="ctr">
                       <a:solidFill>
-                        <a:srgbClr val="FAEEC6"/>
+                        <a:srgbClr val="D1FADC"/>
                       </a:solidFill>
                       <a:prstDash val="solid"/>
                     </a:lnT>
                     <a:lnB w="9525" cap="flat" cmpd="sng" algn="ctr">
                       <a:solidFill>
-                        <a:srgbClr val="FAEEC6"/>
+                        <a:srgbClr val="D1FADC"/>
                       </a:solidFill>
                       <a:prstDash val="solid"/>
                     </a:lnB>
                     <a:solidFill>
-                      <a:srgbClr val="FDF9ED"/>
+                      <a:srgbClr val="EEFCF1"/>
                     </a:solidFill>
                   </a:tcPr>
                 </a:tc>
@@ -6665,30 +6665,30 @@
                   <a:tcPr anchor="ctr" marL="73152" marR="73152">
                     <a:lnL w="9525" cap="flat" cmpd="sng" algn="ctr">
                       <a:solidFill>
-                        <a:srgbClr val="FAEEC6"/>
+                        <a:srgbClr val="D1FADC"/>
                       </a:solidFill>
                       <a:prstDash val="solid"/>
                     </a:lnL>
                     <a:lnR w="9525" cap="flat" cmpd="sng" algn="ctr">
                       <a:solidFill>
-                        <a:srgbClr val="FAEEC6"/>
+                        <a:srgbClr val="D1FADC"/>
                       </a:solidFill>
                       <a:prstDash val="solid"/>
                     </a:lnR>
                     <a:lnT w="9525" cap="flat" cmpd="sng" algn="ctr">
                       <a:solidFill>
-                        <a:srgbClr val="FAEEC6"/>
+                        <a:srgbClr val="D1FADC"/>
                       </a:solidFill>
                       <a:prstDash val="solid"/>
                     </a:lnT>
                     <a:lnB w="9525" cap="flat" cmpd="sng" algn="ctr">
                       <a:solidFill>
-                        <a:srgbClr val="FAEEC6"/>
+                        <a:srgbClr val="D1FADC"/>
                       </a:solidFill>
                       <a:prstDash val="solid"/>
                     </a:lnB>
                     <a:solidFill>
-                      <a:srgbClr val="FDF9ED"/>
+                      <a:srgbClr val="EEFCF1"/>
                     </a:solidFill>
                   </a:tcPr>
                 </a:tc>
@@ -6703,7 +6703,7 @@
                       <a:r>
                         <a:rPr sz="1400" b="1">
                           <a:solidFill>
-                            <a:srgbClr val="6E570C"/>
+                            <a:srgbClr val="115F25"/>
                           </a:solidFill>
                         </a:rPr>
                         <a:t>암</a:t>
@@ -6713,30 +6713,30 @@
                   <a:tcPr anchor="ctr" marL="73152" marR="73152">
                     <a:lnL w="9525" cap="flat" cmpd="sng" algn="ctr">
                       <a:solidFill>
-                        <a:srgbClr val="FAEEC6"/>
+                        <a:srgbClr val="D1FADC"/>
                       </a:solidFill>
                       <a:prstDash val="solid"/>
                     </a:lnL>
                     <a:lnR w="9525" cap="flat" cmpd="sng" algn="ctr">
                       <a:solidFill>
-                        <a:srgbClr val="FAEEC6"/>
+                        <a:srgbClr val="D1FADC"/>
                       </a:solidFill>
                       <a:prstDash val="solid"/>
                     </a:lnR>
                     <a:lnT w="9525" cap="flat" cmpd="sng" algn="ctr">
                       <a:solidFill>
-                        <a:srgbClr val="FAEEC6"/>
+                        <a:srgbClr val="D1FADC"/>
                       </a:solidFill>
                       <a:prstDash val="solid"/>
                     </a:lnT>
                     <a:lnB w="9525" cap="flat" cmpd="sng" algn="ctr">
                       <a:solidFill>
-                        <a:srgbClr val="FAEEC6"/>
+                        <a:srgbClr val="D1FADC"/>
                       </a:solidFill>
                       <a:prstDash val="solid"/>
                     </a:lnB>
                     <a:solidFill>
-                      <a:srgbClr val="FAEEC6"/>
+                      <a:srgbClr val="D1FADC"/>
                     </a:solidFill>
                   </a:tcPr>
                 </a:tc>
@@ -6759,25 +6759,25 @@
                   <a:tcPr anchor="ctr" marL="73152" marR="73152">
                     <a:lnL w="9525" cap="flat" cmpd="sng" algn="ctr">
                       <a:solidFill>
-                        <a:srgbClr val="FAEEC6"/>
+                        <a:srgbClr val="D1FADC"/>
                       </a:solidFill>
                       <a:prstDash val="solid"/>
                     </a:lnL>
                     <a:lnR w="9525" cap="flat" cmpd="sng" algn="ctr">
                       <a:solidFill>
-                        <a:srgbClr val="FAEEC6"/>
+                        <a:srgbClr val="D1FADC"/>
                       </a:solidFill>
                       <a:prstDash val="solid"/>
                     </a:lnR>
                     <a:lnT w="9525" cap="flat" cmpd="sng" algn="ctr">
                       <a:solidFill>
-                        <a:srgbClr val="FAEEC6"/>
+                        <a:srgbClr val="D1FADC"/>
                       </a:solidFill>
                       <a:prstDash val="solid"/>
                     </a:lnT>
                     <a:lnB w="9525" cap="flat" cmpd="sng" algn="ctr">
                       <a:solidFill>
-                        <a:srgbClr val="FAEEC6"/>
+                        <a:srgbClr val="D1FADC"/>
                       </a:solidFill>
                       <a:prstDash val="solid"/>
                     </a:lnB>
@@ -6805,25 +6805,25 @@
                   <a:tcPr anchor="ctr" marL="73152" marR="73152">
                     <a:lnL w="9525" cap="flat" cmpd="sng" algn="ctr">
                       <a:solidFill>
-                        <a:srgbClr val="FAEEC6"/>
+                        <a:srgbClr val="D1FADC"/>
                       </a:solidFill>
                       <a:prstDash val="solid"/>
                     </a:lnL>
                     <a:lnR w="9525" cap="flat" cmpd="sng" algn="ctr">
                       <a:solidFill>
-                        <a:srgbClr val="FAEEC6"/>
+                        <a:srgbClr val="D1FADC"/>
                       </a:solidFill>
                       <a:prstDash val="solid"/>
                     </a:lnR>
                     <a:lnT w="9525" cap="flat" cmpd="sng" algn="ctr">
                       <a:solidFill>
-                        <a:srgbClr val="FAEEC6"/>
+                        <a:srgbClr val="D1FADC"/>
                       </a:solidFill>
                       <a:prstDash val="solid"/>
                     </a:lnT>
                     <a:lnB w="9525" cap="flat" cmpd="sng" algn="ctr">
                       <a:solidFill>
-                        <a:srgbClr val="FAEEC6"/>
+                        <a:srgbClr val="D1FADC"/>
                       </a:solidFill>
                       <a:prstDash val="solid"/>
                     </a:lnB>
@@ -6851,25 +6851,25 @@
                   <a:tcPr anchor="ctr" marL="73152" marR="73152">
                     <a:lnL w="9525" cap="flat" cmpd="sng" algn="ctr">
                       <a:solidFill>
-                        <a:srgbClr val="FAEEC6"/>
+                        <a:srgbClr val="D1FADC"/>
                       </a:solidFill>
                       <a:prstDash val="solid"/>
                     </a:lnL>
                     <a:lnR w="9525" cap="flat" cmpd="sng" algn="ctr">
                       <a:solidFill>
-                        <a:srgbClr val="FAEEC6"/>
+                        <a:srgbClr val="D1FADC"/>
                       </a:solidFill>
                       <a:prstDash val="solid"/>
                     </a:lnR>
                     <a:lnT w="9525" cap="flat" cmpd="sng" algn="ctr">
                       <a:solidFill>
-                        <a:srgbClr val="FAEEC6"/>
+                        <a:srgbClr val="D1FADC"/>
                       </a:solidFill>
                       <a:prstDash val="solid"/>
                     </a:lnT>
                     <a:lnB w="9525" cap="flat" cmpd="sng" algn="ctr">
                       <a:solidFill>
-                        <a:srgbClr val="FAEEC6"/>
+                        <a:srgbClr val="D1FADC"/>
                       </a:solidFill>
                       <a:prstDash val="solid"/>
                     </a:lnB>
@@ -6889,7 +6889,7 @@
                       <a:r>
                         <a:rPr sz="1400" b="1">
                           <a:solidFill>
-                            <a:srgbClr val="6E570C"/>
+                            <a:srgbClr val="115F25"/>
                           </a:solidFill>
                         </a:rPr>
                         <a:t>뇌·심장</a:t>
@@ -6899,30 +6899,30 @@
                   <a:tcPr anchor="ctr" marL="73152" marR="73152">
                     <a:lnL w="9525" cap="flat" cmpd="sng" algn="ctr">
                       <a:solidFill>
-                        <a:srgbClr val="FAEEC6"/>
+                        <a:srgbClr val="D1FADC"/>
                       </a:solidFill>
                       <a:prstDash val="solid"/>
                     </a:lnL>
                     <a:lnR w="9525" cap="flat" cmpd="sng" algn="ctr">
                       <a:solidFill>
-                        <a:srgbClr val="FAEEC6"/>
+                        <a:srgbClr val="D1FADC"/>
                       </a:solidFill>
                       <a:prstDash val="solid"/>
                     </a:lnR>
                     <a:lnT w="9525" cap="flat" cmpd="sng" algn="ctr">
                       <a:solidFill>
-                        <a:srgbClr val="FAEEC6"/>
+                        <a:srgbClr val="D1FADC"/>
                       </a:solidFill>
                       <a:prstDash val="solid"/>
                     </a:lnT>
                     <a:lnB w="9525" cap="flat" cmpd="sng" algn="ctr">
                       <a:solidFill>
-                        <a:srgbClr val="FAEEC6"/>
+                        <a:srgbClr val="D1FADC"/>
                       </a:solidFill>
                       <a:prstDash val="solid"/>
                     </a:lnB>
                     <a:solidFill>
-                      <a:srgbClr val="FAEEC6"/>
+                      <a:srgbClr val="D1FADC"/>
                     </a:solidFill>
                   </a:tcPr>
                 </a:tc>
@@ -6945,30 +6945,30 @@
                   <a:tcPr anchor="ctr" marL="73152" marR="73152">
                     <a:lnL w="9525" cap="flat" cmpd="sng" algn="ctr">
                       <a:solidFill>
-                        <a:srgbClr val="FAEEC6"/>
+                        <a:srgbClr val="D1FADC"/>
                       </a:solidFill>
                       <a:prstDash val="solid"/>
                     </a:lnL>
                     <a:lnR w="9525" cap="flat" cmpd="sng" algn="ctr">
                       <a:solidFill>
-                        <a:srgbClr val="FAEEC6"/>
+                        <a:srgbClr val="D1FADC"/>
                       </a:solidFill>
                       <a:prstDash val="solid"/>
                     </a:lnR>
                     <a:lnT w="9525" cap="flat" cmpd="sng" algn="ctr">
                       <a:solidFill>
-                        <a:srgbClr val="FAEEC6"/>
+                        <a:srgbClr val="D1FADC"/>
                       </a:solidFill>
                       <a:prstDash val="solid"/>
                     </a:lnT>
                     <a:lnB w="9525" cap="flat" cmpd="sng" algn="ctr">
                       <a:solidFill>
-                        <a:srgbClr val="FAEEC6"/>
+                        <a:srgbClr val="D1FADC"/>
                       </a:solidFill>
                       <a:prstDash val="solid"/>
                     </a:lnB>
                     <a:solidFill>
-                      <a:srgbClr val="FDF9ED"/>
+                      <a:srgbClr val="EEFCF1"/>
                     </a:solidFill>
                   </a:tcPr>
                 </a:tc>
@@ -6991,30 +6991,30 @@
                   <a:tcPr anchor="ctr" marL="73152" marR="73152">
                     <a:lnL w="9525" cap="flat" cmpd="sng" algn="ctr">
                       <a:solidFill>
-                        <a:srgbClr val="FAEEC6"/>
+                        <a:srgbClr val="D1FADC"/>
                       </a:solidFill>
                       <a:prstDash val="solid"/>
                     </a:lnL>
                     <a:lnR w="9525" cap="flat" cmpd="sng" algn="ctr">
                       <a:solidFill>
-                        <a:srgbClr val="FAEEC6"/>
+                        <a:srgbClr val="D1FADC"/>
                       </a:solidFill>
                       <a:prstDash val="solid"/>
                     </a:lnR>
                     <a:lnT w="9525" cap="flat" cmpd="sng" algn="ctr">
                       <a:solidFill>
-                        <a:srgbClr val="FAEEC6"/>
+                        <a:srgbClr val="D1FADC"/>
                       </a:solidFill>
                       <a:prstDash val="solid"/>
                     </a:lnT>
                     <a:lnB w="9525" cap="flat" cmpd="sng" algn="ctr">
                       <a:solidFill>
-                        <a:srgbClr val="FAEEC6"/>
+                        <a:srgbClr val="D1FADC"/>
                       </a:solidFill>
                       <a:prstDash val="solid"/>
                     </a:lnB>
                     <a:solidFill>
-                      <a:srgbClr val="FDF9ED"/>
+                      <a:srgbClr val="EEFCF1"/>
                     </a:solidFill>
                   </a:tcPr>
                 </a:tc>
@@ -7037,30 +7037,30 @@
                   <a:tcPr anchor="ctr" marL="73152" marR="73152">
                     <a:lnL w="9525" cap="flat" cmpd="sng" algn="ctr">
                       <a:solidFill>
-                        <a:srgbClr val="FAEEC6"/>
+                        <a:srgbClr val="D1FADC"/>
                       </a:solidFill>
                       <a:prstDash val="solid"/>
                     </a:lnL>
                     <a:lnR w="9525" cap="flat" cmpd="sng" algn="ctr">
                       <a:solidFill>
-                        <a:srgbClr val="FAEEC6"/>
+                        <a:srgbClr val="D1FADC"/>
                       </a:solidFill>
                       <a:prstDash val="solid"/>
                     </a:lnR>
                     <a:lnT w="9525" cap="flat" cmpd="sng" algn="ctr">
                       <a:solidFill>
-                        <a:srgbClr val="FAEEC6"/>
+                        <a:srgbClr val="D1FADC"/>
                       </a:solidFill>
                       <a:prstDash val="solid"/>
                     </a:lnT>
                     <a:lnB w="9525" cap="flat" cmpd="sng" algn="ctr">
                       <a:solidFill>
-                        <a:srgbClr val="FAEEC6"/>
+                        <a:srgbClr val="D1FADC"/>
                       </a:solidFill>
                       <a:prstDash val="solid"/>
                     </a:lnB>
                     <a:solidFill>
-                      <a:srgbClr val="FDF9ED"/>
+                      <a:srgbClr val="EEFCF1"/>
                     </a:solidFill>
                   </a:tcPr>
                 </a:tc>
@@ -7075,7 +7075,7 @@
                       <a:r>
                         <a:rPr sz="1400" b="1">
                           <a:solidFill>
-                            <a:srgbClr val="6E570C"/>
+                            <a:srgbClr val="115F25"/>
                           </a:solidFill>
                         </a:rPr>
                         <a:t>입원·수술</a:t>
@@ -7085,30 +7085,30 @@
                   <a:tcPr anchor="ctr" marL="73152" marR="73152">
                     <a:lnL w="9525" cap="flat" cmpd="sng" algn="ctr">
                       <a:solidFill>
-                        <a:srgbClr val="FAEEC6"/>
+                        <a:srgbClr val="D1FADC"/>
                       </a:solidFill>
                       <a:prstDash val="solid"/>
                     </a:lnL>
                     <a:lnR w="9525" cap="flat" cmpd="sng" algn="ctr">
                       <a:solidFill>
-                        <a:srgbClr val="FAEEC6"/>
+                        <a:srgbClr val="D1FADC"/>
                       </a:solidFill>
                       <a:prstDash val="solid"/>
                     </a:lnR>
                     <a:lnT w="9525" cap="flat" cmpd="sng" algn="ctr">
                       <a:solidFill>
-                        <a:srgbClr val="FAEEC6"/>
+                        <a:srgbClr val="D1FADC"/>
                       </a:solidFill>
                       <a:prstDash val="solid"/>
                     </a:lnT>
                     <a:lnB w="9525" cap="flat" cmpd="sng" algn="ctr">
                       <a:solidFill>
-                        <a:srgbClr val="FAEEC6"/>
+                        <a:srgbClr val="D1FADC"/>
                       </a:solidFill>
                       <a:prstDash val="solid"/>
                     </a:lnB>
                     <a:solidFill>
-                      <a:srgbClr val="FAEEC6"/>
+                      <a:srgbClr val="D1FADC"/>
                     </a:solidFill>
                   </a:tcPr>
                 </a:tc>
@@ -7131,25 +7131,25 @@
                   <a:tcPr anchor="ctr" marL="73152" marR="73152">
                     <a:lnL w="9525" cap="flat" cmpd="sng" algn="ctr">
                       <a:solidFill>
-                        <a:srgbClr val="FAEEC6"/>
+                        <a:srgbClr val="D1FADC"/>
                       </a:solidFill>
                       <a:prstDash val="solid"/>
                     </a:lnL>
                     <a:lnR w="9525" cap="flat" cmpd="sng" algn="ctr">
                       <a:solidFill>
-                        <a:srgbClr val="FAEEC6"/>
+                        <a:srgbClr val="D1FADC"/>
                       </a:solidFill>
                       <a:prstDash val="solid"/>
                     </a:lnR>
                     <a:lnT w="9525" cap="flat" cmpd="sng" algn="ctr">
                       <a:solidFill>
-                        <a:srgbClr val="FAEEC6"/>
+                        <a:srgbClr val="D1FADC"/>
                       </a:solidFill>
                       <a:prstDash val="solid"/>
                     </a:lnT>
                     <a:lnB w="9525" cap="flat" cmpd="sng" algn="ctr">
                       <a:solidFill>
-                        <a:srgbClr val="FAEEC6"/>
+                        <a:srgbClr val="D1FADC"/>
                       </a:solidFill>
                       <a:prstDash val="solid"/>
                     </a:lnB>
@@ -7177,25 +7177,25 @@
                   <a:tcPr anchor="ctr" marL="73152" marR="73152">
                     <a:lnL w="9525" cap="flat" cmpd="sng" algn="ctr">
                       <a:solidFill>
-                        <a:srgbClr val="FAEEC6"/>
+                        <a:srgbClr val="D1FADC"/>
                       </a:solidFill>
                       <a:prstDash val="solid"/>
                     </a:lnL>
                     <a:lnR w="9525" cap="flat" cmpd="sng" algn="ctr">
                       <a:solidFill>
-                        <a:srgbClr val="FAEEC6"/>
+                        <a:srgbClr val="D1FADC"/>
                       </a:solidFill>
                       <a:prstDash val="solid"/>
                     </a:lnR>
                     <a:lnT w="9525" cap="flat" cmpd="sng" algn="ctr">
                       <a:solidFill>
-                        <a:srgbClr val="FAEEC6"/>
+                        <a:srgbClr val="D1FADC"/>
                       </a:solidFill>
                       <a:prstDash val="solid"/>
                     </a:lnT>
                     <a:lnB w="9525" cap="flat" cmpd="sng" algn="ctr">
                       <a:solidFill>
-                        <a:srgbClr val="FAEEC6"/>
+                        <a:srgbClr val="D1FADC"/>
                       </a:solidFill>
                       <a:prstDash val="solid"/>
                     </a:lnB>
@@ -7223,25 +7223,25 @@
                   <a:tcPr anchor="ctr" marL="73152" marR="73152">
                     <a:lnL w="9525" cap="flat" cmpd="sng" algn="ctr">
                       <a:solidFill>
-                        <a:srgbClr val="FAEEC6"/>
+                        <a:srgbClr val="D1FADC"/>
                       </a:solidFill>
                       <a:prstDash val="solid"/>
                     </a:lnL>
                     <a:lnR w="9525" cap="flat" cmpd="sng" algn="ctr">
                       <a:solidFill>
-                        <a:srgbClr val="FAEEC6"/>
+                        <a:srgbClr val="D1FADC"/>
                       </a:solidFill>
                       <a:prstDash val="solid"/>
                     </a:lnR>
                     <a:lnT w="9525" cap="flat" cmpd="sng" algn="ctr">
                       <a:solidFill>
-                        <a:srgbClr val="FAEEC6"/>
+                        <a:srgbClr val="D1FADC"/>
                       </a:solidFill>
                       <a:prstDash val="solid"/>
                     </a:lnT>
                     <a:lnB w="9525" cap="flat" cmpd="sng" algn="ctr">
                       <a:solidFill>
-                        <a:srgbClr val="FAEEC6"/>
+                        <a:srgbClr val="D1FADC"/>
                       </a:solidFill>
                       <a:prstDash val="solid"/>
                     </a:lnB>
@@ -7261,7 +7261,7 @@
                       <a:r>
                         <a:rPr sz="1400" b="1">
                           <a:solidFill>
-                            <a:srgbClr val="6E570C"/>
+                            <a:srgbClr val="115F25"/>
                           </a:solidFill>
                         </a:rPr>
                         <a:t>상해</a:t>
@@ -7271,30 +7271,30 @@
                   <a:tcPr anchor="ctr" marL="73152" marR="73152">
                     <a:lnL w="9525" cap="flat" cmpd="sng" algn="ctr">
                       <a:solidFill>
-                        <a:srgbClr val="FAEEC6"/>
+                        <a:srgbClr val="D1FADC"/>
                       </a:solidFill>
                       <a:prstDash val="solid"/>
                     </a:lnL>
                     <a:lnR w="9525" cap="flat" cmpd="sng" algn="ctr">
                       <a:solidFill>
-                        <a:srgbClr val="FAEEC6"/>
+                        <a:srgbClr val="D1FADC"/>
                       </a:solidFill>
                       <a:prstDash val="solid"/>
                     </a:lnR>
                     <a:lnT w="9525" cap="flat" cmpd="sng" algn="ctr">
                       <a:solidFill>
-                        <a:srgbClr val="FAEEC6"/>
+                        <a:srgbClr val="D1FADC"/>
                       </a:solidFill>
                       <a:prstDash val="solid"/>
                     </a:lnT>
                     <a:lnB w="9525" cap="flat" cmpd="sng" algn="ctr">
                       <a:solidFill>
-                        <a:srgbClr val="FAEEC6"/>
+                        <a:srgbClr val="D1FADC"/>
                       </a:solidFill>
                       <a:prstDash val="solid"/>
                     </a:lnB>
                     <a:solidFill>
-                      <a:srgbClr val="FAEEC6"/>
+                      <a:srgbClr val="D1FADC"/>
                     </a:solidFill>
                   </a:tcPr>
                 </a:tc>
@@ -7317,30 +7317,30 @@
                   <a:tcPr anchor="ctr" marL="73152" marR="73152">
                     <a:lnL w="9525" cap="flat" cmpd="sng" algn="ctr">
                       <a:solidFill>
-                        <a:srgbClr val="FAEEC6"/>
+                        <a:srgbClr val="D1FADC"/>
                       </a:solidFill>
                       <a:prstDash val="solid"/>
                     </a:lnL>
                     <a:lnR w="9525" cap="flat" cmpd="sng" algn="ctr">
                       <a:solidFill>
-                        <a:srgbClr val="FAEEC6"/>
+                        <a:srgbClr val="D1FADC"/>
                       </a:solidFill>
                       <a:prstDash val="solid"/>
                     </a:lnR>
                     <a:lnT w="9525" cap="flat" cmpd="sng" algn="ctr">
                       <a:solidFill>
-                        <a:srgbClr val="FAEEC6"/>
+                        <a:srgbClr val="D1FADC"/>
                       </a:solidFill>
                       <a:prstDash val="solid"/>
                     </a:lnT>
                     <a:lnB w="9525" cap="flat" cmpd="sng" algn="ctr">
                       <a:solidFill>
-                        <a:srgbClr val="FAEEC6"/>
+                        <a:srgbClr val="D1FADC"/>
                       </a:solidFill>
                       <a:prstDash val="solid"/>
                     </a:lnB>
                     <a:solidFill>
-                      <a:srgbClr val="FDF9ED"/>
+                      <a:srgbClr val="EEFCF1"/>
                     </a:solidFill>
                   </a:tcPr>
                 </a:tc>
@@ -7363,30 +7363,30 @@
                   <a:tcPr anchor="ctr" marL="73152" marR="73152">
                     <a:lnL w="9525" cap="flat" cmpd="sng" algn="ctr">
                       <a:solidFill>
-                        <a:srgbClr val="FAEEC6"/>
+                        <a:srgbClr val="D1FADC"/>
                       </a:solidFill>
                       <a:prstDash val="solid"/>
                     </a:lnL>
                     <a:lnR w="9525" cap="flat" cmpd="sng" algn="ctr">
                       <a:solidFill>
-                        <a:srgbClr val="FAEEC6"/>
+                        <a:srgbClr val="D1FADC"/>
                       </a:solidFill>
                       <a:prstDash val="solid"/>
                     </a:lnR>
                     <a:lnT w="9525" cap="flat" cmpd="sng" algn="ctr">
                       <a:solidFill>
-                        <a:srgbClr val="FAEEC6"/>
+                        <a:srgbClr val="D1FADC"/>
                       </a:solidFill>
                       <a:prstDash val="solid"/>
                     </a:lnT>
                     <a:lnB w="9525" cap="flat" cmpd="sng" algn="ctr">
                       <a:solidFill>
-                        <a:srgbClr val="FAEEC6"/>
+                        <a:srgbClr val="D1FADC"/>
                       </a:solidFill>
                       <a:prstDash val="solid"/>
                     </a:lnB>
                     <a:solidFill>
-                      <a:srgbClr val="FDF9ED"/>
+                      <a:srgbClr val="EEFCF1"/>
                     </a:solidFill>
                   </a:tcPr>
                 </a:tc>
@@ -7409,30 +7409,30 @@
                   <a:tcPr anchor="ctr" marL="73152" marR="73152">
                     <a:lnL w="9525" cap="flat" cmpd="sng" algn="ctr">
                       <a:solidFill>
-                        <a:srgbClr val="FAEEC6"/>
+                        <a:srgbClr val="D1FADC"/>
                       </a:solidFill>
                       <a:prstDash val="solid"/>
                     </a:lnL>
                     <a:lnR w="9525" cap="flat" cmpd="sng" algn="ctr">
                       <a:solidFill>
-                        <a:srgbClr val="FAEEC6"/>
+                        <a:srgbClr val="D1FADC"/>
                       </a:solidFill>
                       <a:prstDash val="solid"/>
                     </a:lnR>
                     <a:lnT w="9525" cap="flat" cmpd="sng" algn="ctr">
                       <a:solidFill>
-                        <a:srgbClr val="FAEEC6"/>
+                        <a:srgbClr val="D1FADC"/>
                       </a:solidFill>
                       <a:prstDash val="solid"/>
                     </a:lnT>
                     <a:lnB w="9525" cap="flat" cmpd="sng" algn="ctr">
                       <a:solidFill>
-                        <a:srgbClr val="FAEEC6"/>
+                        <a:srgbClr val="D1FADC"/>
                       </a:solidFill>
                       <a:prstDash val="solid"/>
                     </a:lnB>
                     <a:solidFill>
-                      <a:srgbClr val="FDF9ED"/>
+                      <a:srgbClr val="EEFCF1"/>
                     </a:solidFill>
                   </a:tcPr>
                 </a:tc>
@@ -7447,7 +7447,7 @@
                       <a:r>
                         <a:rPr sz="1400" b="1">
                           <a:solidFill>
-                            <a:srgbClr val="6E570C"/>
+                            <a:srgbClr val="115F25"/>
                           </a:solidFill>
                         </a:rPr>
                         <a:t>실손의료</a:t>
@@ -7457,30 +7457,30 @@
                   <a:tcPr anchor="ctr" marL="73152" marR="73152">
                     <a:lnL w="9525" cap="flat" cmpd="sng" algn="ctr">
                       <a:solidFill>
-                        <a:srgbClr val="FAEEC6"/>
+                        <a:srgbClr val="D1FADC"/>
                       </a:solidFill>
                       <a:prstDash val="solid"/>
                     </a:lnL>
                     <a:lnR w="9525" cap="flat" cmpd="sng" algn="ctr">
                       <a:solidFill>
-                        <a:srgbClr val="FAEEC6"/>
+                        <a:srgbClr val="D1FADC"/>
                       </a:solidFill>
                       <a:prstDash val="solid"/>
                     </a:lnR>
                     <a:lnT w="9525" cap="flat" cmpd="sng" algn="ctr">
                       <a:solidFill>
-                        <a:srgbClr val="FAEEC6"/>
+                        <a:srgbClr val="D1FADC"/>
                       </a:solidFill>
                       <a:prstDash val="solid"/>
                     </a:lnT>
                     <a:lnB w="9525" cap="flat" cmpd="sng" algn="ctr">
                       <a:solidFill>
-                        <a:srgbClr val="FAEEC6"/>
+                        <a:srgbClr val="D1FADC"/>
                       </a:solidFill>
                       <a:prstDash val="solid"/>
                     </a:lnB>
                     <a:solidFill>
-                      <a:srgbClr val="FAEEC6"/>
+                      <a:srgbClr val="D1FADC"/>
                     </a:solidFill>
                   </a:tcPr>
                 </a:tc>
@@ -7503,25 +7503,25 @@
                   <a:tcPr anchor="ctr" marL="73152" marR="73152">
                     <a:lnL w="9525" cap="flat" cmpd="sng" algn="ctr">
                       <a:solidFill>
-                        <a:srgbClr val="FAEEC6"/>
+                        <a:srgbClr val="D1FADC"/>
                       </a:solidFill>
                       <a:prstDash val="solid"/>
                     </a:lnL>
                     <a:lnR w="9525" cap="flat" cmpd="sng" algn="ctr">
                       <a:solidFill>
-                        <a:srgbClr val="FAEEC6"/>
+                        <a:srgbClr val="D1FADC"/>
                       </a:solidFill>
                       <a:prstDash val="solid"/>
                     </a:lnR>
                     <a:lnT w="9525" cap="flat" cmpd="sng" algn="ctr">
                       <a:solidFill>
-                        <a:srgbClr val="FAEEC6"/>
+                        <a:srgbClr val="D1FADC"/>
                       </a:solidFill>
                       <a:prstDash val="solid"/>
                     </a:lnT>
                     <a:lnB w="9525" cap="flat" cmpd="sng" algn="ctr">
                       <a:solidFill>
-                        <a:srgbClr val="FAEEC6"/>
+                        <a:srgbClr val="D1FADC"/>
                       </a:solidFill>
                       <a:prstDash val="solid"/>
                     </a:lnB>
@@ -7549,25 +7549,25 @@
                   <a:tcPr anchor="ctr" marL="73152" marR="73152">
                     <a:lnL w="9525" cap="flat" cmpd="sng" algn="ctr">
                       <a:solidFill>
-                        <a:srgbClr val="FAEEC6"/>
+                        <a:srgbClr val="D1FADC"/>
                       </a:solidFill>
                       <a:prstDash val="solid"/>
                     </a:lnL>
                     <a:lnR w="9525" cap="flat" cmpd="sng" algn="ctr">
                       <a:solidFill>
-                        <a:srgbClr val="FAEEC6"/>
+                        <a:srgbClr val="D1FADC"/>
                       </a:solidFill>
                       <a:prstDash val="solid"/>
                     </a:lnR>
                     <a:lnT w="9525" cap="flat" cmpd="sng" algn="ctr">
                       <a:solidFill>
-                        <a:srgbClr val="FAEEC6"/>
+                        <a:srgbClr val="D1FADC"/>
                       </a:solidFill>
                       <a:prstDash val="solid"/>
                     </a:lnT>
                     <a:lnB w="9525" cap="flat" cmpd="sng" algn="ctr">
                       <a:solidFill>
-                        <a:srgbClr val="FAEEC6"/>
+                        <a:srgbClr val="D1FADC"/>
                       </a:solidFill>
                       <a:prstDash val="solid"/>
                     </a:lnB>
@@ -7595,25 +7595,25 @@
                   <a:tcPr anchor="ctr" marL="73152" marR="73152">
                     <a:lnL w="9525" cap="flat" cmpd="sng" algn="ctr">
                       <a:solidFill>
-                        <a:srgbClr val="FAEEC6"/>
+                        <a:srgbClr val="D1FADC"/>
                       </a:solidFill>
                       <a:prstDash val="solid"/>
                     </a:lnL>
                     <a:lnR w="9525" cap="flat" cmpd="sng" algn="ctr">
                       <a:solidFill>
-                        <a:srgbClr val="FAEEC6"/>
+                        <a:srgbClr val="D1FADC"/>
                       </a:solidFill>
                       <a:prstDash val="solid"/>
                     </a:lnR>
                     <a:lnT w="9525" cap="flat" cmpd="sng" algn="ctr">
                       <a:solidFill>
-                        <a:srgbClr val="FAEEC6"/>
+                        <a:srgbClr val="D1FADC"/>
                       </a:solidFill>
                       <a:prstDash val="solid"/>
                     </a:lnT>
                     <a:lnB w="9525" cap="flat" cmpd="sng" algn="ctr">
                       <a:solidFill>
-                        <a:srgbClr val="FAEEC6"/>
+                        <a:srgbClr val="D1FADC"/>
                       </a:solidFill>
                       <a:prstDash val="solid"/>
                     </a:lnB>
@@ -7633,7 +7633,7 @@
                       <a:r>
                         <a:rPr sz="1400" b="1">
                           <a:solidFill>
-                            <a:srgbClr val="6E570C"/>
+                            <a:srgbClr val="115F25"/>
                           </a:solidFill>
                         </a:rPr>
                         <a:t>연금·노후자금</a:t>
@@ -7643,30 +7643,30 @@
                   <a:tcPr anchor="ctr" marL="73152" marR="73152">
                     <a:lnL w="9525" cap="flat" cmpd="sng" algn="ctr">
                       <a:solidFill>
-                        <a:srgbClr val="FAEEC6"/>
+                        <a:srgbClr val="D1FADC"/>
                       </a:solidFill>
                       <a:prstDash val="solid"/>
                     </a:lnL>
                     <a:lnR w="9525" cap="flat" cmpd="sng" algn="ctr">
                       <a:solidFill>
-                        <a:srgbClr val="FAEEC6"/>
+                        <a:srgbClr val="D1FADC"/>
                       </a:solidFill>
                       <a:prstDash val="solid"/>
                     </a:lnR>
                     <a:lnT w="9525" cap="flat" cmpd="sng" algn="ctr">
                       <a:solidFill>
-                        <a:srgbClr val="FAEEC6"/>
+                        <a:srgbClr val="D1FADC"/>
                       </a:solidFill>
                       <a:prstDash val="solid"/>
                     </a:lnT>
                     <a:lnB w="9525" cap="flat" cmpd="sng" algn="ctr">
                       <a:solidFill>
-                        <a:srgbClr val="FAEEC6"/>
+                        <a:srgbClr val="D1FADC"/>
                       </a:solidFill>
                       <a:prstDash val="solid"/>
                     </a:lnB>
                     <a:solidFill>
-                      <a:srgbClr val="FAEEC6"/>
+                      <a:srgbClr val="D1FADC"/>
                     </a:solidFill>
                   </a:tcPr>
                 </a:tc>
@@ -7689,30 +7689,30 @@
                   <a:tcPr anchor="ctr" marL="73152" marR="73152">
                     <a:lnL w="9525" cap="flat" cmpd="sng" algn="ctr">
                       <a:solidFill>
-                        <a:srgbClr val="FAEEC6"/>
+                        <a:srgbClr val="D1FADC"/>
                       </a:solidFill>
                       <a:prstDash val="solid"/>
                     </a:lnL>
                     <a:lnR w="9525" cap="flat" cmpd="sng" algn="ctr">
                       <a:solidFill>
-                        <a:srgbClr val="FAEEC6"/>
+                        <a:srgbClr val="D1FADC"/>
                       </a:solidFill>
                       <a:prstDash val="solid"/>
                     </a:lnR>
                     <a:lnT w="9525" cap="flat" cmpd="sng" algn="ctr">
                       <a:solidFill>
-                        <a:srgbClr val="FAEEC6"/>
+                        <a:srgbClr val="D1FADC"/>
                       </a:solidFill>
                       <a:prstDash val="solid"/>
                     </a:lnT>
                     <a:lnB w="9525" cap="flat" cmpd="sng" algn="ctr">
                       <a:solidFill>
-                        <a:srgbClr val="FAEEC6"/>
+                        <a:srgbClr val="D1FADC"/>
                       </a:solidFill>
                       <a:prstDash val="solid"/>
                     </a:lnB>
                     <a:solidFill>
-                      <a:srgbClr val="FDF9ED"/>
+                      <a:srgbClr val="EEFCF1"/>
                     </a:solidFill>
                   </a:tcPr>
                 </a:tc>
@@ -7735,30 +7735,30 @@
                   <a:tcPr anchor="ctr" marL="73152" marR="73152">
                     <a:lnL w="9525" cap="flat" cmpd="sng" algn="ctr">
                       <a:solidFill>
-                        <a:srgbClr val="FAEEC6"/>
+                        <a:srgbClr val="D1FADC"/>
                       </a:solidFill>
                       <a:prstDash val="solid"/>
                     </a:lnL>
                     <a:lnR w="9525" cap="flat" cmpd="sng" algn="ctr">
                       <a:solidFill>
-                        <a:srgbClr val="FAEEC6"/>
+                        <a:srgbClr val="D1FADC"/>
                       </a:solidFill>
                       <a:prstDash val="solid"/>
                     </a:lnR>
                     <a:lnT w="9525" cap="flat" cmpd="sng" algn="ctr">
                       <a:solidFill>
-                        <a:srgbClr val="FAEEC6"/>
+                        <a:srgbClr val="D1FADC"/>
                       </a:solidFill>
                       <a:prstDash val="solid"/>
                     </a:lnT>
                     <a:lnB w="9525" cap="flat" cmpd="sng" algn="ctr">
                       <a:solidFill>
-                        <a:srgbClr val="FAEEC6"/>
+                        <a:srgbClr val="D1FADC"/>
                       </a:solidFill>
                       <a:prstDash val="solid"/>
                     </a:lnB>
                     <a:solidFill>
-                      <a:srgbClr val="FDF9ED"/>
+                      <a:srgbClr val="EEFCF1"/>
                     </a:solidFill>
                   </a:tcPr>
                 </a:tc>
@@ -7781,30 +7781,30 @@
                   <a:tcPr anchor="ctr" marL="73152" marR="73152">
                     <a:lnL w="9525" cap="flat" cmpd="sng" algn="ctr">
                       <a:solidFill>
-                        <a:srgbClr val="FAEEC6"/>
+                        <a:srgbClr val="D1FADC"/>
                       </a:solidFill>
                       <a:prstDash val="solid"/>
                     </a:lnL>
                     <a:lnR w="9525" cap="flat" cmpd="sng" algn="ctr">
                       <a:solidFill>
-                        <a:srgbClr val="FAEEC6"/>
+                        <a:srgbClr val="D1FADC"/>
                       </a:solidFill>
                       <a:prstDash val="solid"/>
                     </a:lnR>
                     <a:lnT w="9525" cap="flat" cmpd="sng" algn="ctr">
                       <a:solidFill>
-                        <a:srgbClr val="FAEEC6"/>
+                        <a:srgbClr val="D1FADC"/>
                       </a:solidFill>
                       <a:prstDash val="solid"/>
                     </a:lnT>
                     <a:lnB w="9525" cap="flat" cmpd="sng" algn="ctr">
                       <a:solidFill>
-                        <a:srgbClr val="FAEEC6"/>
+                        <a:srgbClr val="D1FADC"/>
                       </a:solidFill>
                       <a:prstDash val="solid"/>
                     </a:lnB>
                     <a:solidFill>
-                      <a:srgbClr val="FDF9ED"/>
+                      <a:srgbClr val="EEFCF1"/>
                     </a:solidFill>
                   </a:tcPr>
                 </a:tc>
@@ -7827,7 +7827,7 @@
     <p:bg>
       <p:bgPr>
         <a:solidFill>
-          <a:srgbClr val="CAA016"/>
+          <a:srgbClr val="26C54E"/>
         </a:solidFill>
         <a:effectLst/>
       </p:bgPr>
@@ -7900,7 +7900,7 @@
             <a:r>
               <a:rPr sz="3000" b="1" i="0">
                 <a:solidFill>
-                  <a:srgbClr val="6E570C"/>
+                  <a:srgbClr val="115F25"/>
                 </a:solidFill>
               </a:rPr>
               <a:t>월 보험료 한눈에</a:t>
@@ -7925,11 +7925,11 @@
             </a:avLst>
           </a:prstGeom>
           <a:solidFill>
-            <a:srgbClr val="FDF9ED"/>
+            <a:srgbClr val="EEFCF1"/>
           </a:solidFill>
           <a:ln w="15875">
             <a:solidFill>
-              <a:srgbClr val="FAEEC6"/>
+              <a:srgbClr val="D1FADC"/>
             </a:solidFill>
           </a:ln>
         </p:spPr>
@@ -7956,7 +7956,7 @@
             <a:avLst/>
           </a:prstGeom>
           <a:solidFill>
-            <a:srgbClr val="CAA016"/>
+            <a:srgbClr val="26C54E"/>
           </a:solidFill>
           <a:ln>
             <a:noFill/>
@@ -8014,7 +8014,7 @@
             <a:r>
               <a:rPr sz="1700" b="1" i="0">
                 <a:solidFill>
-                  <a:srgbClr val="6E570C"/>
+                  <a:srgbClr val="115F25"/>
                 </a:solidFill>
               </a:rPr>
               <a:t>월 보험료 합계</a:t>
@@ -8077,11 +8077,11 @@
             </a:avLst>
           </a:prstGeom>
           <a:solidFill>
-            <a:srgbClr val="FDF9ED"/>
+            <a:srgbClr val="EEFCF1"/>
           </a:solidFill>
           <a:ln w="15875">
             <a:solidFill>
-              <a:srgbClr val="FAEEC6"/>
+              <a:srgbClr val="D1FADC"/>
             </a:solidFill>
           </a:ln>
         </p:spPr>
@@ -8108,7 +8108,7 @@
             <a:avLst/>
           </a:prstGeom>
           <a:solidFill>
-            <a:srgbClr val="CAA016"/>
+            <a:srgbClr val="26C54E"/>
           </a:solidFill>
           <a:ln>
             <a:noFill/>
@@ -8166,7 +8166,7 @@
             <a:r>
               <a:rPr sz="1700" b="1" i="0">
                 <a:solidFill>
-                  <a:srgbClr val="6E570C"/>
+                  <a:srgbClr val="115F25"/>
                 </a:solidFill>
               </a:rPr>
               <a:t>연 보험료 합계</a:t>
@@ -8229,11 +8229,11 @@
             </a:avLst>
           </a:prstGeom>
           <a:solidFill>
-            <a:srgbClr val="FDF9ED"/>
+            <a:srgbClr val="EEFCF1"/>
           </a:solidFill>
           <a:ln w="15875">
             <a:solidFill>
-              <a:srgbClr val="FAEEC6"/>
+              <a:srgbClr val="D1FADC"/>
             </a:solidFill>
           </a:ln>
         </p:spPr>
@@ -8260,7 +8260,7 @@
             <a:avLst/>
           </a:prstGeom>
           <a:solidFill>
-            <a:srgbClr val="CAA016"/>
+            <a:srgbClr val="26C54E"/>
           </a:solidFill>
           <a:ln>
             <a:noFill/>
@@ -8318,7 +8318,7 @@
             <a:r>
               <a:rPr sz="1700" b="1" i="0">
                 <a:solidFill>
-                  <a:srgbClr val="6E570C"/>
+                  <a:srgbClr val="115F25"/>
                 </a:solidFill>
               </a:rPr>
               <a:t>월 소득 대비</a:t>
@@ -8416,7 +8416,7 @@
     <p:bg>
       <p:bgPr>
         <a:solidFill>
-          <a:srgbClr val="CAA016"/>
+          <a:srgbClr val="26C54E"/>
         </a:solidFill>
         <a:effectLst/>
       </p:bgPr>
@@ -8489,7 +8489,7 @@
             <a:r>
               <a:rPr sz="3000" b="1" i="0">
                 <a:solidFill>
-                  <a:srgbClr val="6E570C"/>
+                  <a:srgbClr val="115F25"/>
                 </a:solidFill>
               </a:rPr>
               <a:t>점검 메모와 다음 할 일</a:t>
@@ -8514,11 +8514,11 @@
             </a:avLst>
           </a:prstGeom>
           <a:solidFill>
-            <a:srgbClr val="FDF9ED"/>
+            <a:srgbClr val="EEFCF1"/>
           </a:solidFill>
           <a:ln w="15875">
             <a:solidFill>
-              <a:srgbClr val="FAEEC6"/>
+              <a:srgbClr val="D1FADC"/>
             </a:solidFill>
           </a:ln>
         </p:spPr>
@@ -8545,7 +8545,7 @@
             <a:avLst/>
           </a:prstGeom>
           <a:solidFill>
-            <a:srgbClr val="CAA016"/>
+            <a:srgbClr val="26C54E"/>
           </a:solidFill>
           <a:ln>
             <a:noFill/>
@@ -8603,7 +8603,7 @@
             <a:r>
               <a:rPr sz="1800" b="1" i="0">
                 <a:solidFill>
-                  <a:srgbClr val="6E570C"/>
+                  <a:srgbClr val="115F25"/>
                 </a:solidFill>
               </a:rPr>
               <a:t>확인할 것</a:t>
@@ -8666,11 +8666,11 @@
             </a:avLst>
           </a:prstGeom>
           <a:solidFill>
-            <a:srgbClr val="FDF9ED"/>
+            <a:srgbClr val="EEFCF1"/>
           </a:solidFill>
           <a:ln w="15875">
             <a:solidFill>
-              <a:srgbClr val="FAEEC6"/>
+              <a:srgbClr val="D1FADC"/>
             </a:solidFill>
           </a:ln>
         </p:spPr>
@@ -8697,7 +8697,7 @@
             <a:avLst/>
           </a:prstGeom>
           <a:solidFill>
-            <a:srgbClr val="CAA016"/>
+            <a:srgbClr val="26C54E"/>
           </a:solidFill>
           <a:ln>
             <a:noFill/>
@@ -8755,7 +8755,7 @@
             <a:r>
               <a:rPr sz="1800" b="1" i="0">
                 <a:solidFill>
-                  <a:srgbClr val="6E570C"/>
+                  <a:srgbClr val="115F25"/>
                 </a:solidFill>
               </a:rPr>
               <a:t>문의할 것</a:t>
@@ -8818,11 +8818,11 @@
             </a:avLst>
           </a:prstGeom>
           <a:solidFill>
-            <a:srgbClr val="FDF9ED"/>
+            <a:srgbClr val="EEFCF1"/>
           </a:solidFill>
           <a:ln w="15875">
             <a:solidFill>
-              <a:srgbClr val="FAEEC6"/>
+              <a:srgbClr val="D1FADC"/>
             </a:solidFill>
           </a:ln>
         </p:spPr>
@@ -8849,7 +8849,7 @@
             <a:avLst/>
           </a:prstGeom>
           <a:solidFill>
-            <a:srgbClr val="CAA016"/>
+            <a:srgbClr val="26C54E"/>
           </a:solidFill>
           <a:ln>
             <a:noFill/>
@@ -8907,7 +8907,7 @@
             <a:r>
               <a:rPr sz="1800" b="1" i="0">
                 <a:solidFill>
-                  <a:srgbClr val="6E570C"/>
+                  <a:srgbClr val="115F25"/>
                 </a:solidFill>
               </a:rPr>
               <a:t>정리할 날짜</a:t>
@@ -9010,34 +9010,34 @@
         <a:sysClr val="window" lastClr="FFFFFF"/>
       </a:lt1>
       <a:dk2>
-        <a:srgbClr val="6E570C"/>
+        <a:srgbClr val="115F25"/>
       </a:dk2>
       <a:lt2>
-        <a:srgbClr val="FDF9ED"/>
+        <a:srgbClr val="EEFCF1"/>
       </a:lt2>
       <a:accent1>
-        <a:srgbClr val="CAA016"/>
+        <a:srgbClr val="26C54E"/>
       </a:accent1>
       <a:accent2>
-        <a:srgbClr val="3B7A91"/>
+        <a:srgbClr val="209DB6"/>
       </a:accent2>
       <a:accent3>
-        <a:srgbClr val="6E570C"/>
+        <a:srgbClr val="115F25"/>
       </a:accent3>
       <a:accent4>
-        <a:srgbClr val="FAEEC6"/>
+        <a:srgbClr val="D1FADC"/>
       </a:accent4>
       <a:accent5>
-        <a:srgbClr val="828D54"/>
+        <a:srgbClr val="23B182"/>
       </a:accent5>
       <a:accent6>
-        <a:srgbClr val="A89A6D"/>
+        <a:srgbClr val="709F7C"/>
       </a:accent6>
       <a:hlink>
-        <a:srgbClr val="CAA016"/>
+        <a:srgbClr val="26C54E"/>
       </a:hlink>
       <a:folHlink>
-        <a:srgbClr val="6E570C"/>
+        <a:srgbClr val="115F25"/>
       </a:folHlink>
     </a:clrScheme>
     <a:fontScheme name="Office">

--- a/public/fun/pack/pptx/review/보장점검양식_17_부부점검_해바라기담장.pptx
+++ b/public/fun/pack/pptx/review/보장점검양식_17_부부점검_해바라기담장.pptx
@@ -3286,6 +3286,14 @@
 <file path=ppt/slides/slide1.xml><?xml version="1.0" encoding="utf-8"?>
 <p:sld xmlns:a="http://schemas.openxmlformats.org/drawingml/2006/main" xmlns:p="http://schemas.openxmlformats.org/presentationml/2006/main" xmlns:r="http://schemas.openxmlformats.org/officeDocument/2006/relationships">
   <p:cSld>
+    <p:bg>
+      <p:bgPr>
+        <a:solidFill>
+          <a:srgbClr val="FDF8EA"/>
+        </a:solidFill>
+        <a:effectLst/>
+      </p:bgPr>
+    </p:bg>
     <p:spTree>
       <p:nvGrpSpPr>
         <p:cNvPr id="1" name=""/>
@@ -3293,30 +3301,131 @@
         <p:nvPr/>
       </p:nvGrpSpPr>
       <p:grpSpPr/>
-      <p:pic>
-        <p:nvPicPr>
-          <p:cNvPr id="3" name="표지 그림" descr="review-17.jpg"/>
-          <p:cNvPicPr>
-            <a:picLocks noChangeAspect="1"/>
-          </p:cNvPicPr>
+      <p:sp>
+        <p:nvSpPr>
+          <p:cNvPr id="3" name="장식"/>
+          <p:cNvSpPr/>
           <p:nvPr/>
-        </p:nvPicPr>
-        <p:blipFill>
-          <a:blip r:embed="rId2"/>
-          <a:stretch>
-            <a:fillRect/>
-          </a:stretch>
-        </p:blipFill>
-        <p:spPr>
-          <a:xfrm>
-            <a:off x="0" y="0"/>
-            <a:ext cx="12191695" cy="6858000"/>
+        </p:nvSpPr>
+        <p:spPr>
+          <a:xfrm>
+            <a:off x="8168335" y="3749039"/>
+            <a:ext cx="5486400" cy="5486400"/>
+          </a:xfrm>
+          <a:prstGeom prst="ellipse">
+            <a:avLst/>
+          </a:prstGeom>
+          <a:solidFill>
+            <a:srgbClr val="EAD07B"/>
+          </a:solidFill>
+          <a:ln>
+            <a:noFill/>
+          </a:ln>
+        </p:spPr>
+        <p:txBody>
+          <a:bodyPr rtlCol="0" anchor="ctr"/>
+          <a:lstStyle/>
+          <a:p>
+            <a:pPr algn="ctr"/>
+          </a:p>
+        </p:txBody>
+      </p:sp>
+      <p:sp>
+        <p:nvSpPr>
+          <p:cNvPr id="4" name="장식"/>
+          <p:cNvSpPr/>
+          <p:nvPr/>
+        </p:nvSpPr>
+        <p:spPr>
+          <a:xfrm>
+            <a:off x="1737305" y="1371600"/>
+            <a:ext cx="457200" cy="457200"/>
+          </a:xfrm>
+          <a:prstGeom prst="ellipse">
+            <a:avLst/>
+          </a:prstGeom>
+          <a:solidFill>
+            <a:srgbClr val="F3E1A5"/>
+          </a:solidFill>
+          <a:ln>
+            <a:noFill/>
+          </a:ln>
+        </p:spPr>
+        <p:txBody>
+          <a:bodyPr rtlCol="0" anchor="ctr"/>
+          <a:lstStyle/>
+          <a:p>
+            <a:pPr algn="ctr"/>
+          </a:p>
+        </p:txBody>
+      </p:sp>
+      <p:sp>
+        <p:nvSpPr>
+          <p:cNvPr id="5" name="장식"/>
+          <p:cNvSpPr/>
+          <p:nvPr/>
+        </p:nvSpPr>
+        <p:spPr>
+          <a:xfrm>
+            <a:off x="1036289" y="2468879"/>
+            <a:ext cx="182880" cy="182880"/>
+          </a:xfrm>
+          <a:prstGeom prst="ellipse">
+            <a:avLst/>
+          </a:prstGeom>
+          <a:solidFill>
+            <a:srgbClr val="EAD07B"/>
+          </a:solidFill>
+          <a:ln>
+            <a:noFill/>
+          </a:ln>
+        </p:spPr>
+        <p:txBody>
+          <a:bodyPr rtlCol="0" anchor="ctr"/>
+          <a:lstStyle/>
+          <a:p>
+            <a:pPr algn="ctr"/>
+          </a:p>
+        </p:txBody>
+      </p:sp>
+      <p:sp>
+        <p:nvSpPr>
+          <p:cNvPr id="6" name="라벨"/>
+          <p:cNvSpPr txBox="1"/>
+          <p:nvPr/>
+        </p:nvSpPr>
+        <p:spPr>
+          <a:xfrm>
+            <a:off x="5120511" y="1600200"/>
+            <a:ext cx="5608179" cy="274320"/>
           </a:xfrm>
           <a:prstGeom prst="rect">
             <a:avLst/>
           </a:prstGeom>
-        </p:spPr>
-      </p:pic>
+          <a:noFill/>
+        </p:spPr>
+        <p:txBody>
+          <a:bodyPr wrap="square" lIns="54864" rIns="54864" tIns="27432" bIns="27432" anchor="t">
+            <a:noAutofit/>
+          </a:bodyPr>
+          <a:lstStyle/>
+          <a:p>
+            <a:pPr algn="l">
+              <a:lnSpc>
+                <a:spcPct val="115000"/>
+              </a:lnSpc>
+            </a:pPr>
+            <a:r>
+              <a:rPr sz="1000" b="1" i="0" spc="250">
+                <a:solidFill>
+                  <a:srgbClr val="26231F"/>
+                </a:solidFill>
+              </a:rPr>
+              <a:t>INSURANCE CHECK</a:t>
+            </a:r>
+          </a:p>
+        </p:txBody>
+      </p:sp>
       <p:sp>
         <p:nvSpPr>
           <p:cNvPr id="2" name="Title 1"/>
@@ -3329,8 +3438,8 @@
         </p:nvSpPr>
         <p:spPr>
           <a:xfrm>
-            <a:off x="853418" y="2057400"/>
-            <a:ext cx="6095847" cy="1554480"/>
+            <a:off x="5120511" y="2057400"/>
+            <a:ext cx="5608179" cy="1188720"/>
           </a:xfrm>
         </p:spPr>
         <p:txBody>
@@ -3347,7 +3456,7 @@
             <a:r>
               <a:rPr sz="3600" b="1" i="0">
                 <a:solidFill>
-                  <a:srgbClr val="115F25"/>
+                  <a:srgbClr val="26231F"/>
                 </a:solidFill>
               </a:rPr>
               <a:t>우리 보험 점검 시간</a:t>
@@ -3357,14 +3466,14 @@
       </p:sp>
       <p:sp>
         <p:nvSpPr>
-          <p:cNvPr id="4" name="한 줄 문구"/>
+          <p:cNvPr id="7" name="한 줄 문구"/>
           <p:cNvSpPr txBox="1"/>
           <p:nvPr/>
         </p:nvSpPr>
         <p:spPr>
           <a:xfrm>
-            <a:off x="853418" y="3749039"/>
-            <a:ext cx="6095847" cy="822960"/>
+            <a:off x="5120511" y="3337560"/>
+            <a:ext cx="5608179" cy="822960"/>
           </a:xfrm>
           <a:prstGeom prst="rect">
             <a:avLst/>
@@ -3383,9 +3492,9 @@
               </a:lnSpc>
             </a:pPr>
             <a:r>
-              <a:rPr sz="1700" b="0" i="1">
+              <a:rPr sz="1700" b="0" i="0">
                 <a:solidFill>
-                  <a:srgbClr val="115F25"/>
+                  <a:srgbClr val="26231F"/>
                 </a:solidFill>
               </a:rPr>
               <a:t>겹치는 항목이 있는지 같이 봅니다</a:t>
@@ -3395,14 +3504,14 @@
       </p:sp>
       <p:sp>
         <p:nvSpPr>
-          <p:cNvPr id="5" name="안내 문구"/>
+          <p:cNvPr id="8" name="안내 문구"/>
           <p:cNvSpPr txBox="1"/>
           <p:nvPr/>
         </p:nvSpPr>
         <p:spPr>
           <a:xfrm>
-            <a:off x="853418" y="4617720"/>
-            <a:ext cx="6095847" cy="914400"/>
+            <a:off x="5120511" y="4206240"/>
+            <a:ext cx="5608179" cy="914400"/>
           </a:xfrm>
           <a:prstGeom prst="rect">
             <a:avLst/>
@@ -3423,10 +3532,10 @@
             <a:r>
               <a:rPr sz="1400" b="0" i="0">
                 <a:solidFill>
-                  <a:srgbClr val="666666"/>
+                  <a:srgbClr val="26231F"/>
                 </a:solidFill>
               </a:rPr>
-              <a:t>부부 점검 · 2027. 00. 00</a:t>
+              <a:t>부부 점검 · 날짜 입력</a:t>
             </a:r>
           </a:p>
           <a:p>
@@ -3438,7 +3547,7 @@
             <a:r>
               <a:rPr sz="1400" b="0" i="0">
                 <a:solidFill>
-                  <a:srgbClr val="666666"/>
+                  <a:srgbClr val="26231F"/>
                 </a:solidFill>
               </a:rPr>
               <a:t>가입 내용을 정리하고 함께 확인하는 양식</a:t>
@@ -3460,7 +3569,7 @@
     <p:bg>
       <p:bgPr>
         <a:solidFill>
-          <a:srgbClr val="26C54E"/>
+          <a:srgbClr val="FFFFFF"/>
         </a:solidFill>
         <a:effectLst/>
       </p:bgPr>
@@ -3480,16 +3589,81 @@
         </p:nvSpPr>
         <p:spPr>
           <a:xfrm>
-            <a:off x="274320" y="274320"/>
-            <a:ext cx="11643055" cy="6309360"/>
-          </a:xfrm>
-          <a:prstGeom prst="roundRect">
-            <a:avLst>
-              <a:gd name="adj" fmla="val 3500"/>
-            </a:avLst>
+            <a:off x="640080" y="6400800"/>
+            <a:ext cx="10911535" cy="10972"/>
+          </a:xfrm>
+          <a:prstGeom prst="rect">
+            <a:avLst/>
           </a:prstGeom>
           <a:solidFill>
-            <a:srgbClr val="FFFFFF"/>
+            <a:srgbClr val="26231F"/>
+          </a:solidFill>
+          <a:ln>
+            <a:noFill/>
+          </a:ln>
+        </p:spPr>
+        <p:txBody>
+          <a:bodyPr rtlCol="0" anchor="ctr"/>
+          <a:lstStyle/>
+          <a:p>
+            <a:pPr algn="ctr"/>
+          </a:p>
+        </p:txBody>
+      </p:sp>
+      <p:sp>
+        <p:nvSpPr>
+          <p:cNvPr id="4" name="하단 라벨"/>
+          <p:cNvSpPr txBox="1"/>
+          <p:nvPr/>
+        </p:nvSpPr>
+        <p:spPr>
+          <a:xfrm>
+            <a:off x="640080" y="6437376"/>
+            <a:ext cx="5486400" cy="274320"/>
+          </a:xfrm>
+          <a:prstGeom prst="rect">
+            <a:avLst/>
+          </a:prstGeom>
+          <a:noFill/>
+        </p:spPr>
+        <p:txBody>
+          <a:bodyPr wrap="square" lIns="54864" rIns="54864" tIns="27432" bIns="27432" anchor="ctr">
+            <a:noAutofit/>
+          </a:bodyPr>
+          <a:lstStyle/>
+          <a:p>
+            <a:pPr algn="l">
+              <a:lnSpc>
+                <a:spcPct val="115000"/>
+              </a:lnSpc>
+            </a:pPr>
+            <a:r>
+              <a:rPr sz="900" b="1" i="0" spc="250">
+                <a:solidFill>
+                  <a:srgbClr val="26231F"/>
+                </a:solidFill>
+              </a:rPr>
+              <a:t>INSURANCE CHECK</a:t>
+            </a:r>
+          </a:p>
+        </p:txBody>
+      </p:sp>
+      <p:sp>
+        <p:nvSpPr>
+          <p:cNvPr id="5" name="포인트"/>
+          <p:cNvSpPr/>
+          <p:nvPr/>
+        </p:nvSpPr>
+        <p:spPr>
+          <a:xfrm>
+            <a:off x="11213287" y="6473952"/>
+            <a:ext cx="219456" cy="219456"/>
+          </a:xfrm>
+          <a:prstGeom prst="ellipse">
+            <a:avLst/>
+          </a:prstGeom>
+          <a:solidFill>
+            <a:srgbClr val="EAD07B"/>
           </a:solidFill>
           <a:ln>
             <a:noFill/>
@@ -3515,8 +3689,8 @@
         </p:nvSpPr>
         <p:spPr>
           <a:xfrm>
-            <a:off x="731520" y="548640"/>
-            <a:ext cx="9448495" cy="868680"/>
+            <a:off x="640080" y="502920"/>
+            <a:ext cx="10911535" cy="914400"/>
           </a:xfrm>
         </p:spPr>
         <p:txBody>
@@ -3533,7 +3707,7 @@
             <a:r>
               <a:rPr sz="3000" b="1" i="0">
                 <a:solidFill>
-                  <a:srgbClr val="115F25"/>
+                  <a:srgbClr val="26231F"/>
                 </a:solidFill>
               </a:rPr>
               <a:t>점검 대상 현황</a:t>
@@ -3543,15 +3717,15 @@
       </p:sp>
       <p:graphicFrame>
         <p:nvGraphicFramePr>
-          <p:cNvPr id="4" name="표"/>
+          <p:cNvPr id="6" name="표"/>
           <p:cNvGraphicFramePr>
             <a:graphicFrameLocks noGrp="1"/>
           </p:cNvGraphicFramePr>
           <p:nvPr/>
         </p:nvGraphicFramePr>
         <p:xfrm>
-          <a:off x="731520" y="1600200"/>
-          <a:ext cx="10728654" cy="3657600"/>
+          <a:off x="640080" y="1600200"/>
+          <a:ext cx="10911534" cy="3657600"/>
         </p:xfrm>
         <a:graphic>
           <a:graphicData uri="http://schemas.openxmlformats.org/drawingml/2006/table">
@@ -3560,9 +3734,9 @@
                 <a:tableStyleId>{5C22544A-7EE6-4342-B048-85BDC9FD1C3A}</a:tableStyleId>
               </a:tblPr>
               <a:tblGrid>
-                <a:gridCol w="3576218"/>
-                <a:gridCol w="3576218"/>
-                <a:gridCol w="3576218"/>
+                <a:gridCol w="3637178"/>
+                <a:gridCol w="3637178"/>
+                <a:gridCol w="3637178"/>
               </a:tblGrid>
               <a:tr h="731520">
                 <a:tc>
@@ -3574,7 +3748,7 @@
                       <a:r>
                         <a:rPr sz="1600" b="1">
                           <a:solidFill>
-                            <a:srgbClr val="FFFFFF"/>
+                            <a:srgbClr val="26231F"/>
                           </a:solidFill>
                         </a:rPr>
                         <a:t>구분</a:t>
@@ -3584,30 +3758,30 @@
                   <a:tcPr anchor="ctr" marL="73152" marR="73152">
                     <a:lnL w="9525" cap="flat" cmpd="sng" algn="ctr">
                       <a:solidFill>
-                        <a:srgbClr val="26C54E"/>
+                        <a:srgbClr val="EAD07B"/>
                       </a:solidFill>
                       <a:prstDash val="solid"/>
                     </a:lnL>
                     <a:lnR w="9525" cap="flat" cmpd="sng" algn="ctr">
                       <a:solidFill>
-                        <a:srgbClr val="26C54E"/>
+                        <a:srgbClr val="EAD07B"/>
                       </a:solidFill>
                       <a:prstDash val="solid"/>
                     </a:lnR>
                     <a:lnT w="9525" cap="flat" cmpd="sng" algn="ctr">
                       <a:solidFill>
-                        <a:srgbClr val="26C54E"/>
+                        <a:srgbClr val="EAD07B"/>
                       </a:solidFill>
                       <a:prstDash val="solid"/>
                     </a:lnT>
                     <a:lnB w="9525" cap="flat" cmpd="sng" algn="ctr">
                       <a:solidFill>
-                        <a:srgbClr val="26C54E"/>
+                        <a:srgbClr val="EAD07B"/>
                       </a:solidFill>
                       <a:prstDash val="solid"/>
                     </a:lnB>
                     <a:solidFill>
-                      <a:srgbClr val="26C54E"/>
+                      <a:srgbClr val="EAD07B"/>
                     </a:solidFill>
                   </a:tcPr>
                 </a:tc>
@@ -3620,7 +3794,7 @@
                       <a:r>
                         <a:rPr sz="1600" b="1">
                           <a:solidFill>
-                            <a:srgbClr val="FFFFFF"/>
+                            <a:srgbClr val="26231F"/>
                           </a:solidFill>
                         </a:rPr>
                         <a:t>남편</a:t>
@@ -3630,30 +3804,30 @@
                   <a:tcPr anchor="ctr" marL="73152" marR="73152">
                     <a:lnL w="9525" cap="flat" cmpd="sng" algn="ctr">
                       <a:solidFill>
-                        <a:srgbClr val="26C54E"/>
+                        <a:srgbClr val="EAD07B"/>
                       </a:solidFill>
                       <a:prstDash val="solid"/>
                     </a:lnL>
                     <a:lnR w="9525" cap="flat" cmpd="sng" algn="ctr">
                       <a:solidFill>
-                        <a:srgbClr val="26C54E"/>
+                        <a:srgbClr val="EAD07B"/>
                       </a:solidFill>
                       <a:prstDash val="solid"/>
                     </a:lnR>
                     <a:lnT w="9525" cap="flat" cmpd="sng" algn="ctr">
                       <a:solidFill>
-                        <a:srgbClr val="26C54E"/>
+                        <a:srgbClr val="EAD07B"/>
                       </a:solidFill>
                       <a:prstDash val="solid"/>
                     </a:lnT>
                     <a:lnB w="9525" cap="flat" cmpd="sng" algn="ctr">
                       <a:solidFill>
-                        <a:srgbClr val="26C54E"/>
+                        <a:srgbClr val="EAD07B"/>
                       </a:solidFill>
                       <a:prstDash val="solid"/>
                     </a:lnB>
                     <a:solidFill>
-                      <a:srgbClr val="26C54E"/>
+                      <a:srgbClr val="EAD07B"/>
                     </a:solidFill>
                   </a:tcPr>
                 </a:tc>
@@ -3666,7 +3840,7 @@
                       <a:r>
                         <a:rPr sz="1600" b="1">
                           <a:solidFill>
-                            <a:srgbClr val="FFFFFF"/>
+                            <a:srgbClr val="26231F"/>
                           </a:solidFill>
                         </a:rPr>
                         <a:t>아내</a:t>
@@ -3676,30 +3850,30 @@
                   <a:tcPr anchor="ctr" marL="73152" marR="73152">
                     <a:lnL w="9525" cap="flat" cmpd="sng" algn="ctr">
                       <a:solidFill>
-                        <a:srgbClr val="26C54E"/>
+                        <a:srgbClr val="EAD07B"/>
                       </a:solidFill>
                       <a:prstDash val="solid"/>
                     </a:lnL>
                     <a:lnR w="9525" cap="flat" cmpd="sng" algn="ctr">
                       <a:solidFill>
-                        <a:srgbClr val="26C54E"/>
+                        <a:srgbClr val="EAD07B"/>
                       </a:solidFill>
                       <a:prstDash val="solid"/>
                     </a:lnR>
                     <a:lnT w="9525" cap="flat" cmpd="sng" algn="ctr">
                       <a:solidFill>
-                        <a:srgbClr val="26C54E"/>
+                        <a:srgbClr val="EAD07B"/>
                       </a:solidFill>
                       <a:prstDash val="solid"/>
                     </a:lnT>
                     <a:lnB w="9525" cap="flat" cmpd="sng" algn="ctr">
                       <a:solidFill>
-                        <a:srgbClr val="26C54E"/>
+                        <a:srgbClr val="EAD07B"/>
                       </a:solidFill>
                       <a:prstDash val="solid"/>
                     </a:lnB>
                     <a:solidFill>
-                      <a:srgbClr val="26C54E"/>
+                      <a:srgbClr val="EAD07B"/>
                     </a:solidFill>
                   </a:tcPr>
                 </a:tc>
@@ -3714,7 +3888,7 @@
                       <a:r>
                         <a:rPr sz="1600" b="1">
                           <a:solidFill>
-                            <a:srgbClr val="115F25"/>
+                            <a:srgbClr val="494127"/>
                           </a:solidFill>
                         </a:rPr>
                         <a:t>이름</a:t>
@@ -3724,30 +3898,30 @@
                   <a:tcPr anchor="ctr" marL="73152" marR="73152">
                     <a:lnL w="9525" cap="flat" cmpd="sng" algn="ctr">
                       <a:solidFill>
-                        <a:srgbClr val="D1FADC"/>
+                        <a:srgbClr val="FAF1D1"/>
                       </a:solidFill>
                       <a:prstDash val="solid"/>
                     </a:lnL>
                     <a:lnR w="9525" cap="flat" cmpd="sng" algn="ctr">
                       <a:solidFill>
-                        <a:srgbClr val="D1FADC"/>
+                        <a:srgbClr val="FAF1D1"/>
                       </a:solidFill>
                       <a:prstDash val="solid"/>
                     </a:lnR>
                     <a:lnT w="9525" cap="flat" cmpd="sng" algn="ctr">
                       <a:solidFill>
-                        <a:srgbClr val="D1FADC"/>
+                        <a:srgbClr val="FAF1D1"/>
                       </a:solidFill>
                       <a:prstDash val="solid"/>
                     </a:lnT>
                     <a:lnB w="9525" cap="flat" cmpd="sng" algn="ctr">
                       <a:solidFill>
-                        <a:srgbClr val="D1FADC"/>
+                        <a:srgbClr val="FAF1D1"/>
                       </a:solidFill>
                       <a:prstDash val="solid"/>
                     </a:lnB>
                     <a:solidFill>
-                      <a:srgbClr val="D1FADC"/>
+                      <a:srgbClr val="FAF1D1"/>
                     </a:solidFill>
                   </a:tcPr>
                 </a:tc>
@@ -3760,7 +3934,7 @@
                       <a:r>
                         <a:rPr sz="1600" b="0">
                           <a:solidFill>
-                            <a:srgbClr val="2B2B2B"/>
+                            <a:srgbClr val="26231F"/>
                           </a:solidFill>
                         </a:rPr>
                         <a:t/>
@@ -3770,25 +3944,25 @@
                   <a:tcPr anchor="ctr" marL="73152" marR="73152">
                     <a:lnL w="9525" cap="flat" cmpd="sng" algn="ctr">
                       <a:solidFill>
-                        <a:srgbClr val="D1FADC"/>
+                        <a:srgbClr val="FAF1D1"/>
                       </a:solidFill>
                       <a:prstDash val="solid"/>
                     </a:lnL>
                     <a:lnR w="9525" cap="flat" cmpd="sng" algn="ctr">
                       <a:solidFill>
-                        <a:srgbClr val="D1FADC"/>
+                        <a:srgbClr val="FAF1D1"/>
                       </a:solidFill>
                       <a:prstDash val="solid"/>
                     </a:lnR>
                     <a:lnT w="9525" cap="flat" cmpd="sng" algn="ctr">
                       <a:solidFill>
-                        <a:srgbClr val="D1FADC"/>
+                        <a:srgbClr val="FAF1D1"/>
                       </a:solidFill>
                       <a:prstDash val="solid"/>
                     </a:lnT>
                     <a:lnB w="9525" cap="flat" cmpd="sng" algn="ctr">
                       <a:solidFill>
-                        <a:srgbClr val="D1FADC"/>
+                        <a:srgbClr val="FAF1D1"/>
                       </a:solidFill>
                       <a:prstDash val="solid"/>
                     </a:lnB>
@@ -3806,7 +3980,7 @@
                       <a:r>
                         <a:rPr sz="1600" b="0">
                           <a:solidFill>
-                            <a:srgbClr val="2B2B2B"/>
+                            <a:srgbClr val="26231F"/>
                           </a:solidFill>
                         </a:rPr>
                         <a:t/>
@@ -3816,25 +3990,25 @@
                   <a:tcPr anchor="ctr" marL="73152" marR="73152">
                     <a:lnL w="9525" cap="flat" cmpd="sng" algn="ctr">
                       <a:solidFill>
-                        <a:srgbClr val="D1FADC"/>
+                        <a:srgbClr val="FAF1D1"/>
                       </a:solidFill>
                       <a:prstDash val="solid"/>
                     </a:lnL>
                     <a:lnR w="9525" cap="flat" cmpd="sng" algn="ctr">
                       <a:solidFill>
-                        <a:srgbClr val="D1FADC"/>
+                        <a:srgbClr val="FAF1D1"/>
                       </a:solidFill>
                       <a:prstDash val="solid"/>
                     </a:lnR>
                     <a:lnT w="9525" cap="flat" cmpd="sng" algn="ctr">
                       <a:solidFill>
-                        <a:srgbClr val="D1FADC"/>
+                        <a:srgbClr val="FAF1D1"/>
                       </a:solidFill>
                       <a:prstDash val="solid"/>
                     </a:lnT>
                     <a:lnB w="9525" cap="flat" cmpd="sng" algn="ctr">
                       <a:solidFill>
-                        <a:srgbClr val="D1FADC"/>
+                        <a:srgbClr val="FAF1D1"/>
                       </a:solidFill>
                       <a:prstDash val="solid"/>
                     </a:lnB>
@@ -3854,7 +4028,7 @@
                       <a:r>
                         <a:rPr sz="1600" b="1">
                           <a:solidFill>
-                            <a:srgbClr val="115F25"/>
+                            <a:srgbClr val="494127"/>
                           </a:solidFill>
                         </a:rPr>
                         <a:t>나이</a:t>
@@ -3864,30 +4038,30 @@
                   <a:tcPr anchor="ctr" marL="73152" marR="73152">
                     <a:lnL w="9525" cap="flat" cmpd="sng" algn="ctr">
                       <a:solidFill>
-                        <a:srgbClr val="D1FADC"/>
+                        <a:srgbClr val="FAF1D1"/>
                       </a:solidFill>
                       <a:prstDash val="solid"/>
                     </a:lnL>
                     <a:lnR w="9525" cap="flat" cmpd="sng" algn="ctr">
                       <a:solidFill>
-                        <a:srgbClr val="D1FADC"/>
+                        <a:srgbClr val="FAF1D1"/>
                       </a:solidFill>
                       <a:prstDash val="solid"/>
                     </a:lnR>
                     <a:lnT w="9525" cap="flat" cmpd="sng" algn="ctr">
                       <a:solidFill>
-                        <a:srgbClr val="D1FADC"/>
+                        <a:srgbClr val="FAF1D1"/>
                       </a:solidFill>
                       <a:prstDash val="solid"/>
                     </a:lnT>
                     <a:lnB w="9525" cap="flat" cmpd="sng" algn="ctr">
                       <a:solidFill>
-                        <a:srgbClr val="D1FADC"/>
+                        <a:srgbClr val="FAF1D1"/>
                       </a:solidFill>
                       <a:prstDash val="solid"/>
                     </a:lnB>
                     <a:solidFill>
-                      <a:srgbClr val="D1FADC"/>
+                      <a:srgbClr val="FAF1D1"/>
                     </a:solidFill>
                   </a:tcPr>
                 </a:tc>
@@ -3900,7 +4074,7 @@
                       <a:r>
                         <a:rPr sz="1600" b="0">
                           <a:solidFill>
-                            <a:srgbClr val="2B2B2B"/>
+                            <a:srgbClr val="26231F"/>
                           </a:solidFill>
                         </a:rPr>
                         <a:t/>
@@ -3910,30 +4084,30 @@
                   <a:tcPr anchor="ctr" marL="73152" marR="73152">
                     <a:lnL w="9525" cap="flat" cmpd="sng" algn="ctr">
                       <a:solidFill>
-                        <a:srgbClr val="D1FADC"/>
+                        <a:srgbClr val="FAF1D1"/>
                       </a:solidFill>
                       <a:prstDash val="solid"/>
                     </a:lnL>
                     <a:lnR w="9525" cap="flat" cmpd="sng" algn="ctr">
                       <a:solidFill>
-                        <a:srgbClr val="D1FADC"/>
+                        <a:srgbClr val="FAF1D1"/>
                       </a:solidFill>
                       <a:prstDash val="solid"/>
                     </a:lnR>
                     <a:lnT w="9525" cap="flat" cmpd="sng" algn="ctr">
                       <a:solidFill>
-                        <a:srgbClr val="D1FADC"/>
+                        <a:srgbClr val="FAF1D1"/>
                       </a:solidFill>
                       <a:prstDash val="solid"/>
                     </a:lnT>
                     <a:lnB w="9525" cap="flat" cmpd="sng" algn="ctr">
                       <a:solidFill>
-                        <a:srgbClr val="D1FADC"/>
+                        <a:srgbClr val="FAF1D1"/>
                       </a:solidFill>
                       <a:prstDash val="solid"/>
                     </a:lnB>
                     <a:solidFill>
-                      <a:srgbClr val="EEFCF1"/>
+                      <a:srgbClr val="FDF8EA"/>
                     </a:solidFill>
                   </a:tcPr>
                 </a:tc>
@@ -3946,7 +4120,7 @@
                       <a:r>
                         <a:rPr sz="1600" b="0">
                           <a:solidFill>
-                            <a:srgbClr val="2B2B2B"/>
+                            <a:srgbClr val="26231F"/>
                           </a:solidFill>
                         </a:rPr>
                         <a:t/>
@@ -3956,30 +4130,30 @@
                   <a:tcPr anchor="ctr" marL="73152" marR="73152">
                     <a:lnL w="9525" cap="flat" cmpd="sng" algn="ctr">
                       <a:solidFill>
-                        <a:srgbClr val="D1FADC"/>
+                        <a:srgbClr val="FAF1D1"/>
                       </a:solidFill>
                       <a:prstDash val="solid"/>
                     </a:lnL>
                     <a:lnR w="9525" cap="flat" cmpd="sng" algn="ctr">
                       <a:solidFill>
-                        <a:srgbClr val="D1FADC"/>
+                        <a:srgbClr val="FAF1D1"/>
                       </a:solidFill>
                       <a:prstDash val="solid"/>
                     </a:lnR>
                     <a:lnT w="9525" cap="flat" cmpd="sng" algn="ctr">
                       <a:solidFill>
-                        <a:srgbClr val="D1FADC"/>
+                        <a:srgbClr val="FAF1D1"/>
                       </a:solidFill>
                       <a:prstDash val="solid"/>
                     </a:lnT>
                     <a:lnB w="9525" cap="flat" cmpd="sng" algn="ctr">
                       <a:solidFill>
-                        <a:srgbClr val="D1FADC"/>
+                        <a:srgbClr val="FAF1D1"/>
                       </a:solidFill>
                       <a:prstDash val="solid"/>
                     </a:lnB>
                     <a:solidFill>
-                      <a:srgbClr val="EEFCF1"/>
+                      <a:srgbClr val="FDF8EA"/>
                     </a:solidFill>
                   </a:tcPr>
                 </a:tc>
@@ -3994,7 +4168,7 @@
                       <a:r>
                         <a:rPr sz="1600" b="1">
                           <a:solidFill>
-                            <a:srgbClr val="115F25"/>
+                            <a:srgbClr val="494127"/>
                           </a:solidFill>
                         </a:rPr>
                         <a:t>직업</a:t>
@@ -4004,30 +4178,30 @@
                   <a:tcPr anchor="ctr" marL="73152" marR="73152">
                     <a:lnL w="9525" cap="flat" cmpd="sng" algn="ctr">
                       <a:solidFill>
-                        <a:srgbClr val="D1FADC"/>
+                        <a:srgbClr val="FAF1D1"/>
                       </a:solidFill>
                       <a:prstDash val="solid"/>
                     </a:lnL>
                     <a:lnR w="9525" cap="flat" cmpd="sng" algn="ctr">
                       <a:solidFill>
-                        <a:srgbClr val="D1FADC"/>
+                        <a:srgbClr val="FAF1D1"/>
                       </a:solidFill>
                       <a:prstDash val="solid"/>
                     </a:lnR>
                     <a:lnT w="9525" cap="flat" cmpd="sng" algn="ctr">
                       <a:solidFill>
-                        <a:srgbClr val="D1FADC"/>
+                        <a:srgbClr val="FAF1D1"/>
                       </a:solidFill>
                       <a:prstDash val="solid"/>
                     </a:lnT>
                     <a:lnB w="9525" cap="flat" cmpd="sng" algn="ctr">
                       <a:solidFill>
-                        <a:srgbClr val="D1FADC"/>
+                        <a:srgbClr val="FAF1D1"/>
                       </a:solidFill>
                       <a:prstDash val="solid"/>
                     </a:lnB>
                     <a:solidFill>
-                      <a:srgbClr val="D1FADC"/>
+                      <a:srgbClr val="FAF1D1"/>
                     </a:solidFill>
                   </a:tcPr>
                 </a:tc>
@@ -4040,7 +4214,7 @@
                       <a:r>
                         <a:rPr sz="1600" b="0">
                           <a:solidFill>
-                            <a:srgbClr val="2B2B2B"/>
+                            <a:srgbClr val="26231F"/>
                           </a:solidFill>
                         </a:rPr>
                         <a:t/>
@@ -4050,25 +4224,25 @@
                   <a:tcPr anchor="ctr" marL="73152" marR="73152">
                     <a:lnL w="9525" cap="flat" cmpd="sng" algn="ctr">
                       <a:solidFill>
-                        <a:srgbClr val="D1FADC"/>
+                        <a:srgbClr val="FAF1D1"/>
                       </a:solidFill>
                       <a:prstDash val="solid"/>
                     </a:lnL>
                     <a:lnR w="9525" cap="flat" cmpd="sng" algn="ctr">
                       <a:solidFill>
-                        <a:srgbClr val="D1FADC"/>
+                        <a:srgbClr val="FAF1D1"/>
                       </a:solidFill>
                       <a:prstDash val="solid"/>
                     </a:lnR>
                     <a:lnT w="9525" cap="flat" cmpd="sng" algn="ctr">
                       <a:solidFill>
-                        <a:srgbClr val="D1FADC"/>
+                        <a:srgbClr val="FAF1D1"/>
                       </a:solidFill>
                       <a:prstDash val="solid"/>
                     </a:lnT>
                     <a:lnB w="9525" cap="flat" cmpd="sng" algn="ctr">
                       <a:solidFill>
-                        <a:srgbClr val="D1FADC"/>
+                        <a:srgbClr val="FAF1D1"/>
                       </a:solidFill>
                       <a:prstDash val="solid"/>
                     </a:lnB>
@@ -4086,7 +4260,7 @@
                       <a:r>
                         <a:rPr sz="1600" b="0">
                           <a:solidFill>
-                            <a:srgbClr val="2B2B2B"/>
+                            <a:srgbClr val="26231F"/>
                           </a:solidFill>
                         </a:rPr>
                         <a:t/>
@@ -4096,25 +4270,25 @@
                   <a:tcPr anchor="ctr" marL="73152" marR="73152">
                     <a:lnL w="9525" cap="flat" cmpd="sng" algn="ctr">
                       <a:solidFill>
-                        <a:srgbClr val="D1FADC"/>
+                        <a:srgbClr val="FAF1D1"/>
                       </a:solidFill>
                       <a:prstDash val="solid"/>
                     </a:lnL>
                     <a:lnR w="9525" cap="flat" cmpd="sng" algn="ctr">
                       <a:solidFill>
-                        <a:srgbClr val="D1FADC"/>
+                        <a:srgbClr val="FAF1D1"/>
                       </a:solidFill>
                       <a:prstDash val="solid"/>
                     </a:lnR>
                     <a:lnT w="9525" cap="flat" cmpd="sng" algn="ctr">
                       <a:solidFill>
-                        <a:srgbClr val="D1FADC"/>
+                        <a:srgbClr val="FAF1D1"/>
                       </a:solidFill>
                       <a:prstDash val="solid"/>
                     </a:lnT>
                     <a:lnB w="9525" cap="flat" cmpd="sng" algn="ctr">
                       <a:solidFill>
-                        <a:srgbClr val="D1FADC"/>
+                        <a:srgbClr val="FAF1D1"/>
                       </a:solidFill>
                       <a:prstDash val="solid"/>
                     </a:lnB>
@@ -4134,7 +4308,7 @@
                       <a:r>
                         <a:rPr sz="1600" b="1">
                           <a:solidFill>
-                            <a:srgbClr val="115F25"/>
+                            <a:srgbClr val="494127"/>
                           </a:solidFill>
                         </a:rPr>
                         <a:t>건강 상태 메모</a:t>
@@ -4144,30 +4318,30 @@
                   <a:tcPr anchor="ctr" marL="73152" marR="73152">
                     <a:lnL w="9525" cap="flat" cmpd="sng" algn="ctr">
                       <a:solidFill>
-                        <a:srgbClr val="D1FADC"/>
+                        <a:srgbClr val="FAF1D1"/>
                       </a:solidFill>
                       <a:prstDash val="solid"/>
                     </a:lnL>
                     <a:lnR w="9525" cap="flat" cmpd="sng" algn="ctr">
                       <a:solidFill>
-                        <a:srgbClr val="D1FADC"/>
+                        <a:srgbClr val="FAF1D1"/>
                       </a:solidFill>
                       <a:prstDash val="solid"/>
                     </a:lnR>
                     <a:lnT w="9525" cap="flat" cmpd="sng" algn="ctr">
                       <a:solidFill>
-                        <a:srgbClr val="D1FADC"/>
+                        <a:srgbClr val="FAF1D1"/>
                       </a:solidFill>
                       <a:prstDash val="solid"/>
                     </a:lnT>
                     <a:lnB w="9525" cap="flat" cmpd="sng" algn="ctr">
                       <a:solidFill>
-                        <a:srgbClr val="D1FADC"/>
+                        <a:srgbClr val="FAF1D1"/>
                       </a:solidFill>
                       <a:prstDash val="solid"/>
                     </a:lnB>
                     <a:solidFill>
-                      <a:srgbClr val="D1FADC"/>
+                      <a:srgbClr val="FAF1D1"/>
                     </a:solidFill>
                   </a:tcPr>
                 </a:tc>
@@ -4180,7 +4354,7 @@
                       <a:r>
                         <a:rPr sz="1600" b="0">
                           <a:solidFill>
-                            <a:srgbClr val="2B2B2B"/>
+                            <a:srgbClr val="26231F"/>
                           </a:solidFill>
                         </a:rPr>
                         <a:t/>
@@ -4190,30 +4364,30 @@
                   <a:tcPr anchor="ctr" marL="73152" marR="73152">
                     <a:lnL w="9525" cap="flat" cmpd="sng" algn="ctr">
                       <a:solidFill>
-                        <a:srgbClr val="D1FADC"/>
+                        <a:srgbClr val="FAF1D1"/>
                       </a:solidFill>
                       <a:prstDash val="solid"/>
                     </a:lnL>
                     <a:lnR w="9525" cap="flat" cmpd="sng" algn="ctr">
                       <a:solidFill>
-                        <a:srgbClr val="D1FADC"/>
+                        <a:srgbClr val="FAF1D1"/>
                       </a:solidFill>
                       <a:prstDash val="solid"/>
                     </a:lnR>
                     <a:lnT w="9525" cap="flat" cmpd="sng" algn="ctr">
                       <a:solidFill>
-                        <a:srgbClr val="D1FADC"/>
+                        <a:srgbClr val="FAF1D1"/>
                       </a:solidFill>
                       <a:prstDash val="solid"/>
                     </a:lnT>
                     <a:lnB w="9525" cap="flat" cmpd="sng" algn="ctr">
                       <a:solidFill>
-                        <a:srgbClr val="D1FADC"/>
+                        <a:srgbClr val="FAF1D1"/>
                       </a:solidFill>
                       <a:prstDash val="solid"/>
                     </a:lnB>
                     <a:solidFill>
-                      <a:srgbClr val="EEFCF1"/>
+                      <a:srgbClr val="FDF8EA"/>
                     </a:solidFill>
                   </a:tcPr>
                 </a:tc>
@@ -4226,7 +4400,7 @@
                       <a:r>
                         <a:rPr sz="1600" b="0">
                           <a:solidFill>
-                            <a:srgbClr val="2B2B2B"/>
+                            <a:srgbClr val="26231F"/>
                           </a:solidFill>
                         </a:rPr>
                         <a:t/>
@@ -4236,30 +4410,30 @@
                   <a:tcPr anchor="ctr" marL="73152" marR="73152">
                     <a:lnL w="9525" cap="flat" cmpd="sng" algn="ctr">
                       <a:solidFill>
-                        <a:srgbClr val="D1FADC"/>
+                        <a:srgbClr val="FAF1D1"/>
                       </a:solidFill>
                       <a:prstDash val="solid"/>
                     </a:lnL>
                     <a:lnR w="9525" cap="flat" cmpd="sng" algn="ctr">
                       <a:solidFill>
-                        <a:srgbClr val="D1FADC"/>
+                        <a:srgbClr val="FAF1D1"/>
                       </a:solidFill>
                       <a:prstDash val="solid"/>
                     </a:lnR>
                     <a:lnT w="9525" cap="flat" cmpd="sng" algn="ctr">
                       <a:solidFill>
-                        <a:srgbClr val="D1FADC"/>
+                        <a:srgbClr val="FAF1D1"/>
                       </a:solidFill>
                       <a:prstDash val="solid"/>
                     </a:lnT>
                     <a:lnB w="9525" cap="flat" cmpd="sng" algn="ctr">
                       <a:solidFill>
-                        <a:srgbClr val="D1FADC"/>
+                        <a:srgbClr val="FAF1D1"/>
                       </a:solidFill>
                       <a:prstDash val="solid"/>
                     </a:lnB>
                     <a:solidFill>
-                      <a:srgbClr val="EEFCF1"/>
+                      <a:srgbClr val="FDF8EA"/>
                     </a:solidFill>
                   </a:tcPr>
                 </a:tc>
@@ -4282,7 +4456,7 @@
     <p:bg>
       <p:bgPr>
         <a:solidFill>
-          <a:srgbClr val="26C54E"/>
+          <a:srgbClr val="FFFFFF"/>
         </a:solidFill>
         <a:effectLst/>
       </p:bgPr>
@@ -4302,16 +4476,81 @@
         </p:nvSpPr>
         <p:spPr>
           <a:xfrm>
-            <a:off x="274320" y="274320"/>
-            <a:ext cx="11643055" cy="6309360"/>
-          </a:xfrm>
-          <a:prstGeom prst="roundRect">
-            <a:avLst>
-              <a:gd name="adj" fmla="val 3500"/>
-            </a:avLst>
+            <a:off x="640080" y="6400800"/>
+            <a:ext cx="10911535" cy="10972"/>
+          </a:xfrm>
+          <a:prstGeom prst="rect">
+            <a:avLst/>
           </a:prstGeom>
           <a:solidFill>
-            <a:srgbClr val="FFFFFF"/>
+            <a:srgbClr val="26231F"/>
+          </a:solidFill>
+          <a:ln>
+            <a:noFill/>
+          </a:ln>
+        </p:spPr>
+        <p:txBody>
+          <a:bodyPr rtlCol="0" anchor="ctr"/>
+          <a:lstStyle/>
+          <a:p>
+            <a:pPr algn="ctr"/>
+          </a:p>
+        </p:txBody>
+      </p:sp>
+      <p:sp>
+        <p:nvSpPr>
+          <p:cNvPr id="4" name="하단 라벨"/>
+          <p:cNvSpPr txBox="1"/>
+          <p:nvPr/>
+        </p:nvSpPr>
+        <p:spPr>
+          <a:xfrm>
+            <a:off x="640080" y="6437376"/>
+            <a:ext cx="5486400" cy="274320"/>
+          </a:xfrm>
+          <a:prstGeom prst="rect">
+            <a:avLst/>
+          </a:prstGeom>
+          <a:noFill/>
+        </p:spPr>
+        <p:txBody>
+          <a:bodyPr wrap="square" lIns="54864" rIns="54864" tIns="27432" bIns="27432" anchor="ctr">
+            <a:noAutofit/>
+          </a:bodyPr>
+          <a:lstStyle/>
+          <a:p>
+            <a:pPr algn="l">
+              <a:lnSpc>
+                <a:spcPct val="115000"/>
+              </a:lnSpc>
+            </a:pPr>
+            <a:r>
+              <a:rPr sz="900" b="1" i="0" spc="250">
+                <a:solidFill>
+                  <a:srgbClr val="26231F"/>
+                </a:solidFill>
+              </a:rPr>
+              <a:t>INSURANCE CHECK</a:t>
+            </a:r>
+          </a:p>
+        </p:txBody>
+      </p:sp>
+      <p:sp>
+        <p:nvSpPr>
+          <p:cNvPr id="5" name="포인트"/>
+          <p:cNvSpPr/>
+          <p:nvPr/>
+        </p:nvSpPr>
+        <p:spPr>
+          <a:xfrm>
+            <a:off x="11213287" y="6473952"/>
+            <a:ext cx="219456" cy="219456"/>
+          </a:xfrm>
+          <a:prstGeom prst="ellipse">
+            <a:avLst/>
+          </a:prstGeom>
+          <a:solidFill>
+            <a:srgbClr val="EAD07B"/>
           </a:solidFill>
           <a:ln>
             <a:noFill/>
@@ -4337,8 +4576,8 @@
         </p:nvSpPr>
         <p:spPr>
           <a:xfrm>
-            <a:off x="731520" y="548640"/>
-            <a:ext cx="9448495" cy="868680"/>
+            <a:off x="640080" y="502920"/>
+            <a:ext cx="10911535" cy="914400"/>
           </a:xfrm>
         </p:spPr>
         <p:txBody>
@@ -4355,7 +4594,7 @@
             <a:r>
               <a:rPr sz="3000" b="1" i="0">
                 <a:solidFill>
-                  <a:srgbClr val="115F25"/>
+                  <a:srgbClr val="26231F"/>
                 </a:solidFill>
               </a:rPr>
               <a:t>가입한 보험 목록</a:t>
@@ -4365,15 +4604,15 @@
       </p:sp>
       <p:graphicFrame>
         <p:nvGraphicFramePr>
-          <p:cNvPr id="4" name="표"/>
+          <p:cNvPr id="6" name="표"/>
           <p:cNvGraphicFramePr>
             <a:graphicFrameLocks noGrp="1"/>
           </p:cNvGraphicFramePr>
           <p:nvPr/>
         </p:nvGraphicFramePr>
         <p:xfrm>
-          <a:off x="731520" y="1600200"/>
-          <a:ext cx="10728655" cy="4224528"/>
+          <a:off x="640080" y="1600200"/>
+          <a:ext cx="10911535" cy="4224528"/>
         </p:xfrm>
         <a:graphic>
           <a:graphicData uri="http://schemas.openxmlformats.org/drawingml/2006/table">
@@ -4386,7 +4625,7 @@
                 <a:gridCol w="3108960"/>
                 <a:gridCol w="1828800"/>
                 <a:gridCol w="1828800"/>
-                <a:gridCol w="1950415"/>
+                <a:gridCol w="2133295"/>
               </a:tblGrid>
               <a:tr h="603504">
                 <a:tc>
@@ -4398,7 +4637,7 @@
                       <a:r>
                         <a:rPr sz="1400" b="1">
                           <a:solidFill>
-                            <a:srgbClr val="FFFFFF"/>
+                            <a:srgbClr val="26231F"/>
                           </a:solidFill>
                         </a:rPr>
                         <a:t>보험회사</a:t>
@@ -4408,30 +4647,30 @@
                   <a:tcPr anchor="ctr" marL="73152" marR="73152">
                     <a:lnL w="9525" cap="flat" cmpd="sng" algn="ctr">
                       <a:solidFill>
-                        <a:srgbClr val="26C54E"/>
+                        <a:srgbClr val="EAD07B"/>
                       </a:solidFill>
                       <a:prstDash val="solid"/>
                     </a:lnL>
                     <a:lnR w="9525" cap="flat" cmpd="sng" algn="ctr">
                       <a:solidFill>
-                        <a:srgbClr val="26C54E"/>
+                        <a:srgbClr val="EAD07B"/>
                       </a:solidFill>
                       <a:prstDash val="solid"/>
                     </a:lnR>
                     <a:lnT w="9525" cap="flat" cmpd="sng" algn="ctr">
                       <a:solidFill>
-                        <a:srgbClr val="26C54E"/>
+                        <a:srgbClr val="EAD07B"/>
                       </a:solidFill>
                       <a:prstDash val="solid"/>
                     </a:lnT>
                     <a:lnB w="9525" cap="flat" cmpd="sng" algn="ctr">
                       <a:solidFill>
-                        <a:srgbClr val="26C54E"/>
+                        <a:srgbClr val="EAD07B"/>
                       </a:solidFill>
                       <a:prstDash val="solid"/>
                     </a:lnB>
                     <a:solidFill>
-                      <a:srgbClr val="26C54E"/>
+                      <a:srgbClr val="EAD07B"/>
                     </a:solidFill>
                   </a:tcPr>
                 </a:tc>
@@ -4444,7 +4683,7 @@
                       <a:r>
                         <a:rPr sz="1400" b="1">
                           <a:solidFill>
-                            <a:srgbClr val="FFFFFF"/>
+                            <a:srgbClr val="26231F"/>
                           </a:solidFill>
                         </a:rPr>
                         <a:t>상품명</a:t>
@@ -4454,30 +4693,30 @@
                   <a:tcPr anchor="ctr" marL="73152" marR="73152">
                     <a:lnL w="9525" cap="flat" cmpd="sng" algn="ctr">
                       <a:solidFill>
-                        <a:srgbClr val="26C54E"/>
+                        <a:srgbClr val="EAD07B"/>
                       </a:solidFill>
                       <a:prstDash val="solid"/>
                     </a:lnL>
                     <a:lnR w="9525" cap="flat" cmpd="sng" algn="ctr">
                       <a:solidFill>
-                        <a:srgbClr val="26C54E"/>
+                        <a:srgbClr val="EAD07B"/>
                       </a:solidFill>
                       <a:prstDash val="solid"/>
                     </a:lnR>
                     <a:lnT w="9525" cap="flat" cmpd="sng" algn="ctr">
                       <a:solidFill>
-                        <a:srgbClr val="26C54E"/>
+                        <a:srgbClr val="EAD07B"/>
                       </a:solidFill>
                       <a:prstDash val="solid"/>
                     </a:lnT>
                     <a:lnB w="9525" cap="flat" cmpd="sng" algn="ctr">
                       <a:solidFill>
-                        <a:srgbClr val="26C54E"/>
+                        <a:srgbClr val="EAD07B"/>
                       </a:solidFill>
                       <a:prstDash val="solid"/>
                     </a:lnB>
                     <a:solidFill>
-                      <a:srgbClr val="26C54E"/>
+                      <a:srgbClr val="EAD07B"/>
                     </a:solidFill>
                   </a:tcPr>
                 </a:tc>
@@ -4490,7 +4729,7 @@
                       <a:r>
                         <a:rPr sz="1400" b="1">
                           <a:solidFill>
-                            <a:srgbClr val="FFFFFF"/>
+                            <a:srgbClr val="26231F"/>
                           </a:solidFill>
                         </a:rPr>
                         <a:t>종류</a:t>
@@ -4500,30 +4739,30 @@
                   <a:tcPr anchor="ctr" marL="73152" marR="73152">
                     <a:lnL w="9525" cap="flat" cmpd="sng" algn="ctr">
                       <a:solidFill>
-                        <a:srgbClr val="26C54E"/>
+                        <a:srgbClr val="EAD07B"/>
                       </a:solidFill>
                       <a:prstDash val="solid"/>
                     </a:lnL>
                     <a:lnR w="9525" cap="flat" cmpd="sng" algn="ctr">
                       <a:solidFill>
-                        <a:srgbClr val="26C54E"/>
+                        <a:srgbClr val="EAD07B"/>
                       </a:solidFill>
                       <a:prstDash val="solid"/>
                     </a:lnR>
                     <a:lnT w="9525" cap="flat" cmpd="sng" algn="ctr">
                       <a:solidFill>
-                        <a:srgbClr val="26C54E"/>
+                        <a:srgbClr val="EAD07B"/>
                       </a:solidFill>
                       <a:prstDash val="solid"/>
                     </a:lnT>
                     <a:lnB w="9525" cap="flat" cmpd="sng" algn="ctr">
                       <a:solidFill>
-                        <a:srgbClr val="26C54E"/>
+                        <a:srgbClr val="EAD07B"/>
                       </a:solidFill>
                       <a:prstDash val="solid"/>
                     </a:lnB>
                     <a:solidFill>
-                      <a:srgbClr val="26C54E"/>
+                      <a:srgbClr val="EAD07B"/>
                     </a:solidFill>
                   </a:tcPr>
                 </a:tc>
@@ -4536,7 +4775,7 @@
                       <a:r>
                         <a:rPr sz="1400" b="1">
                           <a:solidFill>
-                            <a:srgbClr val="FFFFFF"/>
+                            <a:srgbClr val="26231F"/>
                           </a:solidFill>
                         </a:rPr>
                         <a:t>만기일</a:t>
@@ -4546,30 +4785,30 @@
                   <a:tcPr anchor="ctr" marL="73152" marR="73152">
                     <a:lnL w="9525" cap="flat" cmpd="sng" algn="ctr">
                       <a:solidFill>
-                        <a:srgbClr val="26C54E"/>
+                        <a:srgbClr val="EAD07B"/>
                       </a:solidFill>
                       <a:prstDash val="solid"/>
                     </a:lnL>
                     <a:lnR w="9525" cap="flat" cmpd="sng" algn="ctr">
                       <a:solidFill>
-                        <a:srgbClr val="26C54E"/>
+                        <a:srgbClr val="EAD07B"/>
                       </a:solidFill>
                       <a:prstDash val="solid"/>
                     </a:lnR>
                     <a:lnT w="9525" cap="flat" cmpd="sng" algn="ctr">
                       <a:solidFill>
-                        <a:srgbClr val="26C54E"/>
+                        <a:srgbClr val="EAD07B"/>
                       </a:solidFill>
                       <a:prstDash val="solid"/>
                     </a:lnT>
                     <a:lnB w="9525" cap="flat" cmpd="sng" algn="ctr">
                       <a:solidFill>
-                        <a:srgbClr val="26C54E"/>
+                        <a:srgbClr val="EAD07B"/>
                       </a:solidFill>
                       <a:prstDash val="solid"/>
                     </a:lnB>
                     <a:solidFill>
-                      <a:srgbClr val="26C54E"/>
+                      <a:srgbClr val="EAD07B"/>
                     </a:solidFill>
                   </a:tcPr>
                 </a:tc>
@@ -4582,7 +4821,7 @@
                       <a:r>
                         <a:rPr sz="1400" b="1">
                           <a:solidFill>
-                            <a:srgbClr val="FFFFFF"/>
+                            <a:srgbClr val="26231F"/>
                           </a:solidFill>
                         </a:rPr>
                         <a:t>월 보험료</a:t>
@@ -4592,30 +4831,30 @@
                   <a:tcPr anchor="ctr" marL="73152" marR="73152">
                     <a:lnL w="9525" cap="flat" cmpd="sng" algn="ctr">
                       <a:solidFill>
-                        <a:srgbClr val="26C54E"/>
+                        <a:srgbClr val="EAD07B"/>
                       </a:solidFill>
                       <a:prstDash val="solid"/>
                     </a:lnL>
                     <a:lnR w="9525" cap="flat" cmpd="sng" algn="ctr">
                       <a:solidFill>
-                        <a:srgbClr val="26C54E"/>
+                        <a:srgbClr val="EAD07B"/>
                       </a:solidFill>
                       <a:prstDash val="solid"/>
                     </a:lnR>
                     <a:lnT w="9525" cap="flat" cmpd="sng" algn="ctr">
                       <a:solidFill>
-                        <a:srgbClr val="26C54E"/>
+                        <a:srgbClr val="EAD07B"/>
                       </a:solidFill>
                       <a:prstDash val="solid"/>
                     </a:lnT>
                     <a:lnB w="9525" cap="flat" cmpd="sng" algn="ctr">
                       <a:solidFill>
-                        <a:srgbClr val="26C54E"/>
+                        <a:srgbClr val="EAD07B"/>
                       </a:solidFill>
                       <a:prstDash val="solid"/>
                     </a:lnB>
                     <a:solidFill>
-                      <a:srgbClr val="26C54E"/>
+                      <a:srgbClr val="EAD07B"/>
                     </a:solidFill>
                   </a:tcPr>
                 </a:tc>
@@ -4630,7 +4869,7 @@
                       <a:r>
                         <a:rPr sz="1400" b="0">
                           <a:solidFill>
-                            <a:srgbClr val="2B2B2B"/>
+                            <a:srgbClr val="26231F"/>
                           </a:solidFill>
                         </a:rPr>
                         <a:t/>
@@ -4640,25 +4879,25 @@
                   <a:tcPr anchor="ctr" marL="73152" marR="73152">
                     <a:lnL w="9525" cap="flat" cmpd="sng" algn="ctr">
                       <a:solidFill>
-                        <a:srgbClr val="D1FADC"/>
+                        <a:srgbClr val="FAF1D1"/>
                       </a:solidFill>
                       <a:prstDash val="solid"/>
                     </a:lnL>
                     <a:lnR w="9525" cap="flat" cmpd="sng" algn="ctr">
                       <a:solidFill>
-                        <a:srgbClr val="D1FADC"/>
+                        <a:srgbClr val="FAF1D1"/>
                       </a:solidFill>
                       <a:prstDash val="solid"/>
                     </a:lnR>
                     <a:lnT w="9525" cap="flat" cmpd="sng" algn="ctr">
                       <a:solidFill>
-                        <a:srgbClr val="D1FADC"/>
+                        <a:srgbClr val="FAF1D1"/>
                       </a:solidFill>
                       <a:prstDash val="solid"/>
                     </a:lnT>
                     <a:lnB w="9525" cap="flat" cmpd="sng" algn="ctr">
                       <a:solidFill>
-                        <a:srgbClr val="D1FADC"/>
+                        <a:srgbClr val="FAF1D1"/>
                       </a:solidFill>
                       <a:prstDash val="solid"/>
                     </a:lnB>
@@ -4676,7 +4915,7 @@
                       <a:r>
                         <a:rPr sz="1400" b="0">
                           <a:solidFill>
-                            <a:srgbClr val="2B2B2B"/>
+                            <a:srgbClr val="26231F"/>
                           </a:solidFill>
                         </a:rPr>
                         <a:t/>
@@ -4686,25 +4925,25 @@
                   <a:tcPr anchor="ctr" marL="73152" marR="73152">
                     <a:lnL w="9525" cap="flat" cmpd="sng" algn="ctr">
                       <a:solidFill>
-                        <a:srgbClr val="D1FADC"/>
+                        <a:srgbClr val="FAF1D1"/>
                       </a:solidFill>
                       <a:prstDash val="solid"/>
                     </a:lnL>
                     <a:lnR w="9525" cap="flat" cmpd="sng" algn="ctr">
                       <a:solidFill>
-                        <a:srgbClr val="D1FADC"/>
+                        <a:srgbClr val="FAF1D1"/>
                       </a:solidFill>
                       <a:prstDash val="solid"/>
                     </a:lnR>
                     <a:lnT w="9525" cap="flat" cmpd="sng" algn="ctr">
                       <a:solidFill>
-                        <a:srgbClr val="D1FADC"/>
+                        <a:srgbClr val="FAF1D1"/>
                       </a:solidFill>
                       <a:prstDash val="solid"/>
                     </a:lnT>
                     <a:lnB w="9525" cap="flat" cmpd="sng" algn="ctr">
                       <a:solidFill>
-                        <a:srgbClr val="D1FADC"/>
+                        <a:srgbClr val="FAF1D1"/>
                       </a:solidFill>
                       <a:prstDash val="solid"/>
                     </a:lnB>
@@ -4722,7 +4961,7 @@
                       <a:r>
                         <a:rPr sz="1400" b="0">
                           <a:solidFill>
-                            <a:srgbClr val="2B2B2B"/>
+                            <a:srgbClr val="26231F"/>
                           </a:solidFill>
                         </a:rPr>
                         <a:t/>
@@ -4732,25 +4971,25 @@
                   <a:tcPr anchor="ctr" marL="73152" marR="73152">
                     <a:lnL w="9525" cap="flat" cmpd="sng" algn="ctr">
                       <a:solidFill>
-                        <a:srgbClr val="D1FADC"/>
+                        <a:srgbClr val="FAF1D1"/>
                       </a:solidFill>
                       <a:prstDash val="solid"/>
                     </a:lnL>
                     <a:lnR w="9525" cap="flat" cmpd="sng" algn="ctr">
                       <a:solidFill>
-                        <a:srgbClr val="D1FADC"/>
+                        <a:srgbClr val="FAF1D1"/>
                       </a:solidFill>
                       <a:prstDash val="solid"/>
                     </a:lnR>
                     <a:lnT w="9525" cap="flat" cmpd="sng" algn="ctr">
                       <a:solidFill>
-                        <a:srgbClr val="D1FADC"/>
+                        <a:srgbClr val="FAF1D1"/>
                       </a:solidFill>
                       <a:prstDash val="solid"/>
                     </a:lnT>
                     <a:lnB w="9525" cap="flat" cmpd="sng" algn="ctr">
                       <a:solidFill>
-                        <a:srgbClr val="D1FADC"/>
+                        <a:srgbClr val="FAF1D1"/>
                       </a:solidFill>
                       <a:prstDash val="solid"/>
                     </a:lnB>
@@ -4768,7 +5007,7 @@
                       <a:r>
                         <a:rPr sz="1400" b="0">
                           <a:solidFill>
-                            <a:srgbClr val="2B2B2B"/>
+                            <a:srgbClr val="26231F"/>
                           </a:solidFill>
                         </a:rPr>
                         <a:t/>
@@ -4778,25 +5017,25 @@
                   <a:tcPr anchor="ctr" marL="73152" marR="73152">
                     <a:lnL w="9525" cap="flat" cmpd="sng" algn="ctr">
                       <a:solidFill>
-                        <a:srgbClr val="D1FADC"/>
+                        <a:srgbClr val="FAF1D1"/>
                       </a:solidFill>
                       <a:prstDash val="solid"/>
                     </a:lnL>
                     <a:lnR w="9525" cap="flat" cmpd="sng" algn="ctr">
                       <a:solidFill>
-                        <a:srgbClr val="D1FADC"/>
+                        <a:srgbClr val="FAF1D1"/>
                       </a:solidFill>
                       <a:prstDash val="solid"/>
                     </a:lnR>
                     <a:lnT w="9525" cap="flat" cmpd="sng" algn="ctr">
                       <a:solidFill>
-                        <a:srgbClr val="D1FADC"/>
+                        <a:srgbClr val="FAF1D1"/>
                       </a:solidFill>
                       <a:prstDash val="solid"/>
                     </a:lnT>
                     <a:lnB w="9525" cap="flat" cmpd="sng" algn="ctr">
                       <a:solidFill>
-                        <a:srgbClr val="D1FADC"/>
+                        <a:srgbClr val="FAF1D1"/>
                       </a:solidFill>
                       <a:prstDash val="solid"/>
                     </a:lnB>
@@ -4814,7 +5053,7 @@
                       <a:r>
                         <a:rPr sz="1400" b="0">
                           <a:solidFill>
-                            <a:srgbClr val="2B2B2B"/>
+                            <a:srgbClr val="26231F"/>
                           </a:solidFill>
                         </a:rPr>
                         <a:t/>
@@ -4824,25 +5063,25 @@
                   <a:tcPr anchor="ctr" marL="73152" marR="73152">
                     <a:lnL w="9525" cap="flat" cmpd="sng" algn="ctr">
                       <a:solidFill>
-                        <a:srgbClr val="D1FADC"/>
+                        <a:srgbClr val="FAF1D1"/>
                       </a:solidFill>
                       <a:prstDash val="solid"/>
                     </a:lnL>
                     <a:lnR w="9525" cap="flat" cmpd="sng" algn="ctr">
                       <a:solidFill>
-                        <a:srgbClr val="D1FADC"/>
+                        <a:srgbClr val="FAF1D1"/>
                       </a:solidFill>
                       <a:prstDash val="solid"/>
                     </a:lnR>
                     <a:lnT w="9525" cap="flat" cmpd="sng" algn="ctr">
                       <a:solidFill>
-                        <a:srgbClr val="D1FADC"/>
+                        <a:srgbClr val="FAF1D1"/>
                       </a:solidFill>
                       <a:prstDash val="solid"/>
                     </a:lnT>
                     <a:lnB w="9525" cap="flat" cmpd="sng" algn="ctr">
                       <a:solidFill>
-                        <a:srgbClr val="D1FADC"/>
+                        <a:srgbClr val="FAF1D1"/>
                       </a:solidFill>
                       <a:prstDash val="solid"/>
                     </a:lnB>
@@ -4862,7 +5101,7 @@
                       <a:r>
                         <a:rPr sz="1400" b="0">
                           <a:solidFill>
-                            <a:srgbClr val="2B2B2B"/>
+                            <a:srgbClr val="26231F"/>
                           </a:solidFill>
                         </a:rPr>
                         <a:t/>
@@ -4872,30 +5111,30 @@
                   <a:tcPr anchor="ctr" marL="73152" marR="73152">
                     <a:lnL w="9525" cap="flat" cmpd="sng" algn="ctr">
                       <a:solidFill>
-                        <a:srgbClr val="D1FADC"/>
+                        <a:srgbClr val="FAF1D1"/>
                       </a:solidFill>
                       <a:prstDash val="solid"/>
                     </a:lnL>
                     <a:lnR w="9525" cap="flat" cmpd="sng" algn="ctr">
                       <a:solidFill>
-                        <a:srgbClr val="D1FADC"/>
+                        <a:srgbClr val="FAF1D1"/>
                       </a:solidFill>
                       <a:prstDash val="solid"/>
                     </a:lnR>
                     <a:lnT w="9525" cap="flat" cmpd="sng" algn="ctr">
                       <a:solidFill>
-                        <a:srgbClr val="D1FADC"/>
+                        <a:srgbClr val="FAF1D1"/>
                       </a:solidFill>
                       <a:prstDash val="solid"/>
                     </a:lnT>
                     <a:lnB w="9525" cap="flat" cmpd="sng" algn="ctr">
                       <a:solidFill>
-                        <a:srgbClr val="D1FADC"/>
+                        <a:srgbClr val="FAF1D1"/>
                       </a:solidFill>
                       <a:prstDash val="solid"/>
                     </a:lnB>
                     <a:solidFill>
-                      <a:srgbClr val="EEFCF1"/>
+                      <a:srgbClr val="FDF8EA"/>
                     </a:solidFill>
                   </a:tcPr>
                 </a:tc>
@@ -4908,7 +5147,7 @@
                       <a:r>
                         <a:rPr sz="1400" b="0">
                           <a:solidFill>
-                            <a:srgbClr val="2B2B2B"/>
+                            <a:srgbClr val="26231F"/>
                           </a:solidFill>
                         </a:rPr>
                         <a:t/>
@@ -4918,30 +5157,30 @@
                   <a:tcPr anchor="ctr" marL="73152" marR="73152">
                     <a:lnL w="9525" cap="flat" cmpd="sng" algn="ctr">
                       <a:solidFill>
-                        <a:srgbClr val="D1FADC"/>
+                        <a:srgbClr val="FAF1D1"/>
                       </a:solidFill>
                       <a:prstDash val="solid"/>
                     </a:lnL>
                     <a:lnR w="9525" cap="flat" cmpd="sng" algn="ctr">
                       <a:solidFill>
-                        <a:srgbClr val="D1FADC"/>
+                        <a:srgbClr val="FAF1D1"/>
                       </a:solidFill>
                       <a:prstDash val="solid"/>
                     </a:lnR>
                     <a:lnT w="9525" cap="flat" cmpd="sng" algn="ctr">
                       <a:solidFill>
-                        <a:srgbClr val="D1FADC"/>
+                        <a:srgbClr val="FAF1D1"/>
                       </a:solidFill>
                       <a:prstDash val="solid"/>
                     </a:lnT>
                     <a:lnB w="9525" cap="flat" cmpd="sng" algn="ctr">
                       <a:solidFill>
-                        <a:srgbClr val="D1FADC"/>
+                        <a:srgbClr val="FAF1D1"/>
                       </a:solidFill>
                       <a:prstDash val="solid"/>
                     </a:lnB>
                     <a:solidFill>
-                      <a:srgbClr val="EEFCF1"/>
+                      <a:srgbClr val="FDF8EA"/>
                     </a:solidFill>
                   </a:tcPr>
                 </a:tc>
@@ -4954,7 +5193,7 @@
                       <a:r>
                         <a:rPr sz="1400" b="0">
                           <a:solidFill>
-                            <a:srgbClr val="2B2B2B"/>
+                            <a:srgbClr val="26231F"/>
                           </a:solidFill>
                         </a:rPr>
                         <a:t/>
@@ -4964,30 +5203,30 @@
                   <a:tcPr anchor="ctr" marL="73152" marR="73152">
                     <a:lnL w="9525" cap="flat" cmpd="sng" algn="ctr">
                       <a:solidFill>
-                        <a:srgbClr val="D1FADC"/>
+                        <a:srgbClr val="FAF1D1"/>
                       </a:solidFill>
                       <a:prstDash val="solid"/>
                     </a:lnL>
                     <a:lnR w="9525" cap="flat" cmpd="sng" algn="ctr">
                       <a:solidFill>
-                        <a:srgbClr val="D1FADC"/>
+                        <a:srgbClr val="FAF1D1"/>
                       </a:solidFill>
                       <a:prstDash val="solid"/>
                     </a:lnR>
                     <a:lnT w="9525" cap="flat" cmpd="sng" algn="ctr">
                       <a:solidFill>
-                        <a:srgbClr val="D1FADC"/>
+                        <a:srgbClr val="FAF1D1"/>
                       </a:solidFill>
                       <a:prstDash val="solid"/>
                     </a:lnT>
                     <a:lnB w="9525" cap="flat" cmpd="sng" algn="ctr">
                       <a:solidFill>
-                        <a:srgbClr val="D1FADC"/>
+                        <a:srgbClr val="FAF1D1"/>
                       </a:solidFill>
                       <a:prstDash val="solid"/>
                     </a:lnB>
                     <a:solidFill>
-                      <a:srgbClr val="EEFCF1"/>
+                      <a:srgbClr val="FDF8EA"/>
                     </a:solidFill>
                   </a:tcPr>
                 </a:tc>
@@ -5000,7 +5239,7 @@
                       <a:r>
                         <a:rPr sz="1400" b="0">
                           <a:solidFill>
-                            <a:srgbClr val="2B2B2B"/>
+                            <a:srgbClr val="26231F"/>
                           </a:solidFill>
                         </a:rPr>
                         <a:t/>
@@ -5010,30 +5249,30 @@
                   <a:tcPr anchor="ctr" marL="73152" marR="73152">
                     <a:lnL w="9525" cap="flat" cmpd="sng" algn="ctr">
                       <a:solidFill>
-                        <a:srgbClr val="D1FADC"/>
+                        <a:srgbClr val="FAF1D1"/>
                       </a:solidFill>
                       <a:prstDash val="solid"/>
                     </a:lnL>
                     <a:lnR w="9525" cap="flat" cmpd="sng" algn="ctr">
                       <a:solidFill>
-                        <a:srgbClr val="D1FADC"/>
+                        <a:srgbClr val="FAF1D1"/>
                       </a:solidFill>
                       <a:prstDash val="solid"/>
                     </a:lnR>
                     <a:lnT w="9525" cap="flat" cmpd="sng" algn="ctr">
                       <a:solidFill>
-                        <a:srgbClr val="D1FADC"/>
+                        <a:srgbClr val="FAF1D1"/>
                       </a:solidFill>
                       <a:prstDash val="solid"/>
                     </a:lnT>
                     <a:lnB w="9525" cap="flat" cmpd="sng" algn="ctr">
                       <a:solidFill>
-                        <a:srgbClr val="D1FADC"/>
+                        <a:srgbClr val="FAF1D1"/>
                       </a:solidFill>
                       <a:prstDash val="solid"/>
                     </a:lnB>
                     <a:solidFill>
-                      <a:srgbClr val="EEFCF1"/>
+                      <a:srgbClr val="FDF8EA"/>
                     </a:solidFill>
                   </a:tcPr>
                 </a:tc>
@@ -5046,7 +5285,7 @@
                       <a:r>
                         <a:rPr sz="1400" b="0">
                           <a:solidFill>
-                            <a:srgbClr val="2B2B2B"/>
+                            <a:srgbClr val="26231F"/>
                           </a:solidFill>
                         </a:rPr>
                         <a:t/>
@@ -5056,30 +5295,30 @@
                   <a:tcPr anchor="ctr" marL="73152" marR="73152">
                     <a:lnL w="9525" cap="flat" cmpd="sng" algn="ctr">
                       <a:solidFill>
-                        <a:srgbClr val="D1FADC"/>
+                        <a:srgbClr val="FAF1D1"/>
                       </a:solidFill>
                       <a:prstDash val="solid"/>
                     </a:lnL>
                     <a:lnR w="9525" cap="flat" cmpd="sng" algn="ctr">
                       <a:solidFill>
-                        <a:srgbClr val="D1FADC"/>
+                        <a:srgbClr val="FAF1D1"/>
                       </a:solidFill>
                       <a:prstDash val="solid"/>
                     </a:lnR>
                     <a:lnT w="9525" cap="flat" cmpd="sng" algn="ctr">
                       <a:solidFill>
-                        <a:srgbClr val="D1FADC"/>
+                        <a:srgbClr val="FAF1D1"/>
                       </a:solidFill>
                       <a:prstDash val="solid"/>
                     </a:lnT>
                     <a:lnB w="9525" cap="flat" cmpd="sng" algn="ctr">
                       <a:solidFill>
-                        <a:srgbClr val="D1FADC"/>
+                        <a:srgbClr val="FAF1D1"/>
                       </a:solidFill>
                       <a:prstDash val="solid"/>
                     </a:lnB>
                     <a:solidFill>
-                      <a:srgbClr val="EEFCF1"/>
+                      <a:srgbClr val="FDF8EA"/>
                     </a:solidFill>
                   </a:tcPr>
                 </a:tc>
@@ -5094,7 +5333,7 @@
                       <a:r>
                         <a:rPr sz="1400" b="0">
                           <a:solidFill>
-                            <a:srgbClr val="2B2B2B"/>
+                            <a:srgbClr val="26231F"/>
                           </a:solidFill>
                         </a:rPr>
                         <a:t/>
@@ -5104,25 +5343,25 @@
                   <a:tcPr anchor="ctr" marL="73152" marR="73152">
                     <a:lnL w="9525" cap="flat" cmpd="sng" algn="ctr">
                       <a:solidFill>
-                        <a:srgbClr val="D1FADC"/>
+                        <a:srgbClr val="FAF1D1"/>
                       </a:solidFill>
                       <a:prstDash val="solid"/>
                     </a:lnL>
                     <a:lnR w="9525" cap="flat" cmpd="sng" algn="ctr">
                       <a:solidFill>
-                        <a:srgbClr val="D1FADC"/>
+                        <a:srgbClr val="FAF1D1"/>
                       </a:solidFill>
                       <a:prstDash val="solid"/>
                     </a:lnR>
                     <a:lnT w="9525" cap="flat" cmpd="sng" algn="ctr">
                       <a:solidFill>
-                        <a:srgbClr val="D1FADC"/>
+                        <a:srgbClr val="FAF1D1"/>
                       </a:solidFill>
                       <a:prstDash val="solid"/>
                     </a:lnT>
                     <a:lnB w="9525" cap="flat" cmpd="sng" algn="ctr">
                       <a:solidFill>
-                        <a:srgbClr val="D1FADC"/>
+                        <a:srgbClr val="FAF1D1"/>
                       </a:solidFill>
                       <a:prstDash val="solid"/>
                     </a:lnB>
@@ -5140,7 +5379,7 @@
                       <a:r>
                         <a:rPr sz="1400" b="0">
                           <a:solidFill>
-                            <a:srgbClr val="2B2B2B"/>
+                            <a:srgbClr val="26231F"/>
                           </a:solidFill>
                         </a:rPr>
                         <a:t/>
@@ -5150,25 +5389,25 @@
                   <a:tcPr anchor="ctr" marL="73152" marR="73152">
                     <a:lnL w="9525" cap="flat" cmpd="sng" algn="ctr">
                       <a:solidFill>
-                        <a:srgbClr val="D1FADC"/>
+                        <a:srgbClr val="FAF1D1"/>
                       </a:solidFill>
                       <a:prstDash val="solid"/>
                     </a:lnL>
                     <a:lnR w="9525" cap="flat" cmpd="sng" algn="ctr">
                       <a:solidFill>
-                        <a:srgbClr val="D1FADC"/>
+                        <a:srgbClr val="FAF1D1"/>
                       </a:solidFill>
                       <a:prstDash val="solid"/>
                     </a:lnR>
                     <a:lnT w="9525" cap="flat" cmpd="sng" algn="ctr">
                       <a:solidFill>
-                        <a:srgbClr val="D1FADC"/>
+                        <a:srgbClr val="FAF1D1"/>
                       </a:solidFill>
                       <a:prstDash val="solid"/>
                     </a:lnT>
                     <a:lnB w="9525" cap="flat" cmpd="sng" algn="ctr">
                       <a:solidFill>
-                        <a:srgbClr val="D1FADC"/>
+                        <a:srgbClr val="FAF1D1"/>
                       </a:solidFill>
                       <a:prstDash val="solid"/>
                     </a:lnB>
@@ -5186,7 +5425,7 @@
                       <a:r>
                         <a:rPr sz="1400" b="0">
                           <a:solidFill>
-                            <a:srgbClr val="2B2B2B"/>
+                            <a:srgbClr val="26231F"/>
                           </a:solidFill>
                         </a:rPr>
                         <a:t/>
@@ -5196,25 +5435,25 @@
                   <a:tcPr anchor="ctr" marL="73152" marR="73152">
                     <a:lnL w="9525" cap="flat" cmpd="sng" algn="ctr">
                       <a:solidFill>
-                        <a:srgbClr val="D1FADC"/>
+                        <a:srgbClr val="FAF1D1"/>
                       </a:solidFill>
                       <a:prstDash val="solid"/>
                     </a:lnL>
                     <a:lnR w="9525" cap="flat" cmpd="sng" algn="ctr">
                       <a:solidFill>
-                        <a:srgbClr val="D1FADC"/>
+                        <a:srgbClr val="FAF1D1"/>
                       </a:solidFill>
                       <a:prstDash val="solid"/>
                     </a:lnR>
                     <a:lnT w="9525" cap="flat" cmpd="sng" algn="ctr">
                       <a:solidFill>
-                        <a:srgbClr val="D1FADC"/>
+                        <a:srgbClr val="FAF1D1"/>
                       </a:solidFill>
                       <a:prstDash val="solid"/>
                     </a:lnT>
                     <a:lnB w="9525" cap="flat" cmpd="sng" algn="ctr">
                       <a:solidFill>
-                        <a:srgbClr val="D1FADC"/>
+                        <a:srgbClr val="FAF1D1"/>
                       </a:solidFill>
                       <a:prstDash val="solid"/>
                     </a:lnB>
@@ -5232,7 +5471,7 @@
                       <a:r>
                         <a:rPr sz="1400" b="0">
                           <a:solidFill>
-                            <a:srgbClr val="2B2B2B"/>
+                            <a:srgbClr val="26231F"/>
                           </a:solidFill>
                         </a:rPr>
                         <a:t/>
@@ -5242,25 +5481,25 @@
                   <a:tcPr anchor="ctr" marL="73152" marR="73152">
                     <a:lnL w="9525" cap="flat" cmpd="sng" algn="ctr">
                       <a:solidFill>
-                        <a:srgbClr val="D1FADC"/>
+                        <a:srgbClr val="FAF1D1"/>
                       </a:solidFill>
                       <a:prstDash val="solid"/>
                     </a:lnL>
                     <a:lnR w="9525" cap="flat" cmpd="sng" algn="ctr">
                       <a:solidFill>
-                        <a:srgbClr val="D1FADC"/>
+                        <a:srgbClr val="FAF1D1"/>
                       </a:solidFill>
                       <a:prstDash val="solid"/>
                     </a:lnR>
                     <a:lnT w="9525" cap="flat" cmpd="sng" algn="ctr">
                       <a:solidFill>
-                        <a:srgbClr val="D1FADC"/>
+                        <a:srgbClr val="FAF1D1"/>
                       </a:solidFill>
                       <a:prstDash val="solid"/>
                     </a:lnT>
                     <a:lnB w="9525" cap="flat" cmpd="sng" algn="ctr">
                       <a:solidFill>
-                        <a:srgbClr val="D1FADC"/>
+                        <a:srgbClr val="FAF1D1"/>
                       </a:solidFill>
                       <a:prstDash val="solid"/>
                     </a:lnB>
@@ -5278,7 +5517,7 @@
                       <a:r>
                         <a:rPr sz="1400" b="0">
                           <a:solidFill>
-                            <a:srgbClr val="2B2B2B"/>
+                            <a:srgbClr val="26231F"/>
                           </a:solidFill>
                         </a:rPr>
                         <a:t/>
@@ -5288,25 +5527,25 @@
                   <a:tcPr anchor="ctr" marL="73152" marR="73152">
                     <a:lnL w="9525" cap="flat" cmpd="sng" algn="ctr">
                       <a:solidFill>
-                        <a:srgbClr val="D1FADC"/>
+                        <a:srgbClr val="FAF1D1"/>
                       </a:solidFill>
                       <a:prstDash val="solid"/>
                     </a:lnL>
                     <a:lnR w="9525" cap="flat" cmpd="sng" algn="ctr">
                       <a:solidFill>
-                        <a:srgbClr val="D1FADC"/>
+                        <a:srgbClr val="FAF1D1"/>
                       </a:solidFill>
                       <a:prstDash val="solid"/>
                     </a:lnR>
                     <a:lnT w="9525" cap="flat" cmpd="sng" algn="ctr">
                       <a:solidFill>
-                        <a:srgbClr val="D1FADC"/>
+                        <a:srgbClr val="FAF1D1"/>
                       </a:solidFill>
                       <a:prstDash val="solid"/>
                     </a:lnT>
                     <a:lnB w="9525" cap="flat" cmpd="sng" algn="ctr">
                       <a:solidFill>
-                        <a:srgbClr val="D1FADC"/>
+                        <a:srgbClr val="FAF1D1"/>
                       </a:solidFill>
                       <a:prstDash val="solid"/>
                     </a:lnB>
@@ -5326,7 +5565,7 @@
                       <a:r>
                         <a:rPr sz="1400" b="0">
                           <a:solidFill>
-                            <a:srgbClr val="2B2B2B"/>
+                            <a:srgbClr val="26231F"/>
                           </a:solidFill>
                         </a:rPr>
                         <a:t/>
@@ -5336,30 +5575,30 @@
                   <a:tcPr anchor="ctr" marL="73152" marR="73152">
                     <a:lnL w="9525" cap="flat" cmpd="sng" algn="ctr">
                       <a:solidFill>
-                        <a:srgbClr val="D1FADC"/>
+                        <a:srgbClr val="FAF1D1"/>
                       </a:solidFill>
                       <a:prstDash val="solid"/>
                     </a:lnL>
                     <a:lnR w="9525" cap="flat" cmpd="sng" algn="ctr">
                       <a:solidFill>
-                        <a:srgbClr val="D1FADC"/>
+                        <a:srgbClr val="FAF1D1"/>
                       </a:solidFill>
                       <a:prstDash val="solid"/>
                     </a:lnR>
                     <a:lnT w="9525" cap="flat" cmpd="sng" algn="ctr">
                       <a:solidFill>
-                        <a:srgbClr val="D1FADC"/>
+                        <a:srgbClr val="FAF1D1"/>
                       </a:solidFill>
                       <a:prstDash val="solid"/>
                     </a:lnT>
                     <a:lnB w="9525" cap="flat" cmpd="sng" algn="ctr">
                       <a:solidFill>
-                        <a:srgbClr val="D1FADC"/>
+                        <a:srgbClr val="FAF1D1"/>
                       </a:solidFill>
                       <a:prstDash val="solid"/>
                     </a:lnB>
                     <a:solidFill>
-                      <a:srgbClr val="EEFCF1"/>
+                      <a:srgbClr val="FDF8EA"/>
                     </a:solidFill>
                   </a:tcPr>
                 </a:tc>
@@ -5372,7 +5611,7 @@
                       <a:r>
                         <a:rPr sz="1400" b="0">
                           <a:solidFill>
-                            <a:srgbClr val="2B2B2B"/>
+                            <a:srgbClr val="26231F"/>
                           </a:solidFill>
                         </a:rPr>
                         <a:t/>
@@ -5382,30 +5621,30 @@
                   <a:tcPr anchor="ctr" marL="73152" marR="73152">
                     <a:lnL w="9525" cap="flat" cmpd="sng" algn="ctr">
                       <a:solidFill>
-                        <a:srgbClr val="D1FADC"/>
+                        <a:srgbClr val="FAF1D1"/>
                       </a:solidFill>
                       <a:prstDash val="solid"/>
                     </a:lnL>
                     <a:lnR w="9525" cap="flat" cmpd="sng" algn="ctr">
                       <a:solidFill>
-                        <a:srgbClr val="D1FADC"/>
+                        <a:srgbClr val="FAF1D1"/>
                       </a:solidFill>
                       <a:prstDash val="solid"/>
                     </a:lnR>
                     <a:lnT w="9525" cap="flat" cmpd="sng" algn="ctr">
                       <a:solidFill>
-                        <a:srgbClr val="D1FADC"/>
+                        <a:srgbClr val="FAF1D1"/>
                       </a:solidFill>
                       <a:prstDash val="solid"/>
                     </a:lnT>
                     <a:lnB w="9525" cap="flat" cmpd="sng" algn="ctr">
                       <a:solidFill>
-                        <a:srgbClr val="D1FADC"/>
+                        <a:srgbClr val="FAF1D1"/>
                       </a:solidFill>
                       <a:prstDash val="solid"/>
                     </a:lnB>
                     <a:solidFill>
-                      <a:srgbClr val="EEFCF1"/>
+                      <a:srgbClr val="FDF8EA"/>
                     </a:solidFill>
                   </a:tcPr>
                 </a:tc>
@@ -5418,7 +5657,7 @@
                       <a:r>
                         <a:rPr sz="1400" b="0">
                           <a:solidFill>
-                            <a:srgbClr val="2B2B2B"/>
+                            <a:srgbClr val="26231F"/>
                           </a:solidFill>
                         </a:rPr>
                         <a:t/>
@@ -5428,30 +5667,30 @@
                   <a:tcPr anchor="ctr" marL="73152" marR="73152">
                     <a:lnL w="9525" cap="flat" cmpd="sng" algn="ctr">
                       <a:solidFill>
-                        <a:srgbClr val="D1FADC"/>
+                        <a:srgbClr val="FAF1D1"/>
                       </a:solidFill>
                       <a:prstDash val="solid"/>
                     </a:lnL>
                     <a:lnR w="9525" cap="flat" cmpd="sng" algn="ctr">
                       <a:solidFill>
-                        <a:srgbClr val="D1FADC"/>
+                        <a:srgbClr val="FAF1D1"/>
                       </a:solidFill>
                       <a:prstDash val="solid"/>
                     </a:lnR>
                     <a:lnT w="9525" cap="flat" cmpd="sng" algn="ctr">
                       <a:solidFill>
-                        <a:srgbClr val="D1FADC"/>
+                        <a:srgbClr val="FAF1D1"/>
                       </a:solidFill>
                       <a:prstDash val="solid"/>
                     </a:lnT>
                     <a:lnB w="9525" cap="flat" cmpd="sng" algn="ctr">
                       <a:solidFill>
-                        <a:srgbClr val="D1FADC"/>
+                        <a:srgbClr val="FAF1D1"/>
                       </a:solidFill>
                       <a:prstDash val="solid"/>
                     </a:lnB>
                     <a:solidFill>
-                      <a:srgbClr val="EEFCF1"/>
+                      <a:srgbClr val="FDF8EA"/>
                     </a:solidFill>
                   </a:tcPr>
                 </a:tc>
@@ -5464,7 +5703,7 @@
                       <a:r>
                         <a:rPr sz="1400" b="0">
                           <a:solidFill>
-                            <a:srgbClr val="2B2B2B"/>
+                            <a:srgbClr val="26231F"/>
                           </a:solidFill>
                         </a:rPr>
                         <a:t/>
@@ -5474,30 +5713,30 @@
                   <a:tcPr anchor="ctr" marL="73152" marR="73152">
                     <a:lnL w="9525" cap="flat" cmpd="sng" algn="ctr">
                       <a:solidFill>
-                        <a:srgbClr val="D1FADC"/>
+                        <a:srgbClr val="FAF1D1"/>
                       </a:solidFill>
                       <a:prstDash val="solid"/>
                     </a:lnL>
                     <a:lnR w="9525" cap="flat" cmpd="sng" algn="ctr">
                       <a:solidFill>
-                        <a:srgbClr val="D1FADC"/>
+                        <a:srgbClr val="FAF1D1"/>
                       </a:solidFill>
                       <a:prstDash val="solid"/>
                     </a:lnR>
                     <a:lnT w="9525" cap="flat" cmpd="sng" algn="ctr">
                       <a:solidFill>
-                        <a:srgbClr val="D1FADC"/>
+                        <a:srgbClr val="FAF1D1"/>
                       </a:solidFill>
                       <a:prstDash val="solid"/>
                     </a:lnT>
                     <a:lnB w="9525" cap="flat" cmpd="sng" algn="ctr">
                       <a:solidFill>
-                        <a:srgbClr val="D1FADC"/>
+                        <a:srgbClr val="FAF1D1"/>
                       </a:solidFill>
                       <a:prstDash val="solid"/>
                     </a:lnB>
                     <a:solidFill>
-                      <a:srgbClr val="EEFCF1"/>
+                      <a:srgbClr val="FDF8EA"/>
                     </a:solidFill>
                   </a:tcPr>
                 </a:tc>
@@ -5510,7 +5749,7 @@
                       <a:r>
                         <a:rPr sz="1400" b="0">
                           <a:solidFill>
-                            <a:srgbClr val="2B2B2B"/>
+                            <a:srgbClr val="26231F"/>
                           </a:solidFill>
                         </a:rPr>
                         <a:t/>
@@ -5520,30 +5759,30 @@
                   <a:tcPr anchor="ctr" marL="73152" marR="73152">
                     <a:lnL w="9525" cap="flat" cmpd="sng" algn="ctr">
                       <a:solidFill>
-                        <a:srgbClr val="D1FADC"/>
+                        <a:srgbClr val="FAF1D1"/>
                       </a:solidFill>
                       <a:prstDash val="solid"/>
                     </a:lnL>
                     <a:lnR w="9525" cap="flat" cmpd="sng" algn="ctr">
                       <a:solidFill>
-                        <a:srgbClr val="D1FADC"/>
+                        <a:srgbClr val="FAF1D1"/>
                       </a:solidFill>
                       <a:prstDash val="solid"/>
                     </a:lnR>
                     <a:lnT w="9525" cap="flat" cmpd="sng" algn="ctr">
                       <a:solidFill>
-                        <a:srgbClr val="D1FADC"/>
+                        <a:srgbClr val="FAF1D1"/>
                       </a:solidFill>
                       <a:prstDash val="solid"/>
                     </a:lnT>
                     <a:lnB w="9525" cap="flat" cmpd="sng" algn="ctr">
                       <a:solidFill>
-                        <a:srgbClr val="D1FADC"/>
+                        <a:srgbClr val="FAF1D1"/>
                       </a:solidFill>
                       <a:prstDash val="solid"/>
                     </a:lnB>
                     <a:solidFill>
-                      <a:srgbClr val="EEFCF1"/>
+                      <a:srgbClr val="FDF8EA"/>
                     </a:solidFill>
                   </a:tcPr>
                 </a:tc>
@@ -5558,7 +5797,7 @@
                       <a:r>
                         <a:rPr sz="1400" b="0">
                           <a:solidFill>
-                            <a:srgbClr val="2B2B2B"/>
+                            <a:srgbClr val="26231F"/>
                           </a:solidFill>
                         </a:rPr>
                         <a:t/>
@@ -5568,25 +5807,25 @@
                   <a:tcPr anchor="ctr" marL="73152" marR="73152">
                     <a:lnL w="9525" cap="flat" cmpd="sng" algn="ctr">
                       <a:solidFill>
-                        <a:srgbClr val="D1FADC"/>
+                        <a:srgbClr val="FAF1D1"/>
                       </a:solidFill>
                       <a:prstDash val="solid"/>
                     </a:lnL>
                     <a:lnR w="9525" cap="flat" cmpd="sng" algn="ctr">
                       <a:solidFill>
-                        <a:srgbClr val="D1FADC"/>
+                        <a:srgbClr val="FAF1D1"/>
                       </a:solidFill>
                       <a:prstDash val="solid"/>
                     </a:lnR>
                     <a:lnT w="9525" cap="flat" cmpd="sng" algn="ctr">
                       <a:solidFill>
-                        <a:srgbClr val="D1FADC"/>
+                        <a:srgbClr val="FAF1D1"/>
                       </a:solidFill>
                       <a:prstDash val="solid"/>
                     </a:lnT>
                     <a:lnB w="9525" cap="flat" cmpd="sng" algn="ctr">
                       <a:solidFill>
-                        <a:srgbClr val="D1FADC"/>
+                        <a:srgbClr val="FAF1D1"/>
                       </a:solidFill>
                       <a:prstDash val="solid"/>
                     </a:lnB>
@@ -5604,7 +5843,7 @@
                       <a:r>
                         <a:rPr sz="1400" b="0">
                           <a:solidFill>
-                            <a:srgbClr val="2B2B2B"/>
+                            <a:srgbClr val="26231F"/>
                           </a:solidFill>
                         </a:rPr>
                         <a:t/>
@@ -5614,25 +5853,25 @@
                   <a:tcPr anchor="ctr" marL="73152" marR="73152">
                     <a:lnL w="9525" cap="flat" cmpd="sng" algn="ctr">
                       <a:solidFill>
-                        <a:srgbClr val="D1FADC"/>
+                        <a:srgbClr val="FAF1D1"/>
                       </a:solidFill>
                       <a:prstDash val="solid"/>
                     </a:lnL>
                     <a:lnR w="9525" cap="flat" cmpd="sng" algn="ctr">
                       <a:solidFill>
-                        <a:srgbClr val="D1FADC"/>
+                        <a:srgbClr val="FAF1D1"/>
                       </a:solidFill>
                       <a:prstDash val="solid"/>
                     </a:lnR>
                     <a:lnT w="9525" cap="flat" cmpd="sng" algn="ctr">
                       <a:solidFill>
-                        <a:srgbClr val="D1FADC"/>
+                        <a:srgbClr val="FAF1D1"/>
                       </a:solidFill>
                       <a:prstDash val="solid"/>
                     </a:lnT>
                     <a:lnB w="9525" cap="flat" cmpd="sng" algn="ctr">
                       <a:solidFill>
-                        <a:srgbClr val="D1FADC"/>
+                        <a:srgbClr val="FAF1D1"/>
                       </a:solidFill>
                       <a:prstDash val="solid"/>
                     </a:lnB>
@@ -5650,7 +5889,7 @@
                       <a:r>
                         <a:rPr sz="1400" b="0">
                           <a:solidFill>
-                            <a:srgbClr val="2B2B2B"/>
+                            <a:srgbClr val="26231F"/>
                           </a:solidFill>
                         </a:rPr>
                         <a:t/>
@@ -5660,25 +5899,25 @@
                   <a:tcPr anchor="ctr" marL="73152" marR="73152">
                     <a:lnL w="9525" cap="flat" cmpd="sng" algn="ctr">
                       <a:solidFill>
-                        <a:srgbClr val="D1FADC"/>
+                        <a:srgbClr val="FAF1D1"/>
                       </a:solidFill>
                       <a:prstDash val="solid"/>
                     </a:lnL>
                     <a:lnR w="9525" cap="flat" cmpd="sng" algn="ctr">
                       <a:solidFill>
-                        <a:srgbClr val="D1FADC"/>
+                        <a:srgbClr val="FAF1D1"/>
                       </a:solidFill>
                       <a:prstDash val="solid"/>
                     </a:lnR>
                     <a:lnT w="9525" cap="flat" cmpd="sng" algn="ctr">
                       <a:solidFill>
-                        <a:srgbClr val="D1FADC"/>
+                        <a:srgbClr val="FAF1D1"/>
                       </a:solidFill>
                       <a:prstDash val="solid"/>
                     </a:lnT>
                     <a:lnB w="9525" cap="flat" cmpd="sng" algn="ctr">
                       <a:solidFill>
-                        <a:srgbClr val="D1FADC"/>
+                        <a:srgbClr val="FAF1D1"/>
                       </a:solidFill>
                       <a:prstDash val="solid"/>
                     </a:lnB>
@@ -5696,7 +5935,7 @@
                       <a:r>
                         <a:rPr sz="1400" b="0">
                           <a:solidFill>
-                            <a:srgbClr val="2B2B2B"/>
+                            <a:srgbClr val="26231F"/>
                           </a:solidFill>
                         </a:rPr>
                         <a:t/>
@@ -5706,25 +5945,25 @@
                   <a:tcPr anchor="ctr" marL="73152" marR="73152">
                     <a:lnL w="9525" cap="flat" cmpd="sng" algn="ctr">
                       <a:solidFill>
-                        <a:srgbClr val="D1FADC"/>
+                        <a:srgbClr val="FAF1D1"/>
                       </a:solidFill>
                       <a:prstDash val="solid"/>
                     </a:lnL>
                     <a:lnR w="9525" cap="flat" cmpd="sng" algn="ctr">
                       <a:solidFill>
-                        <a:srgbClr val="D1FADC"/>
+                        <a:srgbClr val="FAF1D1"/>
                       </a:solidFill>
                       <a:prstDash val="solid"/>
                     </a:lnR>
                     <a:lnT w="9525" cap="flat" cmpd="sng" algn="ctr">
                       <a:solidFill>
-                        <a:srgbClr val="D1FADC"/>
+                        <a:srgbClr val="FAF1D1"/>
                       </a:solidFill>
                       <a:prstDash val="solid"/>
                     </a:lnT>
                     <a:lnB w="9525" cap="flat" cmpd="sng" algn="ctr">
                       <a:solidFill>
-                        <a:srgbClr val="D1FADC"/>
+                        <a:srgbClr val="FAF1D1"/>
                       </a:solidFill>
                       <a:prstDash val="solid"/>
                     </a:lnB>
@@ -5742,7 +5981,7 @@
                       <a:r>
                         <a:rPr sz="1400" b="0">
                           <a:solidFill>
-                            <a:srgbClr val="2B2B2B"/>
+                            <a:srgbClr val="26231F"/>
                           </a:solidFill>
                         </a:rPr>
                         <a:t/>
@@ -5752,25 +5991,25 @@
                   <a:tcPr anchor="ctr" marL="73152" marR="73152">
                     <a:lnL w="9525" cap="flat" cmpd="sng" algn="ctr">
                       <a:solidFill>
-                        <a:srgbClr val="D1FADC"/>
+                        <a:srgbClr val="FAF1D1"/>
                       </a:solidFill>
                       <a:prstDash val="solid"/>
                     </a:lnL>
                     <a:lnR w="9525" cap="flat" cmpd="sng" algn="ctr">
                       <a:solidFill>
-                        <a:srgbClr val="D1FADC"/>
+                        <a:srgbClr val="FAF1D1"/>
                       </a:solidFill>
                       <a:prstDash val="solid"/>
                     </a:lnR>
                     <a:lnT w="9525" cap="flat" cmpd="sng" algn="ctr">
                       <a:solidFill>
-                        <a:srgbClr val="D1FADC"/>
+                        <a:srgbClr val="FAF1D1"/>
                       </a:solidFill>
                       <a:prstDash val="solid"/>
                     </a:lnT>
                     <a:lnB w="9525" cap="flat" cmpd="sng" algn="ctr">
                       <a:solidFill>
-                        <a:srgbClr val="D1FADC"/>
+                        <a:srgbClr val="FAF1D1"/>
                       </a:solidFill>
                       <a:prstDash val="solid"/>
                     </a:lnB>
@@ -5790,7 +6029,7 @@
                       <a:r>
                         <a:rPr sz="1400" b="0">
                           <a:solidFill>
-                            <a:srgbClr val="2B2B2B"/>
+                            <a:srgbClr val="26231F"/>
                           </a:solidFill>
                         </a:rPr>
                         <a:t/>
@@ -5800,30 +6039,30 @@
                   <a:tcPr anchor="ctr" marL="73152" marR="73152">
                     <a:lnL w="9525" cap="flat" cmpd="sng" algn="ctr">
                       <a:solidFill>
-                        <a:srgbClr val="D1FADC"/>
+                        <a:srgbClr val="FAF1D1"/>
                       </a:solidFill>
                       <a:prstDash val="solid"/>
                     </a:lnL>
                     <a:lnR w="9525" cap="flat" cmpd="sng" algn="ctr">
                       <a:solidFill>
-                        <a:srgbClr val="D1FADC"/>
+                        <a:srgbClr val="FAF1D1"/>
                       </a:solidFill>
                       <a:prstDash val="solid"/>
                     </a:lnR>
                     <a:lnT w="9525" cap="flat" cmpd="sng" algn="ctr">
                       <a:solidFill>
-                        <a:srgbClr val="D1FADC"/>
+                        <a:srgbClr val="FAF1D1"/>
                       </a:solidFill>
                       <a:prstDash val="solid"/>
                     </a:lnT>
                     <a:lnB w="9525" cap="flat" cmpd="sng" algn="ctr">
                       <a:solidFill>
-                        <a:srgbClr val="D1FADC"/>
+                        <a:srgbClr val="FAF1D1"/>
                       </a:solidFill>
                       <a:prstDash val="solid"/>
                     </a:lnB>
                     <a:solidFill>
-                      <a:srgbClr val="EEFCF1"/>
+                      <a:srgbClr val="FDF8EA"/>
                     </a:solidFill>
                   </a:tcPr>
                 </a:tc>
@@ -5836,7 +6075,7 @@
                       <a:r>
                         <a:rPr sz="1400" b="0">
                           <a:solidFill>
-                            <a:srgbClr val="2B2B2B"/>
+                            <a:srgbClr val="26231F"/>
                           </a:solidFill>
                         </a:rPr>
                         <a:t/>
@@ -5846,30 +6085,30 @@
                   <a:tcPr anchor="ctr" marL="73152" marR="73152">
                     <a:lnL w="9525" cap="flat" cmpd="sng" algn="ctr">
                       <a:solidFill>
-                        <a:srgbClr val="D1FADC"/>
+                        <a:srgbClr val="FAF1D1"/>
                       </a:solidFill>
                       <a:prstDash val="solid"/>
                     </a:lnL>
                     <a:lnR w="9525" cap="flat" cmpd="sng" algn="ctr">
                       <a:solidFill>
-                        <a:srgbClr val="D1FADC"/>
+                        <a:srgbClr val="FAF1D1"/>
                       </a:solidFill>
                       <a:prstDash val="solid"/>
                     </a:lnR>
                     <a:lnT w="9525" cap="flat" cmpd="sng" algn="ctr">
                       <a:solidFill>
-                        <a:srgbClr val="D1FADC"/>
+                        <a:srgbClr val="FAF1D1"/>
                       </a:solidFill>
                       <a:prstDash val="solid"/>
                     </a:lnT>
                     <a:lnB w="9525" cap="flat" cmpd="sng" algn="ctr">
                       <a:solidFill>
-                        <a:srgbClr val="D1FADC"/>
+                        <a:srgbClr val="FAF1D1"/>
                       </a:solidFill>
                       <a:prstDash val="solid"/>
                     </a:lnB>
                     <a:solidFill>
-                      <a:srgbClr val="EEFCF1"/>
+                      <a:srgbClr val="FDF8EA"/>
                     </a:solidFill>
                   </a:tcPr>
                 </a:tc>
@@ -5882,7 +6121,7 @@
                       <a:r>
                         <a:rPr sz="1400" b="0">
                           <a:solidFill>
-                            <a:srgbClr val="2B2B2B"/>
+                            <a:srgbClr val="26231F"/>
                           </a:solidFill>
                         </a:rPr>
                         <a:t/>
@@ -5892,30 +6131,30 @@
                   <a:tcPr anchor="ctr" marL="73152" marR="73152">
                     <a:lnL w="9525" cap="flat" cmpd="sng" algn="ctr">
                       <a:solidFill>
-                        <a:srgbClr val="D1FADC"/>
+                        <a:srgbClr val="FAF1D1"/>
                       </a:solidFill>
                       <a:prstDash val="solid"/>
                     </a:lnL>
                     <a:lnR w="9525" cap="flat" cmpd="sng" algn="ctr">
                       <a:solidFill>
-                        <a:srgbClr val="D1FADC"/>
+                        <a:srgbClr val="FAF1D1"/>
                       </a:solidFill>
                       <a:prstDash val="solid"/>
                     </a:lnR>
                     <a:lnT w="9525" cap="flat" cmpd="sng" algn="ctr">
                       <a:solidFill>
-                        <a:srgbClr val="D1FADC"/>
+                        <a:srgbClr val="FAF1D1"/>
                       </a:solidFill>
                       <a:prstDash val="solid"/>
                     </a:lnT>
                     <a:lnB w="9525" cap="flat" cmpd="sng" algn="ctr">
                       <a:solidFill>
-                        <a:srgbClr val="D1FADC"/>
+                        <a:srgbClr val="FAF1D1"/>
                       </a:solidFill>
                       <a:prstDash val="solid"/>
                     </a:lnB>
                     <a:solidFill>
-                      <a:srgbClr val="EEFCF1"/>
+                      <a:srgbClr val="FDF8EA"/>
                     </a:solidFill>
                   </a:tcPr>
                 </a:tc>
@@ -5928,7 +6167,7 @@
                       <a:r>
                         <a:rPr sz="1400" b="0">
                           <a:solidFill>
-                            <a:srgbClr val="2B2B2B"/>
+                            <a:srgbClr val="26231F"/>
                           </a:solidFill>
                         </a:rPr>
                         <a:t/>
@@ -5938,30 +6177,30 @@
                   <a:tcPr anchor="ctr" marL="73152" marR="73152">
                     <a:lnL w="9525" cap="flat" cmpd="sng" algn="ctr">
                       <a:solidFill>
-                        <a:srgbClr val="D1FADC"/>
+                        <a:srgbClr val="FAF1D1"/>
                       </a:solidFill>
                       <a:prstDash val="solid"/>
                     </a:lnL>
                     <a:lnR w="9525" cap="flat" cmpd="sng" algn="ctr">
                       <a:solidFill>
-                        <a:srgbClr val="D1FADC"/>
+                        <a:srgbClr val="FAF1D1"/>
                       </a:solidFill>
                       <a:prstDash val="solid"/>
                     </a:lnR>
                     <a:lnT w="9525" cap="flat" cmpd="sng" algn="ctr">
                       <a:solidFill>
-                        <a:srgbClr val="D1FADC"/>
+                        <a:srgbClr val="FAF1D1"/>
                       </a:solidFill>
                       <a:prstDash val="solid"/>
                     </a:lnT>
                     <a:lnB w="9525" cap="flat" cmpd="sng" algn="ctr">
                       <a:solidFill>
-                        <a:srgbClr val="D1FADC"/>
+                        <a:srgbClr val="FAF1D1"/>
                       </a:solidFill>
                       <a:prstDash val="solid"/>
                     </a:lnB>
                     <a:solidFill>
-                      <a:srgbClr val="EEFCF1"/>
+                      <a:srgbClr val="FDF8EA"/>
                     </a:solidFill>
                   </a:tcPr>
                 </a:tc>
@@ -5974,7 +6213,7 @@
                       <a:r>
                         <a:rPr sz="1400" b="0">
                           <a:solidFill>
-                            <a:srgbClr val="2B2B2B"/>
+                            <a:srgbClr val="26231F"/>
                           </a:solidFill>
                         </a:rPr>
                         <a:t/>
@@ -5984,30 +6223,30 @@
                   <a:tcPr anchor="ctr" marL="73152" marR="73152">
                     <a:lnL w="9525" cap="flat" cmpd="sng" algn="ctr">
                       <a:solidFill>
-                        <a:srgbClr val="D1FADC"/>
+                        <a:srgbClr val="FAF1D1"/>
                       </a:solidFill>
                       <a:prstDash val="solid"/>
                     </a:lnL>
                     <a:lnR w="9525" cap="flat" cmpd="sng" algn="ctr">
                       <a:solidFill>
-                        <a:srgbClr val="D1FADC"/>
+                        <a:srgbClr val="FAF1D1"/>
                       </a:solidFill>
                       <a:prstDash val="solid"/>
                     </a:lnR>
                     <a:lnT w="9525" cap="flat" cmpd="sng" algn="ctr">
                       <a:solidFill>
-                        <a:srgbClr val="D1FADC"/>
+                        <a:srgbClr val="FAF1D1"/>
                       </a:solidFill>
                       <a:prstDash val="solid"/>
                     </a:lnT>
                     <a:lnB w="9525" cap="flat" cmpd="sng" algn="ctr">
                       <a:solidFill>
-                        <a:srgbClr val="D1FADC"/>
+                        <a:srgbClr val="FAF1D1"/>
                       </a:solidFill>
                       <a:prstDash val="solid"/>
                     </a:lnB>
                     <a:solidFill>
-                      <a:srgbClr val="EEFCF1"/>
+                      <a:srgbClr val="FDF8EA"/>
                     </a:solidFill>
                   </a:tcPr>
                 </a:tc>
@@ -6030,7 +6269,7 @@
     <p:bg>
       <p:bgPr>
         <a:solidFill>
-          <a:srgbClr val="26C54E"/>
+          <a:srgbClr val="FFFFFF"/>
         </a:solidFill>
         <a:effectLst/>
       </p:bgPr>
@@ -6050,16 +6289,81 @@
         </p:nvSpPr>
         <p:spPr>
           <a:xfrm>
-            <a:off x="274320" y="274320"/>
-            <a:ext cx="11643055" cy="6309360"/>
-          </a:xfrm>
-          <a:prstGeom prst="roundRect">
-            <a:avLst>
-              <a:gd name="adj" fmla="val 3500"/>
-            </a:avLst>
+            <a:off x="640080" y="6400800"/>
+            <a:ext cx="10911535" cy="10972"/>
+          </a:xfrm>
+          <a:prstGeom prst="rect">
+            <a:avLst/>
           </a:prstGeom>
           <a:solidFill>
-            <a:srgbClr val="FFFFFF"/>
+            <a:srgbClr val="26231F"/>
+          </a:solidFill>
+          <a:ln>
+            <a:noFill/>
+          </a:ln>
+        </p:spPr>
+        <p:txBody>
+          <a:bodyPr rtlCol="0" anchor="ctr"/>
+          <a:lstStyle/>
+          <a:p>
+            <a:pPr algn="ctr"/>
+          </a:p>
+        </p:txBody>
+      </p:sp>
+      <p:sp>
+        <p:nvSpPr>
+          <p:cNvPr id="4" name="하단 라벨"/>
+          <p:cNvSpPr txBox="1"/>
+          <p:nvPr/>
+        </p:nvSpPr>
+        <p:spPr>
+          <a:xfrm>
+            <a:off x="640080" y="6437376"/>
+            <a:ext cx="5486400" cy="274320"/>
+          </a:xfrm>
+          <a:prstGeom prst="rect">
+            <a:avLst/>
+          </a:prstGeom>
+          <a:noFill/>
+        </p:spPr>
+        <p:txBody>
+          <a:bodyPr wrap="square" lIns="54864" rIns="54864" tIns="27432" bIns="27432" anchor="ctr">
+            <a:noAutofit/>
+          </a:bodyPr>
+          <a:lstStyle/>
+          <a:p>
+            <a:pPr algn="l">
+              <a:lnSpc>
+                <a:spcPct val="115000"/>
+              </a:lnSpc>
+            </a:pPr>
+            <a:r>
+              <a:rPr sz="900" b="1" i="0" spc="250">
+                <a:solidFill>
+                  <a:srgbClr val="26231F"/>
+                </a:solidFill>
+              </a:rPr>
+              <a:t>INSURANCE CHECK</a:t>
+            </a:r>
+          </a:p>
+        </p:txBody>
+      </p:sp>
+      <p:sp>
+        <p:nvSpPr>
+          <p:cNvPr id="5" name="포인트"/>
+          <p:cNvSpPr/>
+          <p:nvPr/>
+        </p:nvSpPr>
+        <p:spPr>
+          <a:xfrm>
+            <a:off x="11213287" y="6473952"/>
+            <a:ext cx="219456" cy="219456"/>
+          </a:xfrm>
+          <a:prstGeom prst="ellipse">
+            <a:avLst/>
+          </a:prstGeom>
+          <a:solidFill>
+            <a:srgbClr val="EAD07B"/>
           </a:solidFill>
           <a:ln>
             <a:noFill/>
@@ -6085,8 +6389,8 @@
         </p:nvSpPr>
         <p:spPr>
           <a:xfrm>
-            <a:off x="731520" y="548640"/>
-            <a:ext cx="9448495" cy="868680"/>
+            <a:off x="640080" y="502920"/>
+            <a:ext cx="10911535" cy="914400"/>
           </a:xfrm>
         </p:spPr>
         <p:txBody>
@@ -6103,7 +6407,7 @@
             <a:r>
               <a:rPr sz="3000" b="1" i="0">
                 <a:solidFill>
-                  <a:srgbClr val="115F25"/>
+                  <a:srgbClr val="26231F"/>
                 </a:solidFill>
               </a:rPr>
               <a:t>보장 항목 체크</a:t>
@@ -6113,15 +6417,15 @@
       </p:sp>
       <p:graphicFrame>
         <p:nvGraphicFramePr>
-          <p:cNvPr id="4" name="표"/>
+          <p:cNvPr id="6" name="표"/>
           <p:cNvGraphicFramePr>
             <a:graphicFrameLocks noGrp="1"/>
           </p:cNvGraphicFramePr>
           <p:nvPr/>
         </p:nvGraphicFramePr>
         <p:xfrm>
-          <a:off x="731520" y="1600200"/>
-          <a:ext cx="10728654" cy="4773168"/>
+          <a:off x="640080" y="1600200"/>
+          <a:ext cx="10911534" cy="4773168"/>
         </p:xfrm>
         <a:graphic>
           <a:graphicData uri="http://schemas.openxmlformats.org/drawingml/2006/table">
@@ -6131,9 +6435,9 @@
               </a:tblPr>
               <a:tblGrid>
                 <a:gridCol w="3657600"/>
-                <a:gridCol w="2357018"/>
-                <a:gridCol w="2357018"/>
-                <a:gridCol w="2357018"/>
+                <a:gridCol w="2417978"/>
+                <a:gridCol w="2417978"/>
+                <a:gridCol w="2417978"/>
               </a:tblGrid>
               <a:tr h="530352">
                 <a:tc>
@@ -6145,7 +6449,7 @@
                       <a:r>
                         <a:rPr sz="1400" b="1">
                           <a:solidFill>
-                            <a:srgbClr val="FFFFFF"/>
+                            <a:srgbClr val="26231F"/>
                           </a:solidFill>
                         </a:rPr>
                         <a:t>보장 항목</a:t>
@@ -6155,30 +6459,30 @@
                   <a:tcPr anchor="ctr" marL="73152" marR="73152">
                     <a:lnL w="9525" cap="flat" cmpd="sng" algn="ctr">
                       <a:solidFill>
-                        <a:srgbClr val="26C54E"/>
+                        <a:srgbClr val="EAD07B"/>
                       </a:solidFill>
                       <a:prstDash val="solid"/>
                     </a:lnL>
                     <a:lnR w="9525" cap="flat" cmpd="sng" algn="ctr">
                       <a:solidFill>
-                        <a:srgbClr val="26C54E"/>
+                        <a:srgbClr val="EAD07B"/>
                       </a:solidFill>
                       <a:prstDash val="solid"/>
                     </a:lnR>
                     <a:lnT w="9525" cap="flat" cmpd="sng" algn="ctr">
                       <a:solidFill>
-                        <a:srgbClr val="26C54E"/>
+                        <a:srgbClr val="EAD07B"/>
                       </a:solidFill>
                       <a:prstDash val="solid"/>
                     </a:lnT>
                     <a:lnB w="9525" cap="flat" cmpd="sng" algn="ctr">
                       <a:solidFill>
-                        <a:srgbClr val="26C54E"/>
+                        <a:srgbClr val="EAD07B"/>
                       </a:solidFill>
                       <a:prstDash val="solid"/>
                     </a:lnB>
                     <a:solidFill>
-                      <a:srgbClr val="26C54E"/>
+                      <a:srgbClr val="EAD07B"/>
                     </a:solidFill>
                   </a:tcPr>
                 </a:tc>
@@ -6191,7 +6495,7 @@
                       <a:r>
                         <a:rPr sz="1400" b="1">
                           <a:solidFill>
-                            <a:srgbClr val="FFFFFF"/>
+                            <a:srgbClr val="26231F"/>
                           </a:solidFill>
                         </a:rPr>
                         <a:t>가입 확인</a:t>
@@ -6201,30 +6505,30 @@
                   <a:tcPr anchor="ctr" marL="73152" marR="73152">
                     <a:lnL w="9525" cap="flat" cmpd="sng" algn="ctr">
                       <a:solidFill>
-                        <a:srgbClr val="26C54E"/>
+                        <a:srgbClr val="EAD07B"/>
                       </a:solidFill>
                       <a:prstDash val="solid"/>
                     </a:lnL>
                     <a:lnR w="9525" cap="flat" cmpd="sng" algn="ctr">
                       <a:solidFill>
-                        <a:srgbClr val="26C54E"/>
+                        <a:srgbClr val="EAD07B"/>
                       </a:solidFill>
                       <a:prstDash val="solid"/>
                     </a:lnR>
                     <a:lnT w="9525" cap="flat" cmpd="sng" algn="ctr">
                       <a:solidFill>
-                        <a:srgbClr val="26C54E"/>
+                        <a:srgbClr val="EAD07B"/>
                       </a:solidFill>
                       <a:prstDash val="solid"/>
                     </a:lnT>
                     <a:lnB w="9525" cap="flat" cmpd="sng" algn="ctr">
                       <a:solidFill>
-                        <a:srgbClr val="26C54E"/>
+                        <a:srgbClr val="EAD07B"/>
                       </a:solidFill>
                       <a:prstDash val="solid"/>
                     </a:lnB>
                     <a:solidFill>
-                      <a:srgbClr val="26C54E"/>
+                      <a:srgbClr val="EAD07B"/>
                     </a:solidFill>
                   </a:tcPr>
                 </a:tc>
@@ -6237,7 +6541,7 @@
                       <a:r>
                         <a:rPr sz="1400" b="1">
                           <a:solidFill>
-                            <a:srgbClr val="FFFFFF"/>
+                            <a:srgbClr val="26231F"/>
                           </a:solidFill>
                         </a:rPr>
                         <a:t>확인 필요</a:t>
@@ -6247,30 +6551,30 @@
                   <a:tcPr anchor="ctr" marL="73152" marR="73152">
                     <a:lnL w="9525" cap="flat" cmpd="sng" algn="ctr">
                       <a:solidFill>
-                        <a:srgbClr val="26C54E"/>
+                        <a:srgbClr val="EAD07B"/>
                       </a:solidFill>
                       <a:prstDash val="solid"/>
                     </a:lnL>
                     <a:lnR w="9525" cap="flat" cmpd="sng" algn="ctr">
                       <a:solidFill>
-                        <a:srgbClr val="26C54E"/>
+                        <a:srgbClr val="EAD07B"/>
                       </a:solidFill>
                       <a:prstDash val="solid"/>
                     </a:lnR>
                     <a:lnT w="9525" cap="flat" cmpd="sng" algn="ctr">
                       <a:solidFill>
-                        <a:srgbClr val="26C54E"/>
+                        <a:srgbClr val="EAD07B"/>
                       </a:solidFill>
                       <a:prstDash val="solid"/>
                     </a:lnT>
                     <a:lnB w="9525" cap="flat" cmpd="sng" algn="ctr">
                       <a:solidFill>
-                        <a:srgbClr val="26C54E"/>
+                        <a:srgbClr val="EAD07B"/>
                       </a:solidFill>
                       <a:prstDash val="solid"/>
                     </a:lnB>
                     <a:solidFill>
-                      <a:srgbClr val="26C54E"/>
+                      <a:srgbClr val="EAD07B"/>
                     </a:solidFill>
                   </a:tcPr>
                 </a:tc>
@@ -6283,7 +6587,7 @@
                       <a:r>
                         <a:rPr sz="1400" b="1">
                           <a:solidFill>
-                            <a:srgbClr val="FFFFFF"/>
+                            <a:srgbClr val="26231F"/>
                           </a:solidFill>
                         </a:rPr>
                         <a:t>해당 없음</a:t>
@@ -6293,30 +6597,30 @@
                   <a:tcPr anchor="ctr" marL="73152" marR="73152">
                     <a:lnL w="9525" cap="flat" cmpd="sng" algn="ctr">
                       <a:solidFill>
-                        <a:srgbClr val="26C54E"/>
+                        <a:srgbClr val="EAD07B"/>
                       </a:solidFill>
                       <a:prstDash val="solid"/>
                     </a:lnL>
                     <a:lnR w="9525" cap="flat" cmpd="sng" algn="ctr">
                       <a:solidFill>
-                        <a:srgbClr val="26C54E"/>
+                        <a:srgbClr val="EAD07B"/>
                       </a:solidFill>
                       <a:prstDash val="solid"/>
                     </a:lnR>
                     <a:lnT w="9525" cap="flat" cmpd="sng" algn="ctr">
                       <a:solidFill>
-                        <a:srgbClr val="26C54E"/>
+                        <a:srgbClr val="EAD07B"/>
                       </a:solidFill>
                       <a:prstDash val="solid"/>
                     </a:lnT>
                     <a:lnB w="9525" cap="flat" cmpd="sng" algn="ctr">
                       <a:solidFill>
-                        <a:srgbClr val="26C54E"/>
+                        <a:srgbClr val="EAD07B"/>
                       </a:solidFill>
                       <a:prstDash val="solid"/>
                     </a:lnB>
                     <a:solidFill>
-                      <a:srgbClr val="26C54E"/>
+                      <a:srgbClr val="EAD07B"/>
                     </a:solidFill>
                   </a:tcPr>
                 </a:tc>
@@ -6331,7 +6635,7 @@
                       <a:r>
                         <a:rPr sz="1400" b="1">
                           <a:solidFill>
-                            <a:srgbClr val="115F25"/>
+                            <a:srgbClr val="494127"/>
                           </a:solidFill>
                         </a:rPr>
                         <a:t>사망·재해</a:t>
@@ -6341,30 +6645,30 @@
                   <a:tcPr anchor="ctr" marL="73152" marR="73152">
                     <a:lnL w="9525" cap="flat" cmpd="sng" algn="ctr">
                       <a:solidFill>
-                        <a:srgbClr val="D1FADC"/>
+                        <a:srgbClr val="FAF1D1"/>
                       </a:solidFill>
                       <a:prstDash val="solid"/>
                     </a:lnL>
                     <a:lnR w="9525" cap="flat" cmpd="sng" algn="ctr">
                       <a:solidFill>
-                        <a:srgbClr val="D1FADC"/>
+                        <a:srgbClr val="FAF1D1"/>
                       </a:solidFill>
                       <a:prstDash val="solid"/>
                     </a:lnR>
                     <a:lnT w="9525" cap="flat" cmpd="sng" algn="ctr">
                       <a:solidFill>
-                        <a:srgbClr val="D1FADC"/>
+                        <a:srgbClr val="FAF1D1"/>
                       </a:solidFill>
                       <a:prstDash val="solid"/>
                     </a:lnT>
                     <a:lnB w="9525" cap="flat" cmpd="sng" algn="ctr">
                       <a:solidFill>
-                        <a:srgbClr val="D1FADC"/>
+                        <a:srgbClr val="FAF1D1"/>
                       </a:solidFill>
                       <a:prstDash val="solid"/>
                     </a:lnB>
                     <a:solidFill>
-                      <a:srgbClr val="D1FADC"/>
+                      <a:srgbClr val="FAF1D1"/>
                     </a:solidFill>
                   </a:tcPr>
                 </a:tc>
@@ -6377,7 +6681,7 @@
                       <a:r>
                         <a:rPr sz="1400" b="0">
                           <a:solidFill>
-                            <a:srgbClr val="2B2B2B"/>
+                            <a:srgbClr val="26231F"/>
                           </a:solidFill>
                         </a:rPr>
                         <a:t>□</a:t>
@@ -6387,25 +6691,25 @@
                   <a:tcPr anchor="ctr" marL="73152" marR="73152">
                     <a:lnL w="9525" cap="flat" cmpd="sng" algn="ctr">
                       <a:solidFill>
-                        <a:srgbClr val="D1FADC"/>
+                        <a:srgbClr val="FAF1D1"/>
                       </a:solidFill>
                       <a:prstDash val="solid"/>
                     </a:lnL>
                     <a:lnR w="9525" cap="flat" cmpd="sng" algn="ctr">
                       <a:solidFill>
-                        <a:srgbClr val="D1FADC"/>
+                        <a:srgbClr val="FAF1D1"/>
                       </a:solidFill>
                       <a:prstDash val="solid"/>
                     </a:lnR>
                     <a:lnT w="9525" cap="flat" cmpd="sng" algn="ctr">
                       <a:solidFill>
-                        <a:srgbClr val="D1FADC"/>
+                        <a:srgbClr val="FAF1D1"/>
                       </a:solidFill>
                       <a:prstDash val="solid"/>
                     </a:lnT>
                     <a:lnB w="9525" cap="flat" cmpd="sng" algn="ctr">
                       <a:solidFill>
-                        <a:srgbClr val="D1FADC"/>
+                        <a:srgbClr val="FAF1D1"/>
                       </a:solidFill>
                       <a:prstDash val="solid"/>
                     </a:lnB>
@@ -6423,7 +6727,7 @@
                       <a:r>
                         <a:rPr sz="1400" b="0">
                           <a:solidFill>
-                            <a:srgbClr val="2B2B2B"/>
+                            <a:srgbClr val="26231F"/>
                           </a:solidFill>
                         </a:rPr>
                         <a:t>□</a:t>
@@ -6433,25 +6737,25 @@
                   <a:tcPr anchor="ctr" marL="73152" marR="73152">
                     <a:lnL w="9525" cap="flat" cmpd="sng" algn="ctr">
                       <a:solidFill>
-                        <a:srgbClr val="D1FADC"/>
+                        <a:srgbClr val="FAF1D1"/>
                       </a:solidFill>
                       <a:prstDash val="solid"/>
                     </a:lnL>
                     <a:lnR w="9525" cap="flat" cmpd="sng" algn="ctr">
                       <a:solidFill>
-                        <a:srgbClr val="D1FADC"/>
+                        <a:srgbClr val="FAF1D1"/>
                       </a:solidFill>
                       <a:prstDash val="solid"/>
                     </a:lnR>
                     <a:lnT w="9525" cap="flat" cmpd="sng" algn="ctr">
                       <a:solidFill>
-                        <a:srgbClr val="D1FADC"/>
+                        <a:srgbClr val="FAF1D1"/>
                       </a:solidFill>
                       <a:prstDash val="solid"/>
                     </a:lnT>
                     <a:lnB w="9525" cap="flat" cmpd="sng" algn="ctr">
                       <a:solidFill>
-                        <a:srgbClr val="D1FADC"/>
+                        <a:srgbClr val="FAF1D1"/>
                       </a:solidFill>
                       <a:prstDash val="solid"/>
                     </a:lnB>
@@ -6469,7 +6773,7 @@
                       <a:r>
                         <a:rPr sz="1400" b="0">
                           <a:solidFill>
-                            <a:srgbClr val="2B2B2B"/>
+                            <a:srgbClr val="26231F"/>
                           </a:solidFill>
                         </a:rPr>
                         <a:t>□</a:t>
@@ -6479,25 +6783,25 @@
                   <a:tcPr anchor="ctr" marL="73152" marR="73152">
                     <a:lnL w="9525" cap="flat" cmpd="sng" algn="ctr">
                       <a:solidFill>
-                        <a:srgbClr val="D1FADC"/>
+                        <a:srgbClr val="FAF1D1"/>
                       </a:solidFill>
                       <a:prstDash val="solid"/>
                     </a:lnL>
                     <a:lnR w="9525" cap="flat" cmpd="sng" algn="ctr">
                       <a:solidFill>
-                        <a:srgbClr val="D1FADC"/>
+                        <a:srgbClr val="FAF1D1"/>
                       </a:solidFill>
                       <a:prstDash val="solid"/>
                     </a:lnR>
                     <a:lnT w="9525" cap="flat" cmpd="sng" algn="ctr">
                       <a:solidFill>
-                        <a:srgbClr val="D1FADC"/>
+                        <a:srgbClr val="FAF1D1"/>
                       </a:solidFill>
                       <a:prstDash val="solid"/>
                     </a:lnT>
                     <a:lnB w="9525" cap="flat" cmpd="sng" algn="ctr">
                       <a:solidFill>
-                        <a:srgbClr val="D1FADC"/>
+                        <a:srgbClr val="FAF1D1"/>
                       </a:solidFill>
                       <a:prstDash val="solid"/>
                     </a:lnB>
@@ -6517,7 +6821,7 @@
                       <a:r>
                         <a:rPr sz="1400" b="1">
                           <a:solidFill>
-                            <a:srgbClr val="115F25"/>
+                            <a:srgbClr val="494127"/>
                           </a:solidFill>
                         </a:rPr>
                         <a:t>질병 진단</a:t>
@@ -6527,30 +6831,30 @@
                   <a:tcPr anchor="ctr" marL="73152" marR="73152">
                     <a:lnL w="9525" cap="flat" cmpd="sng" algn="ctr">
                       <a:solidFill>
-                        <a:srgbClr val="D1FADC"/>
+                        <a:srgbClr val="FAF1D1"/>
                       </a:solidFill>
                       <a:prstDash val="solid"/>
                     </a:lnL>
                     <a:lnR w="9525" cap="flat" cmpd="sng" algn="ctr">
                       <a:solidFill>
-                        <a:srgbClr val="D1FADC"/>
+                        <a:srgbClr val="FAF1D1"/>
                       </a:solidFill>
                       <a:prstDash val="solid"/>
                     </a:lnR>
                     <a:lnT w="9525" cap="flat" cmpd="sng" algn="ctr">
                       <a:solidFill>
-                        <a:srgbClr val="D1FADC"/>
+                        <a:srgbClr val="FAF1D1"/>
                       </a:solidFill>
                       <a:prstDash val="solid"/>
                     </a:lnT>
                     <a:lnB w="9525" cap="flat" cmpd="sng" algn="ctr">
                       <a:solidFill>
-                        <a:srgbClr val="D1FADC"/>
+                        <a:srgbClr val="FAF1D1"/>
                       </a:solidFill>
                       <a:prstDash val="solid"/>
                     </a:lnB>
                     <a:solidFill>
-                      <a:srgbClr val="D1FADC"/>
+                      <a:srgbClr val="FAF1D1"/>
                     </a:solidFill>
                   </a:tcPr>
                 </a:tc>
@@ -6563,7 +6867,7 @@
                       <a:r>
                         <a:rPr sz="1400" b="0">
                           <a:solidFill>
-                            <a:srgbClr val="2B2B2B"/>
+                            <a:srgbClr val="26231F"/>
                           </a:solidFill>
                         </a:rPr>
                         <a:t>□</a:t>
@@ -6573,30 +6877,30 @@
                   <a:tcPr anchor="ctr" marL="73152" marR="73152">
                     <a:lnL w="9525" cap="flat" cmpd="sng" algn="ctr">
                       <a:solidFill>
-                        <a:srgbClr val="D1FADC"/>
+                        <a:srgbClr val="FAF1D1"/>
                       </a:solidFill>
                       <a:prstDash val="solid"/>
                     </a:lnL>
                     <a:lnR w="9525" cap="flat" cmpd="sng" algn="ctr">
                       <a:solidFill>
-                        <a:srgbClr val="D1FADC"/>
+                        <a:srgbClr val="FAF1D1"/>
                       </a:solidFill>
                       <a:prstDash val="solid"/>
                     </a:lnR>
                     <a:lnT w="9525" cap="flat" cmpd="sng" algn="ctr">
                       <a:solidFill>
-                        <a:srgbClr val="D1FADC"/>
+                        <a:srgbClr val="FAF1D1"/>
                       </a:solidFill>
                       <a:prstDash val="solid"/>
                     </a:lnT>
                     <a:lnB w="9525" cap="flat" cmpd="sng" algn="ctr">
                       <a:solidFill>
-                        <a:srgbClr val="D1FADC"/>
+                        <a:srgbClr val="FAF1D1"/>
                       </a:solidFill>
                       <a:prstDash val="solid"/>
                     </a:lnB>
                     <a:solidFill>
-                      <a:srgbClr val="EEFCF1"/>
+                      <a:srgbClr val="FDF8EA"/>
                     </a:solidFill>
                   </a:tcPr>
                 </a:tc>
@@ -6609,7 +6913,7 @@
                       <a:r>
                         <a:rPr sz="1400" b="0">
                           <a:solidFill>
-                            <a:srgbClr val="2B2B2B"/>
+                            <a:srgbClr val="26231F"/>
                           </a:solidFill>
                         </a:rPr>
                         <a:t>□</a:t>
@@ -6619,30 +6923,30 @@
                   <a:tcPr anchor="ctr" marL="73152" marR="73152">
                     <a:lnL w="9525" cap="flat" cmpd="sng" algn="ctr">
                       <a:solidFill>
-                        <a:srgbClr val="D1FADC"/>
+                        <a:srgbClr val="FAF1D1"/>
                       </a:solidFill>
                       <a:prstDash val="solid"/>
                     </a:lnL>
                     <a:lnR w="9525" cap="flat" cmpd="sng" algn="ctr">
                       <a:solidFill>
-                        <a:srgbClr val="D1FADC"/>
+                        <a:srgbClr val="FAF1D1"/>
                       </a:solidFill>
                       <a:prstDash val="solid"/>
                     </a:lnR>
                     <a:lnT w="9525" cap="flat" cmpd="sng" algn="ctr">
                       <a:solidFill>
-                        <a:srgbClr val="D1FADC"/>
+                        <a:srgbClr val="FAF1D1"/>
                       </a:solidFill>
                       <a:prstDash val="solid"/>
                     </a:lnT>
                     <a:lnB w="9525" cap="flat" cmpd="sng" algn="ctr">
                       <a:solidFill>
-                        <a:srgbClr val="D1FADC"/>
+                        <a:srgbClr val="FAF1D1"/>
                       </a:solidFill>
                       <a:prstDash val="solid"/>
                     </a:lnB>
                     <a:solidFill>
-                      <a:srgbClr val="EEFCF1"/>
+                      <a:srgbClr val="FDF8EA"/>
                     </a:solidFill>
                   </a:tcPr>
                 </a:tc>
@@ -6655,7 +6959,7 @@
                       <a:r>
                         <a:rPr sz="1400" b="0">
                           <a:solidFill>
-                            <a:srgbClr val="2B2B2B"/>
+                            <a:srgbClr val="26231F"/>
                           </a:solidFill>
                         </a:rPr>
                         <a:t>□</a:t>
@@ -6665,30 +6969,30 @@
                   <a:tcPr anchor="ctr" marL="73152" marR="73152">
                     <a:lnL w="9525" cap="flat" cmpd="sng" algn="ctr">
                       <a:solidFill>
-                        <a:srgbClr val="D1FADC"/>
+                        <a:srgbClr val="FAF1D1"/>
                       </a:solidFill>
                       <a:prstDash val="solid"/>
                     </a:lnL>
                     <a:lnR w="9525" cap="flat" cmpd="sng" algn="ctr">
                       <a:solidFill>
-                        <a:srgbClr val="D1FADC"/>
+                        <a:srgbClr val="FAF1D1"/>
                       </a:solidFill>
                       <a:prstDash val="solid"/>
                     </a:lnR>
                     <a:lnT w="9525" cap="flat" cmpd="sng" algn="ctr">
                       <a:solidFill>
-                        <a:srgbClr val="D1FADC"/>
+                        <a:srgbClr val="FAF1D1"/>
                       </a:solidFill>
                       <a:prstDash val="solid"/>
                     </a:lnT>
                     <a:lnB w="9525" cap="flat" cmpd="sng" algn="ctr">
                       <a:solidFill>
-                        <a:srgbClr val="D1FADC"/>
+                        <a:srgbClr val="FAF1D1"/>
                       </a:solidFill>
                       <a:prstDash val="solid"/>
                     </a:lnB>
                     <a:solidFill>
-                      <a:srgbClr val="EEFCF1"/>
+                      <a:srgbClr val="FDF8EA"/>
                     </a:solidFill>
                   </a:tcPr>
                 </a:tc>
@@ -6703,7 +7007,7 @@
                       <a:r>
                         <a:rPr sz="1400" b="1">
                           <a:solidFill>
-                            <a:srgbClr val="115F25"/>
+                            <a:srgbClr val="494127"/>
                           </a:solidFill>
                         </a:rPr>
                         <a:t>암</a:t>
@@ -6713,30 +7017,30 @@
                   <a:tcPr anchor="ctr" marL="73152" marR="73152">
                     <a:lnL w="9525" cap="flat" cmpd="sng" algn="ctr">
                       <a:solidFill>
-                        <a:srgbClr val="D1FADC"/>
+                        <a:srgbClr val="FAF1D1"/>
                       </a:solidFill>
                       <a:prstDash val="solid"/>
                     </a:lnL>
                     <a:lnR w="9525" cap="flat" cmpd="sng" algn="ctr">
                       <a:solidFill>
-                        <a:srgbClr val="D1FADC"/>
+                        <a:srgbClr val="FAF1D1"/>
                       </a:solidFill>
                       <a:prstDash val="solid"/>
                     </a:lnR>
                     <a:lnT w="9525" cap="flat" cmpd="sng" algn="ctr">
                       <a:solidFill>
-                        <a:srgbClr val="D1FADC"/>
+                        <a:srgbClr val="FAF1D1"/>
                       </a:solidFill>
                       <a:prstDash val="solid"/>
                     </a:lnT>
                     <a:lnB w="9525" cap="flat" cmpd="sng" algn="ctr">
                       <a:solidFill>
-                        <a:srgbClr val="D1FADC"/>
+                        <a:srgbClr val="FAF1D1"/>
                       </a:solidFill>
                       <a:prstDash val="solid"/>
                     </a:lnB>
                     <a:solidFill>
-                      <a:srgbClr val="D1FADC"/>
+                      <a:srgbClr val="FAF1D1"/>
                     </a:solidFill>
                   </a:tcPr>
                 </a:tc>
@@ -6749,7 +7053,7 @@
                       <a:r>
                         <a:rPr sz="1400" b="0">
                           <a:solidFill>
-                            <a:srgbClr val="2B2B2B"/>
+                            <a:srgbClr val="26231F"/>
                           </a:solidFill>
                         </a:rPr>
                         <a:t>□</a:t>
@@ -6759,25 +7063,25 @@
                   <a:tcPr anchor="ctr" marL="73152" marR="73152">
                     <a:lnL w="9525" cap="flat" cmpd="sng" algn="ctr">
                       <a:solidFill>
-                        <a:srgbClr val="D1FADC"/>
+                        <a:srgbClr val="FAF1D1"/>
                       </a:solidFill>
                       <a:prstDash val="solid"/>
                     </a:lnL>
                     <a:lnR w="9525" cap="flat" cmpd="sng" algn="ctr">
                       <a:solidFill>
-                        <a:srgbClr val="D1FADC"/>
+                        <a:srgbClr val="FAF1D1"/>
                       </a:solidFill>
                       <a:prstDash val="solid"/>
                     </a:lnR>
                     <a:lnT w="9525" cap="flat" cmpd="sng" algn="ctr">
                       <a:solidFill>
-                        <a:srgbClr val="D1FADC"/>
+                        <a:srgbClr val="FAF1D1"/>
                       </a:solidFill>
                       <a:prstDash val="solid"/>
                     </a:lnT>
                     <a:lnB w="9525" cap="flat" cmpd="sng" algn="ctr">
                       <a:solidFill>
-                        <a:srgbClr val="D1FADC"/>
+                        <a:srgbClr val="FAF1D1"/>
                       </a:solidFill>
                       <a:prstDash val="solid"/>
                     </a:lnB>
@@ -6795,7 +7099,7 @@
                       <a:r>
                         <a:rPr sz="1400" b="0">
                           <a:solidFill>
-                            <a:srgbClr val="2B2B2B"/>
+                            <a:srgbClr val="26231F"/>
                           </a:solidFill>
                         </a:rPr>
                         <a:t>□</a:t>
@@ -6805,25 +7109,25 @@
                   <a:tcPr anchor="ctr" marL="73152" marR="73152">
                     <a:lnL w="9525" cap="flat" cmpd="sng" algn="ctr">
                       <a:solidFill>
-                        <a:srgbClr val="D1FADC"/>
+                        <a:srgbClr val="FAF1D1"/>
                       </a:solidFill>
                       <a:prstDash val="solid"/>
                     </a:lnL>
                     <a:lnR w="9525" cap="flat" cmpd="sng" algn="ctr">
                       <a:solidFill>
-                        <a:srgbClr val="D1FADC"/>
+                        <a:srgbClr val="FAF1D1"/>
                       </a:solidFill>
                       <a:prstDash val="solid"/>
                     </a:lnR>
                     <a:lnT w="9525" cap="flat" cmpd="sng" algn="ctr">
                       <a:solidFill>
-                        <a:srgbClr val="D1FADC"/>
+                        <a:srgbClr val="FAF1D1"/>
                       </a:solidFill>
                       <a:prstDash val="solid"/>
                     </a:lnT>
                     <a:lnB w="9525" cap="flat" cmpd="sng" algn="ctr">
                       <a:solidFill>
-                        <a:srgbClr val="D1FADC"/>
+                        <a:srgbClr val="FAF1D1"/>
                       </a:solidFill>
                       <a:prstDash val="solid"/>
                     </a:lnB>
@@ -6841,7 +7145,7 @@
                       <a:r>
                         <a:rPr sz="1400" b="0">
                           <a:solidFill>
-                            <a:srgbClr val="2B2B2B"/>
+                            <a:srgbClr val="26231F"/>
                           </a:solidFill>
                         </a:rPr>
                         <a:t>□</a:t>
@@ -6851,25 +7155,25 @@
                   <a:tcPr anchor="ctr" marL="73152" marR="73152">
                     <a:lnL w="9525" cap="flat" cmpd="sng" algn="ctr">
                       <a:solidFill>
-                        <a:srgbClr val="D1FADC"/>
+                        <a:srgbClr val="FAF1D1"/>
                       </a:solidFill>
                       <a:prstDash val="solid"/>
                     </a:lnL>
                     <a:lnR w="9525" cap="flat" cmpd="sng" algn="ctr">
                       <a:solidFill>
-                        <a:srgbClr val="D1FADC"/>
+                        <a:srgbClr val="FAF1D1"/>
                       </a:solidFill>
                       <a:prstDash val="solid"/>
                     </a:lnR>
                     <a:lnT w="9525" cap="flat" cmpd="sng" algn="ctr">
                       <a:solidFill>
-                        <a:srgbClr val="D1FADC"/>
+                        <a:srgbClr val="FAF1D1"/>
                       </a:solidFill>
                       <a:prstDash val="solid"/>
                     </a:lnT>
                     <a:lnB w="9525" cap="flat" cmpd="sng" algn="ctr">
                       <a:solidFill>
-                        <a:srgbClr val="D1FADC"/>
+                        <a:srgbClr val="FAF1D1"/>
                       </a:solidFill>
                       <a:prstDash val="solid"/>
                     </a:lnB>
@@ -6889,7 +7193,7 @@
                       <a:r>
                         <a:rPr sz="1400" b="1">
                           <a:solidFill>
-                            <a:srgbClr val="115F25"/>
+                            <a:srgbClr val="494127"/>
                           </a:solidFill>
                         </a:rPr>
                         <a:t>뇌·심장</a:t>
@@ -6899,30 +7203,30 @@
                   <a:tcPr anchor="ctr" marL="73152" marR="73152">
                     <a:lnL w="9525" cap="flat" cmpd="sng" algn="ctr">
                       <a:solidFill>
-                        <a:srgbClr val="D1FADC"/>
+                        <a:srgbClr val="FAF1D1"/>
                       </a:solidFill>
                       <a:prstDash val="solid"/>
                     </a:lnL>
                     <a:lnR w="9525" cap="flat" cmpd="sng" algn="ctr">
                       <a:solidFill>
-                        <a:srgbClr val="D1FADC"/>
+                        <a:srgbClr val="FAF1D1"/>
                       </a:solidFill>
                       <a:prstDash val="solid"/>
                     </a:lnR>
                     <a:lnT w="9525" cap="flat" cmpd="sng" algn="ctr">
                       <a:solidFill>
-                        <a:srgbClr val="D1FADC"/>
+                        <a:srgbClr val="FAF1D1"/>
                       </a:solidFill>
                       <a:prstDash val="solid"/>
                     </a:lnT>
                     <a:lnB w="9525" cap="flat" cmpd="sng" algn="ctr">
                       <a:solidFill>
-                        <a:srgbClr val="D1FADC"/>
+                        <a:srgbClr val="FAF1D1"/>
                       </a:solidFill>
                       <a:prstDash val="solid"/>
                     </a:lnB>
                     <a:solidFill>
-                      <a:srgbClr val="D1FADC"/>
+                      <a:srgbClr val="FAF1D1"/>
                     </a:solidFill>
                   </a:tcPr>
                 </a:tc>
@@ -6935,7 +7239,7 @@
                       <a:r>
                         <a:rPr sz="1400" b="0">
                           <a:solidFill>
-                            <a:srgbClr val="2B2B2B"/>
+                            <a:srgbClr val="26231F"/>
                           </a:solidFill>
                         </a:rPr>
                         <a:t>□</a:t>
@@ -6945,30 +7249,30 @@
                   <a:tcPr anchor="ctr" marL="73152" marR="73152">
                     <a:lnL w="9525" cap="flat" cmpd="sng" algn="ctr">
                       <a:solidFill>
-                        <a:srgbClr val="D1FADC"/>
+                        <a:srgbClr val="FAF1D1"/>
                       </a:solidFill>
                       <a:prstDash val="solid"/>
                     </a:lnL>
                     <a:lnR w="9525" cap="flat" cmpd="sng" algn="ctr">
                       <a:solidFill>
-                        <a:srgbClr val="D1FADC"/>
+                        <a:srgbClr val="FAF1D1"/>
                       </a:solidFill>
                       <a:prstDash val="solid"/>
                     </a:lnR>
                     <a:lnT w="9525" cap="flat" cmpd="sng" algn="ctr">
                       <a:solidFill>
-                        <a:srgbClr val="D1FADC"/>
+                        <a:srgbClr val="FAF1D1"/>
                       </a:solidFill>
                       <a:prstDash val="solid"/>
                     </a:lnT>
                     <a:lnB w="9525" cap="flat" cmpd="sng" algn="ctr">
                       <a:solidFill>
-                        <a:srgbClr val="D1FADC"/>
+                        <a:srgbClr val="FAF1D1"/>
                       </a:solidFill>
                       <a:prstDash val="solid"/>
                     </a:lnB>
                     <a:solidFill>
-                      <a:srgbClr val="EEFCF1"/>
+                      <a:srgbClr val="FDF8EA"/>
                     </a:solidFill>
                   </a:tcPr>
                 </a:tc>
@@ -6981,7 +7285,7 @@
                       <a:r>
                         <a:rPr sz="1400" b="0">
                           <a:solidFill>
-                            <a:srgbClr val="2B2B2B"/>
+                            <a:srgbClr val="26231F"/>
                           </a:solidFill>
                         </a:rPr>
                         <a:t>□</a:t>
@@ -6991,30 +7295,30 @@
                   <a:tcPr anchor="ctr" marL="73152" marR="73152">
                     <a:lnL w="9525" cap="flat" cmpd="sng" algn="ctr">
                       <a:solidFill>
-                        <a:srgbClr val="D1FADC"/>
+                        <a:srgbClr val="FAF1D1"/>
                       </a:solidFill>
                       <a:prstDash val="solid"/>
                     </a:lnL>
                     <a:lnR w="9525" cap="flat" cmpd="sng" algn="ctr">
                       <a:solidFill>
-                        <a:srgbClr val="D1FADC"/>
+                        <a:srgbClr val="FAF1D1"/>
                       </a:solidFill>
                       <a:prstDash val="solid"/>
                     </a:lnR>
                     <a:lnT w="9525" cap="flat" cmpd="sng" algn="ctr">
                       <a:solidFill>
-                        <a:srgbClr val="D1FADC"/>
+                        <a:srgbClr val="FAF1D1"/>
                       </a:solidFill>
                       <a:prstDash val="solid"/>
                     </a:lnT>
                     <a:lnB w="9525" cap="flat" cmpd="sng" algn="ctr">
                       <a:solidFill>
-                        <a:srgbClr val="D1FADC"/>
+                        <a:srgbClr val="FAF1D1"/>
                       </a:solidFill>
                       <a:prstDash val="solid"/>
                     </a:lnB>
                     <a:solidFill>
-                      <a:srgbClr val="EEFCF1"/>
+                      <a:srgbClr val="FDF8EA"/>
                     </a:solidFill>
                   </a:tcPr>
                 </a:tc>
@@ -7027,7 +7331,7 @@
                       <a:r>
                         <a:rPr sz="1400" b="0">
                           <a:solidFill>
-                            <a:srgbClr val="2B2B2B"/>
+                            <a:srgbClr val="26231F"/>
                           </a:solidFill>
                         </a:rPr>
                         <a:t>□</a:t>
@@ -7037,30 +7341,30 @@
                   <a:tcPr anchor="ctr" marL="73152" marR="73152">
                     <a:lnL w="9525" cap="flat" cmpd="sng" algn="ctr">
                       <a:solidFill>
-                        <a:srgbClr val="D1FADC"/>
+                        <a:srgbClr val="FAF1D1"/>
                       </a:solidFill>
                       <a:prstDash val="solid"/>
                     </a:lnL>
                     <a:lnR w="9525" cap="flat" cmpd="sng" algn="ctr">
                       <a:solidFill>
-                        <a:srgbClr val="D1FADC"/>
+                        <a:srgbClr val="FAF1D1"/>
                       </a:solidFill>
                       <a:prstDash val="solid"/>
                     </a:lnR>
                     <a:lnT w="9525" cap="flat" cmpd="sng" algn="ctr">
                       <a:solidFill>
-                        <a:srgbClr val="D1FADC"/>
+                        <a:srgbClr val="FAF1D1"/>
                       </a:solidFill>
                       <a:prstDash val="solid"/>
                     </a:lnT>
                     <a:lnB w="9525" cap="flat" cmpd="sng" algn="ctr">
                       <a:solidFill>
-                        <a:srgbClr val="D1FADC"/>
+                        <a:srgbClr val="FAF1D1"/>
                       </a:solidFill>
                       <a:prstDash val="solid"/>
                     </a:lnB>
                     <a:solidFill>
-                      <a:srgbClr val="EEFCF1"/>
+                      <a:srgbClr val="FDF8EA"/>
                     </a:solidFill>
                   </a:tcPr>
                 </a:tc>
@@ -7075,7 +7379,7 @@
                       <a:r>
                         <a:rPr sz="1400" b="1">
                           <a:solidFill>
-                            <a:srgbClr val="115F25"/>
+                            <a:srgbClr val="494127"/>
                           </a:solidFill>
                         </a:rPr>
                         <a:t>입원·수술</a:t>
@@ -7085,30 +7389,30 @@
                   <a:tcPr anchor="ctr" marL="73152" marR="73152">
                     <a:lnL w="9525" cap="flat" cmpd="sng" algn="ctr">
                       <a:solidFill>
-                        <a:srgbClr val="D1FADC"/>
+                        <a:srgbClr val="FAF1D1"/>
                       </a:solidFill>
                       <a:prstDash val="solid"/>
                     </a:lnL>
                     <a:lnR w="9525" cap="flat" cmpd="sng" algn="ctr">
                       <a:solidFill>
-                        <a:srgbClr val="D1FADC"/>
+                        <a:srgbClr val="FAF1D1"/>
                       </a:solidFill>
                       <a:prstDash val="solid"/>
                     </a:lnR>
                     <a:lnT w="9525" cap="flat" cmpd="sng" algn="ctr">
                       <a:solidFill>
-                        <a:srgbClr val="D1FADC"/>
+                        <a:srgbClr val="FAF1D1"/>
                       </a:solidFill>
                       <a:prstDash val="solid"/>
                     </a:lnT>
                     <a:lnB w="9525" cap="flat" cmpd="sng" algn="ctr">
                       <a:solidFill>
-                        <a:srgbClr val="D1FADC"/>
+                        <a:srgbClr val="FAF1D1"/>
                       </a:solidFill>
                       <a:prstDash val="solid"/>
                     </a:lnB>
                     <a:solidFill>
-                      <a:srgbClr val="D1FADC"/>
+                      <a:srgbClr val="FAF1D1"/>
                     </a:solidFill>
                   </a:tcPr>
                 </a:tc>
@@ -7121,7 +7425,7 @@
                       <a:r>
                         <a:rPr sz="1400" b="0">
                           <a:solidFill>
-                            <a:srgbClr val="2B2B2B"/>
+                            <a:srgbClr val="26231F"/>
                           </a:solidFill>
                         </a:rPr>
                         <a:t>□</a:t>
@@ -7131,25 +7435,25 @@
                   <a:tcPr anchor="ctr" marL="73152" marR="73152">
                     <a:lnL w="9525" cap="flat" cmpd="sng" algn="ctr">
                       <a:solidFill>
-                        <a:srgbClr val="D1FADC"/>
+                        <a:srgbClr val="FAF1D1"/>
                       </a:solidFill>
                       <a:prstDash val="solid"/>
                     </a:lnL>
                     <a:lnR w="9525" cap="flat" cmpd="sng" algn="ctr">
                       <a:solidFill>
-                        <a:srgbClr val="D1FADC"/>
+                        <a:srgbClr val="FAF1D1"/>
                       </a:solidFill>
                       <a:prstDash val="solid"/>
                     </a:lnR>
                     <a:lnT w="9525" cap="flat" cmpd="sng" algn="ctr">
                       <a:solidFill>
-                        <a:srgbClr val="D1FADC"/>
+                        <a:srgbClr val="FAF1D1"/>
                       </a:solidFill>
                       <a:prstDash val="solid"/>
                     </a:lnT>
                     <a:lnB w="9525" cap="flat" cmpd="sng" algn="ctr">
                       <a:solidFill>
-                        <a:srgbClr val="D1FADC"/>
+                        <a:srgbClr val="FAF1D1"/>
                       </a:solidFill>
                       <a:prstDash val="solid"/>
                     </a:lnB>
@@ -7167,7 +7471,7 @@
                       <a:r>
                         <a:rPr sz="1400" b="0">
                           <a:solidFill>
-                            <a:srgbClr val="2B2B2B"/>
+                            <a:srgbClr val="26231F"/>
                           </a:solidFill>
                         </a:rPr>
                         <a:t>□</a:t>
@@ -7177,25 +7481,25 @@
                   <a:tcPr anchor="ctr" marL="73152" marR="73152">
                     <a:lnL w="9525" cap="flat" cmpd="sng" algn="ctr">
                       <a:solidFill>
-                        <a:srgbClr val="D1FADC"/>
+                        <a:srgbClr val="FAF1D1"/>
                       </a:solidFill>
                       <a:prstDash val="solid"/>
                     </a:lnL>
                     <a:lnR w="9525" cap="flat" cmpd="sng" algn="ctr">
                       <a:solidFill>
-                        <a:srgbClr val="D1FADC"/>
+                        <a:srgbClr val="FAF1D1"/>
                       </a:solidFill>
                       <a:prstDash val="solid"/>
                     </a:lnR>
                     <a:lnT w="9525" cap="flat" cmpd="sng" algn="ctr">
                       <a:solidFill>
-                        <a:srgbClr val="D1FADC"/>
+                        <a:srgbClr val="FAF1D1"/>
                       </a:solidFill>
                       <a:prstDash val="solid"/>
                     </a:lnT>
                     <a:lnB w="9525" cap="flat" cmpd="sng" algn="ctr">
                       <a:solidFill>
-                        <a:srgbClr val="D1FADC"/>
+                        <a:srgbClr val="FAF1D1"/>
                       </a:solidFill>
                       <a:prstDash val="solid"/>
                     </a:lnB>
@@ -7213,7 +7517,7 @@
                       <a:r>
                         <a:rPr sz="1400" b="0">
                           <a:solidFill>
-                            <a:srgbClr val="2B2B2B"/>
+                            <a:srgbClr val="26231F"/>
                           </a:solidFill>
                         </a:rPr>
                         <a:t>□</a:t>
@@ -7223,25 +7527,25 @@
                   <a:tcPr anchor="ctr" marL="73152" marR="73152">
                     <a:lnL w="9525" cap="flat" cmpd="sng" algn="ctr">
                       <a:solidFill>
-                        <a:srgbClr val="D1FADC"/>
+                        <a:srgbClr val="FAF1D1"/>
                       </a:solidFill>
                       <a:prstDash val="solid"/>
                     </a:lnL>
                     <a:lnR w="9525" cap="flat" cmpd="sng" algn="ctr">
                       <a:solidFill>
-                        <a:srgbClr val="D1FADC"/>
+                        <a:srgbClr val="FAF1D1"/>
                       </a:solidFill>
                       <a:prstDash val="solid"/>
                     </a:lnR>
                     <a:lnT w="9525" cap="flat" cmpd="sng" algn="ctr">
                       <a:solidFill>
-                        <a:srgbClr val="D1FADC"/>
+                        <a:srgbClr val="FAF1D1"/>
                       </a:solidFill>
                       <a:prstDash val="solid"/>
                     </a:lnT>
                     <a:lnB w="9525" cap="flat" cmpd="sng" algn="ctr">
                       <a:solidFill>
-                        <a:srgbClr val="D1FADC"/>
+                        <a:srgbClr val="FAF1D1"/>
                       </a:solidFill>
                       <a:prstDash val="solid"/>
                     </a:lnB>
@@ -7261,7 +7565,7 @@
                       <a:r>
                         <a:rPr sz="1400" b="1">
                           <a:solidFill>
-                            <a:srgbClr val="115F25"/>
+                            <a:srgbClr val="494127"/>
                           </a:solidFill>
                         </a:rPr>
                         <a:t>상해</a:t>
@@ -7271,30 +7575,30 @@
                   <a:tcPr anchor="ctr" marL="73152" marR="73152">
                     <a:lnL w="9525" cap="flat" cmpd="sng" algn="ctr">
                       <a:solidFill>
-                        <a:srgbClr val="D1FADC"/>
+                        <a:srgbClr val="FAF1D1"/>
                       </a:solidFill>
                       <a:prstDash val="solid"/>
                     </a:lnL>
                     <a:lnR w="9525" cap="flat" cmpd="sng" algn="ctr">
                       <a:solidFill>
-                        <a:srgbClr val="D1FADC"/>
+                        <a:srgbClr val="FAF1D1"/>
                       </a:solidFill>
                       <a:prstDash val="solid"/>
                     </a:lnR>
                     <a:lnT w="9525" cap="flat" cmpd="sng" algn="ctr">
                       <a:solidFill>
-                        <a:srgbClr val="D1FADC"/>
+                        <a:srgbClr val="FAF1D1"/>
                       </a:solidFill>
                       <a:prstDash val="solid"/>
                     </a:lnT>
                     <a:lnB w="9525" cap="flat" cmpd="sng" algn="ctr">
                       <a:solidFill>
-                        <a:srgbClr val="D1FADC"/>
+                        <a:srgbClr val="FAF1D1"/>
                       </a:solidFill>
                       <a:prstDash val="solid"/>
                     </a:lnB>
                     <a:solidFill>
-                      <a:srgbClr val="D1FADC"/>
+                      <a:srgbClr val="FAF1D1"/>
                     </a:solidFill>
                   </a:tcPr>
                 </a:tc>
@@ -7307,7 +7611,7 @@
                       <a:r>
                         <a:rPr sz="1400" b="0">
                           <a:solidFill>
-                            <a:srgbClr val="2B2B2B"/>
+                            <a:srgbClr val="26231F"/>
                           </a:solidFill>
                         </a:rPr>
                         <a:t>□</a:t>
@@ -7317,30 +7621,30 @@
                   <a:tcPr anchor="ctr" marL="73152" marR="73152">
                     <a:lnL w="9525" cap="flat" cmpd="sng" algn="ctr">
                       <a:solidFill>
-                        <a:srgbClr val="D1FADC"/>
+                        <a:srgbClr val="FAF1D1"/>
                       </a:solidFill>
                       <a:prstDash val="solid"/>
                     </a:lnL>
                     <a:lnR w="9525" cap="flat" cmpd="sng" algn="ctr">
                       <a:solidFill>
-                        <a:srgbClr val="D1FADC"/>
+                        <a:srgbClr val="FAF1D1"/>
                       </a:solidFill>
                       <a:prstDash val="solid"/>
                     </a:lnR>
                     <a:lnT w="9525" cap="flat" cmpd="sng" algn="ctr">
                       <a:solidFill>
-                        <a:srgbClr val="D1FADC"/>
+                        <a:srgbClr val="FAF1D1"/>
                       </a:solidFill>
                       <a:prstDash val="solid"/>
                     </a:lnT>
                     <a:lnB w="9525" cap="flat" cmpd="sng" algn="ctr">
                       <a:solidFill>
-                        <a:srgbClr val="D1FADC"/>
+                        <a:srgbClr val="FAF1D1"/>
                       </a:solidFill>
                       <a:prstDash val="solid"/>
                     </a:lnB>
                     <a:solidFill>
-                      <a:srgbClr val="EEFCF1"/>
+                      <a:srgbClr val="FDF8EA"/>
                     </a:solidFill>
                   </a:tcPr>
                 </a:tc>
@@ -7353,7 +7657,7 @@
                       <a:r>
                         <a:rPr sz="1400" b="0">
                           <a:solidFill>
-                            <a:srgbClr val="2B2B2B"/>
+                            <a:srgbClr val="26231F"/>
                           </a:solidFill>
                         </a:rPr>
                         <a:t>□</a:t>
@@ -7363,30 +7667,30 @@
                   <a:tcPr anchor="ctr" marL="73152" marR="73152">
                     <a:lnL w="9525" cap="flat" cmpd="sng" algn="ctr">
                       <a:solidFill>
-                        <a:srgbClr val="D1FADC"/>
+                        <a:srgbClr val="FAF1D1"/>
                       </a:solidFill>
                       <a:prstDash val="solid"/>
                     </a:lnL>
                     <a:lnR w="9525" cap="flat" cmpd="sng" algn="ctr">
                       <a:solidFill>
-                        <a:srgbClr val="D1FADC"/>
+                        <a:srgbClr val="FAF1D1"/>
                       </a:solidFill>
                       <a:prstDash val="solid"/>
                     </a:lnR>
                     <a:lnT w="9525" cap="flat" cmpd="sng" algn="ctr">
                       <a:solidFill>
-                        <a:srgbClr val="D1FADC"/>
+                        <a:srgbClr val="FAF1D1"/>
                       </a:solidFill>
                       <a:prstDash val="solid"/>
                     </a:lnT>
                     <a:lnB w="9525" cap="flat" cmpd="sng" algn="ctr">
                       <a:solidFill>
-                        <a:srgbClr val="D1FADC"/>
+                        <a:srgbClr val="FAF1D1"/>
                       </a:solidFill>
                       <a:prstDash val="solid"/>
                     </a:lnB>
                     <a:solidFill>
-                      <a:srgbClr val="EEFCF1"/>
+                      <a:srgbClr val="FDF8EA"/>
                     </a:solidFill>
                   </a:tcPr>
                 </a:tc>
@@ -7399,7 +7703,7 @@
                       <a:r>
                         <a:rPr sz="1400" b="0">
                           <a:solidFill>
-                            <a:srgbClr val="2B2B2B"/>
+                            <a:srgbClr val="26231F"/>
                           </a:solidFill>
                         </a:rPr>
                         <a:t>□</a:t>
@@ -7409,30 +7713,30 @@
                   <a:tcPr anchor="ctr" marL="73152" marR="73152">
                     <a:lnL w="9525" cap="flat" cmpd="sng" algn="ctr">
                       <a:solidFill>
-                        <a:srgbClr val="D1FADC"/>
+                        <a:srgbClr val="FAF1D1"/>
                       </a:solidFill>
                       <a:prstDash val="solid"/>
                     </a:lnL>
                     <a:lnR w="9525" cap="flat" cmpd="sng" algn="ctr">
                       <a:solidFill>
-                        <a:srgbClr val="D1FADC"/>
+                        <a:srgbClr val="FAF1D1"/>
                       </a:solidFill>
                       <a:prstDash val="solid"/>
                     </a:lnR>
                     <a:lnT w="9525" cap="flat" cmpd="sng" algn="ctr">
                       <a:solidFill>
-                        <a:srgbClr val="D1FADC"/>
+                        <a:srgbClr val="FAF1D1"/>
                       </a:solidFill>
                       <a:prstDash val="solid"/>
                     </a:lnT>
                     <a:lnB w="9525" cap="flat" cmpd="sng" algn="ctr">
                       <a:solidFill>
-                        <a:srgbClr val="D1FADC"/>
+                        <a:srgbClr val="FAF1D1"/>
                       </a:solidFill>
                       <a:prstDash val="solid"/>
                     </a:lnB>
                     <a:solidFill>
-                      <a:srgbClr val="EEFCF1"/>
+                      <a:srgbClr val="FDF8EA"/>
                     </a:solidFill>
                   </a:tcPr>
                 </a:tc>
@@ -7447,7 +7751,7 @@
                       <a:r>
                         <a:rPr sz="1400" b="1">
                           <a:solidFill>
-                            <a:srgbClr val="115F25"/>
+                            <a:srgbClr val="494127"/>
                           </a:solidFill>
                         </a:rPr>
                         <a:t>실손의료</a:t>
@@ -7457,30 +7761,30 @@
                   <a:tcPr anchor="ctr" marL="73152" marR="73152">
                     <a:lnL w="9525" cap="flat" cmpd="sng" algn="ctr">
                       <a:solidFill>
-                        <a:srgbClr val="D1FADC"/>
+                        <a:srgbClr val="FAF1D1"/>
                       </a:solidFill>
                       <a:prstDash val="solid"/>
                     </a:lnL>
                     <a:lnR w="9525" cap="flat" cmpd="sng" algn="ctr">
                       <a:solidFill>
-                        <a:srgbClr val="D1FADC"/>
+                        <a:srgbClr val="FAF1D1"/>
                       </a:solidFill>
                       <a:prstDash val="solid"/>
                     </a:lnR>
                     <a:lnT w="9525" cap="flat" cmpd="sng" algn="ctr">
                       <a:solidFill>
-                        <a:srgbClr val="D1FADC"/>
+                        <a:srgbClr val="FAF1D1"/>
                       </a:solidFill>
                       <a:prstDash val="solid"/>
                     </a:lnT>
                     <a:lnB w="9525" cap="flat" cmpd="sng" algn="ctr">
                       <a:solidFill>
-                        <a:srgbClr val="D1FADC"/>
+                        <a:srgbClr val="FAF1D1"/>
                       </a:solidFill>
                       <a:prstDash val="solid"/>
                     </a:lnB>
                     <a:solidFill>
-                      <a:srgbClr val="D1FADC"/>
+                      <a:srgbClr val="FAF1D1"/>
                     </a:solidFill>
                   </a:tcPr>
                 </a:tc>
@@ -7493,7 +7797,7 @@
                       <a:r>
                         <a:rPr sz="1400" b="0">
                           <a:solidFill>
-                            <a:srgbClr val="2B2B2B"/>
+                            <a:srgbClr val="26231F"/>
                           </a:solidFill>
                         </a:rPr>
                         <a:t>□</a:t>
@@ -7503,25 +7807,25 @@
                   <a:tcPr anchor="ctr" marL="73152" marR="73152">
                     <a:lnL w="9525" cap="flat" cmpd="sng" algn="ctr">
                       <a:solidFill>
-                        <a:srgbClr val="D1FADC"/>
+                        <a:srgbClr val="FAF1D1"/>
                       </a:solidFill>
                       <a:prstDash val="solid"/>
                     </a:lnL>
                     <a:lnR w="9525" cap="flat" cmpd="sng" algn="ctr">
                       <a:solidFill>
-                        <a:srgbClr val="D1FADC"/>
+                        <a:srgbClr val="FAF1D1"/>
                       </a:solidFill>
                       <a:prstDash val="solid"/>
                     </a:lnR>
                     <a:lnT w="9525" cap="flat" cmpd="sng" algn="ctr">
                       <a:solidFill>
-                        <a:srgbClr val="D1FADC"/>
+                        <a:srgbClr val="FAF1D1"/>
                       </a:solidFill>
                       <a:prstDash val="solid"/>
                     </a:lnT>
                     <a:lnB w="9525" cap="flat" cmpd="sng" algn="ctr">
                       <a:solidFill>
-                        <a:srgbClr val="D1FADC"/>
+                        <a:srgbClr val="FAF1D1"/>
                       </a:solidFill>
                       <a:prstDash val="solid"/>
                     </a:lnB>
@@ -7539,7 +7843,7 @@
                       <a:r>
                         <a:rPr sz="1400" b="0">
                           <a:solidFill>
-                            <a:srgbClr val="2B2B2B"/>
+                            <a:srgbClr val="26231F"/>
                           </a:solidFill>
                         </a:rPr>
                         <a:t>□</a:t>
@@ -7549,25 +7853,25 @@
                   <a:tcPr anchor="ctr" marL="73152" marR="73152">
                     <a:lnL w="9525" cap="flat" cmpd="sng" algn="ctr">
                       <a:solidFill>
-                        <a:srgbClr val="D1FADC"/>
+                        <a:srgbClr val="FAF1D1"/>
                       </a:solidFill>
                       <a:prstDash val="solid"/>
                     </a:lnL>
                     <a:lnR w="9525" cap="flat" cmpd="sng" algn="ctr">
                       <a:solidFill>
-                        <a:srgbClr val="D1FADC"/>
+                        <a:srgbClr val="FAF1D1"/>
                       </a:solidFill>
                       <a:prstDash val="solid"/>
                     </a:lnR>
                     <a:lnT w="9525" cap="flat" cmpd="sng" algn="ctr">
                       <a:solidFill>
-                        <a:srgbClr val="D1FADC"/>
+                        <a:srgbClr val="FAF1D1"/>
                       </a:solidFill>
                       <a:prstDash val="solid"/>
                     </a:lnT>
                     <a:lnB w="9525" cap="flat" cmpd="sng" algn="ctr">
                       <a:solidFill>
-                        <a:srgbClr val="D1FADC"/>
+                        <a:srgbClr val="FAF1D1"/>
                       </a:solidFill>
                       <a:prstDash val="solid"/>
                     </a:lnB>
@@ -7585,7 +7889,7 @@
                       <a:r>
                         <a:rPr sz="1400" b="0">
                           <a:solidFill>
-                            <a:srgbClr val="2B2B2B"/>
+                            <a:srgbClr val="26231F"/>
                           </a:solidFill>
                         </a:rPr>
                         <a:t>□</a:t>
@@ -7595,25 +7899,25 @@
                   <a:tcPr anchor="ctr" marL="73152" marR="73152">
                     <a:lnL w="9525" cap="flat" cmpd="sng" algn="ctr">
                       <a:solidFill>
-                        <a:srgbClr val="D1FADC"/>
+                        <a:srgbClr val="FAF1D1"/>
                       </a:solidFill>
                       <a:prstDash val="solid"/>
                     </a:lnL>
                     <a:lnR w="9525" cap="flat" cmpd="sng" algn="ctr">
                       <a:solidFill>
-                        <a:srgbClr val="D1FADC"/>
+                        <a:srgbClr val="FAF1D1"/>
                       </a:solidFill>
                       <a:prstDash val="solid"/>
                     </a:lnR>
                     <a:lnT w="9525" cap="flat" cmpd="sng" algn="ctr">
                       <a:solidFill>
-                        <a:srgbClr val="D1FADC"/>
+                        <a:srgbClr val="FAF1D1"/>
                       </a:solidFill>
                       <a:prstDash val="solid"/>
                     </a:lnT>
                     <a:lnB w="9525" cap="flat" cmpd="sng" algn="ctr">
                       <a:solidFill>
-                        <a:srgbClr val="D1FADC"/>
+                        <a:srgbClr val="FAF1D1"/>
                       </a:solidFill>
                       <a:prstDash val="solid"/>
                     </a:lnB>
@@ -7633,7 +7937,7 @@
                       <a:r>
                         <a:rPr sz="1400" b="1">
                           <a:solidFill>
-                            <a:srgbClr val="115F25"/>
+                            <a:srgbClr val="494127"/>
                           </a:solidFill>
                         </a:rPr>
                         <a:t>연금·노후자금</a:t>
@@ -7643,30 +7947,30 @@
                   <a:tcPr anchor="ctr" marL="73152" marR="73152">
                     <a:lnL w="9525" cap="flat" cmpd="sng" algn="ctr">
                       <a:solidFill>
-                        <a:srgbClr val="D1FADC"/>
+                        <a:srgbClr val="FAF1D1"/>
                       </a:solidFill>
                       <a:prstDash val="solid"/>
                     </a:lnL>
                     <a:lnR w="9525" cap="flat" cmpd="sng" algn="ctr">
                       <a:solidFill>
-                        <a:srgbClr val="D1FADC"/>
+                        <a:srgbClr val="FAF1D1"/>
                       </a:solidFill>
                       <a:prstDash val="solid"/>
                     </a:lnR>
                     <a:lnT w="9525" cap="flat" cmpd="sng" algn="ctr">
                       <a:solidFill>
-                        <a:srgbClr val="D1FADC"/>
+                        <a:srgbClr val="FAF1D1"/>
                       </a:solidFill>
                       <a:prstDash val="solid"/>
                     </a:lnT>
                     <a:lnB w="9525" cap="flat" cmpd="sng" algn="ctr">
                       <a:solidFill>
-                        <a:srgbClr val="D1FADC"/>
+                        <a:srgbClr val="FAF1D1"/>
                       </a:solidFill>
                       <a:prstDash val="solid"/>
                     </a:lnB>
                     <a:solidFill>
-                      <a:srgbClr val="D1FADC"/>
+                      <a:srgbClr val="FAF1D1"/>
                     </a:solidFill>
                   </a:tcPr>
                 </a:tc>
@@ -7679,7 +7983,7 @@
                       <a:r>
                         <a:rPr sz="1400" b="0">
                           <a:solidFill>
-                            <a:srgbClr val="2B2B2B"/>
+                            <a:srgbClr val="26231F"/>
                           </a:solidFill>
                         </a:rPr>
                         <a:t>□</a:t>
@@ -7689,30 +7993,30 @@
                   <a:tcPr anchor="ctr" marL="73152" marR="73152">
                     <a:lnL w="9525" cap="flat" cmpd="sng" algn="ctr">
                       <a:solidFill>
-                        <a:srgbClr val="D1FADC"/>
+                        <a:srgbClr val="FAF1D1"/>
                       </a:solidFill>
                       <a:prstDash val="solid"/>
                     </a:lnL>
                     <a:lnR w="9525" cap="flat" cmpd="sng" algn="ctr">
                       <a:solidFill>
-                        <a:srgbClr val="D1FADC"/>
+                        <a:srgbClr val="FAF1D1"/>
                       </a:solidFill>
                       <a:prstDash val="solid"/>
                     </a:lnR>
                     <a:lnT w="9525" cap="flat" cmpd="sng" algn="ctr">
                       <a:solidFill>
-                        <a:srgbClr val="D1FADC"/>
+                        <a:srgbClr val="FAF1D1"/>
                       </a:solidFill>
                       <a:prstDash val="solid"/>
                     </a:lnT>
                     <a:lnB w="9525" cap="flat" cmpd="sng" algn="ctr">
                       <a:solidFill>
-                        <a:srgbClr val="D1FADC"/>
+                        <a:srgbClr val="FAF1D1"/>
                       </a:solidFill>
                       <a:prstDash val="solid"/>
                     </a:lnB>
                     <a:solidFill>
-                      <a:srgbClr val="EEFCF1"/>
+                      <a:srgbClr val="FDF8EA"/>
                     </a:solidFill>
                   </a:tcPr>
                 </a:tc>
@@ -7725,7 +8029,7 @@
                       <a:r>
                         <a:rPr sz="1400" b="0">
                           <a:solidFill>
-                            <a:srgbClr val="2B2B2B"/>
+                            <a:srgbClr val="26231F"/>
                           </a:solidFill>
                         </a:rPr>
                         <a:t>□</a:t>
@@ -7735,30 +8039,30 @@
                   <a:tcPr anchor="ctr" marL="73152" marR="73152">
                     <a:lnL w="9525" cap="flat" cmpd="sng" algn="ctr">
                       <a:solidFill>
-                        <a:srgbClr val="D1FADC"/>
+                        <a:srgbClr val="FAF1D1"/>
                       </a:solidFill>
                       <a:prstDash val="solid"/>
                     </a:lnL>
                     <a:lnR w="9525" cap="flat" cmpd="sng" algn="ctr">
                       <a:solidFill>
-                        <a:srgbClr val="D1FADC"/>
+                        <a:srgbClr val="FAF1D1"/>
                       </a:solidFill>
                       <a:prstDash val="solid"/>
                     </a:lnR>
                     <a:lnT w="9525" cap="flat" cmpd="sng" algn="ctr">
                       <a:solidFill>
-                        <a:srgbClr val="D1FADC"/>
+                        <a:srgbClr val="FAF1D1"/>
                       </a:solidFill>
                       <a:prstDash val="solid"/>
                     </a:lnT>
                     <a:lnB w="9525" cap="flat" cmpd="sng" algn="ctr">
                       <a:solidFill>
-                        <a:srgbClr val="D1FADC"/>
+                        <a:srgbClr val="FAF1D1"/>
                       </a:solidFill>
                       <a:prstDash val="solid"/>
                     </a:lnB>
                     <a:solidFill>
-                      <a:srgbClr val="EEFCF1"/>
+                      <a:srgbClr val="FDF8EA"/>
                     </a:solidFill>
                   </a:tcPr>
                 </a:tc>
@@ -7771,7 +8075,7 @@
                       <a:r>
                         <a:rPr sz="1400" b="0">
                           <a:solidFill>
-                            <a:srgbClr val="2B2B2B"/>
+                            <a:srgbClr val="26231F"/>
                           </a:solidFill>
                         </a:rPr>
                         <a:t>□</a:t>
@@ -7781,30 +8085,30 @@
                   <a:tcPr anchor="ctr" marL="73152" marR="73152">
                     <a:lnL w="9525" cap="flat" cmpd="sng" algn="ctr">
                       <a:solidFill>
-                        <a:srgbClr val="D1FADC"/>
+                        <a:srgbClr val="FAF1D1"/>
                       </a:solidFill>
                       <a:prstDash val="solid"/>
                     </a:lnL>
                     <a:lnR w="9525" cap="flat" cmpd="sng" algn="ctr">
                       <a:solidFill>
-                        <a:srgbClr val="D1FADC"/>
+                        <a:srgbClr val="FAF1D1"/>
                       </a:solidFill>
                       <a:prstDash val="solid"/>
                     </a:lnR>
                     <a:lnT w="9525" cap="flat" cmpd="sng" algn="ctr">
                       <a:solidFill>
-                        <a:srgbClr val="D1FADC"/>
+                        <a:srgbClr val="FAF1D1"/>
                       </a:solidFill>
                       <a:prstDash val="solid"/>
                     </a:lnT>
                     <a:lnB w="9525" cap="flat" cmpd="sng" algn="ctr">
                       <a:solidFill>
-                        <a:srgbClr val="D1FADC"/>
+                        <a:srgbClr val="FAF1D1"/>
                       </a:solidFill>
                       <a:prstDash val="solid"/>
                     </a:lnB>
                     <a:solidFill>
-                      <a:srgbClr val="EEFCF1"/>
+                      <a:srgbClr val="FDF8EA"/>
                     </a:solidFill>
                   </a:tcPr>
                 </a:tc>
@@ -7827,7 +8131,7 @@
     <p:bg>
       <p:bgPr>
         <a:solidFill>
-          <a:srgbClr val="26C54E"/>
+          <a:srgbClr val="FFFFFF"/>
         </a:solidFill>
         <a:effectLst/>
       </p:bgPr>
@@ -7847,16 +8151,81 @@
         </p:nvSpPr>
         <p:spPr>
           <a:xfrm>
-            <a:off x="274320" y="274320"/>
-            <a:ext cx="11643055" cy="6309360"/>
-          </a:xfrm>
-          <a:prstGeom prst="roundRect">
-            <a:avLst>
-              <a:gd name="adj" fmla="val 3500"/>
-            </a:avLst>
+            <a:off x="640080" y="6400800"/>
+            <a:ext cx="10911535" cy="10972"/>
+          </a:xfrm>
+          <a:prstGeom prst="rect">
+            <a:avLst/>
           </a:prstGeom>
           <a:solidFill>
-            <a:srgbClr val="FFFFFF"/>
+            <a:srgbClr val="26231F"/>
+          </a:solidFill>
+          <a:ln>
+            <a:noFill/>
+          </a:ln>
+        </p:spPr>
+        <p:txBody>
+          <a:bodyPr rtlCol="0" anchor="ctr"/>
+          <a:lstStyle/>
+          <a:p>
+            <a:pPr algn="ctr"/>
+          </a:p>
+        </p:txBody>
+      </p:sp>
+      <p:sp>
+        <p:nvSpPr>
+          <p:cNvPr id="4" name="하단 라벨"/>
+          <p:cNvSpPr txBox="1"/>
+          <p:nvPr/>
+        </p:nvSpPr>
+        <p:spPr>
+          <a:xfrm>
+            <a:off x="640080" y="6437376"/>
+            <a:ext cx="5486400" cy="274320"/>
+          </a:xfrm>
+          <a:prstGeom prst="rect">
+            <a:avLst/>
+          </a:prstGeom>
+          <a:noFill/>
+        </p:spPr>
+        <p:txBody>
+          <a:bodyPr wrap="square" lIns="54864" rIns="54864" tIns="27432" bIns="27432" anchor="ctr">
+            <a:noAutofit/>
+          </a:bodyPr>
+          <a:lstStyle/>
+          <a:p>
+            <a:pPr algn="l">
+              <a:lnSpc>
+                <a:spcPct val="115000"/>
+              </a:lnSpc>
+            </a:pPr>
+            <a:r>
+              <a:rPr sz="900" b="1" i="0" spc="250">
+                <a:solidFill>
+                  <a:srgbClr val="26231F"/>
+                </a:solidFill>
+              </a:rPr>
+              <a:t>INSURANCE CHECK</a:t>
+            </a:r>
+          </a:p>
+        </p:txBody>
+      </p:sp>
+      <p:sp>
+        <p:nvSpPr>
+          <p:cNvPr id="5" name="포인트"/>
+          <p:cNvSpPr/>
+          <p:nvPr/>
+        </p:nvSpPr>
+        <p:spPr>
+          <a:xfrm>
+            <a:off x="11213287" y="6473952"/>
+            <a:ext cx="219456" cy="219456"/>
+          </a:xfrm>
+          <a:prstGeom prst="ellipse">
+            <a:avLst/>
+          </a:prstGeom>
+          <a:solidFill>
+            <a:srgbClr val="EAD07B"/>
           </a:solidFill>
           <a:ln>
             <a:noFill/>
@@ -7882,8 +8251,8 @@
         </p:nvSpPr>
         <p:spPr>
           <a:xfrm>
-            <a:off x="731520" y="548640"/>
-            <a:ext cx="9448495" cy="868680"/>
+            <a:off x="640080" y="502920"/>
+            <a:ext cx="10911535" cy="914400"/>
           </a:xfrm>
         </p:spPr>
         <p:txBody>
@@ -7900,7 +8269,7 @@
             <a:r>
               <a:rPr sz="3000" b="1" i="0">
                 <a:solidFill>
-                  <a:srgbClr val="115F25"/>
+                  <a:srgbClr val="26231F"/>
                 </a:solidFill>
               </a:rPr>
               <a:t>월 보험료 한눈에</a:t>
@@ -7910,26 +8279,26 @@
       </p:sp>
       <p:sp>
         <p:nvSpPr>
-          <p:cNvPr id="4" name="카드 1"/>
+          <p:cNvPr id="6" name="카드 1"/>
           <p:cNvSpPr/>
           <p:nvPr/>
         </p:nvSpPr>
         <p:spPr>
           <a:xfrm>
-            <a:off x="731520" y="1600200"/>
-            <a:ext cx="3423818" cy="2926080"/>
+            <a:off x="640080" y="1600200"/>
+            <a:ext cx="3484778" cy="2926080"/>
           </a:xfrm>
           <a:prstGeom prst="roundRect">
             <a:avLst>
-              <a:gd name="adj" fmla="val 8000"/>
+              <a:gd name="adj" fmla="val 3000"/>
             </a:avLst>
           </a:prstGeom>
           <a:solidFill>
-            <a:srgbClr val="EEFCF1"/>
+            <a:srgbClr val="FFFFFF"/>
           </a:solidFill>
-          <a:ln w="15875">
+          <a:ln w="9525">
             <a:solidFill>
-              <a:srgbClr val="D1FADC"/>
+              <a:srgbClr val="FAF1D1"/>
             </a:solidFill>
           </a:ln>
         </p:spPr>
@@ -7943,20 +8312,51 @@
       </p:sp>
       <p:sp>
         <p:nvSpPr>
-          <p:cNvPr id="5" name="번호 1"/>
+          <p:cNvPr id="7" name="위쪽 띠"/>
           <p:cNvSpPr/>
           <p:nvPr/>
         </p:nvSpPr>
         <p:spPr>
           <a:xfrm>
-            <a:off x="914400" y="1783080"/>
-            <a:ext cx="457200" cy="457200"/>
-          </a:xfrm>
-          <a:prstGeom prst="ellipse">
+            <a:off x="649224" y="1609344"/>
+            <a:ext cx="3466490" cy="82296"/>
+          </a:xfrm>
+          <a:prstGeom prst="rect">
             <a:avLst/>
           </a:prstGeom>
           <a:solidFill>
-            <a:srgbClr val="26C54E"/>
+            <a:srgbClr val="EAD07B"/>
+          </a:solidFill>
+          <a:ln>
+            <a:noFill/>
+          </a:ln>
+        </p:spPr>
+        <p:txBody>
+          <a:bodyPr rtlCol="0" anchor="ctr"/>
+          <a:lstStyle/>
+          <a:p>
+            <a:pPr algn="ctr"/>
+          </a:p>
+        </p:txBody>
+      </p:sp>
+      <p:sp>
+        <p:nvSpPr>
+          <p:cNvPr id="8" name="번호 1"/>
+          <p:cNvSpPr/>
+          <p:nvPr/>
+        </p:nvSpPr>
+        <p:spPr>
+          <a:xfrm>
+            <a:off x="822959" y="1783080"/>
+            <a:ext cx="457200" cy="457200"/>
+          </a:xfrm>
+          <a:prstGeom prst="roundRect">
+            <a:avLst>
+              <a:gd name="adj" fmla="val 25000"/>
+            </a:avLst>
+          </a:prstGeom>
+          <a:solidFill>
+            <a:srgbClr val="EAD07B"/>
           </a:solidFill>
           <a:ln>
             <a:noFill/>
@@ -7976,7 +8376,7 @@
             <a:r>
               <a:rPr sz="1600" b="1" i="0">
                 <a:solidFill>
-                  <a:srgbClr val="FFFFFF"/>
+                  <a:srgbClr val="26231F"/>
                 </a:solidFill>
               </a:rPr>
               <a:t>1</a:t>
@@ -7986,14 +8386,14 @@
       </p:sp>
       <p:sp>
         <p:nvSpPr>
-          <p:cNvPr id="6" name="TextBox 5"/>
+          <p:cNvPr id="9" name="TextBox 8"/>
           <p:cNvSpPr txBox="1"/>
           <p:nvPr/>
         </p:nvSpPr>
         <p:spPr>
           <a:xfrm>
-            <a:off x="868680" y="2377440"/>
-            <a:ext cx="3149498" cy="640080"/>
+            <a:off x="777240" y="2377440"/>
+            <a:ext cx="3210458" cy="640080"/>
           </a:xfrm>
           <a:prstGeom prst="rect">
             <a:avLst/>
@@ -8014,7 +8414,7 @@
             <a:r>
               <a:rPr sz="1700" b="1" i="0">
                 <a:solidFill>
-                  <a:srgbClr val="115F25"/>
+                  <a:srgbClr val="494127"/>
                 </a:solidFill>
               </a:rPr>
               <a:t>월 보험료 합계</a:t>
@@ -8024,14 +8424,14 @@
       </p:sp>
       <p:sp>
         <p:nvSpPr>
-          <p:cNvPr id="7" name="TextBox 6"/>
+          <p:cNvPr id="10" name="TextBox 9"/>
           <p:cNvSpPr txBox="1"/>
           <p:nvPr/>
         </p:nvSpPr>
         <p:spPr>
           <a:xfrm>
-            <a:off x="868680" y="3063240"/>
-            <a:ext cx="3149498" cy="1325880"/>
+            <a:off x="777240" y="3063240"/>
+            <a:ext cx="3210458" cy="1325880"/>
           </a:xfrm>
           <a:prstGeom prst="rect">
             <a:avLst/>
@@ -8052,7 +8452,7 @@
             <a:r>
               <a:rPr sz="3000" b="0" i="0">
                 <a:solidFill>
-                  <a:srgbClr val="2B2B2B"/>
+                  <a:srgbClr val="26231F"/>
                 </a:solidFill>
               </a:rPr>
               <a:t>0원</a:t>
@@ -8062,26 +8462,26 @@
       </p:sp>
       <p:sp>
         <p:nvSpPr>
-          <p:cNvPr id="8" name="카드 2"/>
+          <p:cNvPr id="11" name="카드 2"/>
           <p:cNvSpPr/>
           <p:nvPr/>
         </p:nvSpPr>
         <p:spPr>
           <a:xfrm>
-            <a:off x="4383938" y="1600200"/>
-            <a:ext cx="3423818" cy="2926080"/>
+            <a:off x="4353458" y="1600200"/>
+            <a:ext cx="3484778" cy="2926080"/>
           </a:xfrm>
           <a:prstGeom prst="roundRect">
             <a:avLst>
-              <a:gd name="adj" fmla="val 8000"/>
+              <a:gd name="adj" fmla="val 3000"/>
             </a:avLst>
           </a:prstGeom>
           <a:solidFill>
-            <a:srgbClr val="EEFCF1"/>
+            <a:srgbClr val="FFFFFF"/>
           </a:solidFill>
-          <a:ln w="15875">
+          <a:ln w="9525">
             <a:solidFill>
-              <a:srgbClr val="D1FADC"/>
+              <a:srgbClr val="FAF1D1"/>
             </a:solidFill>
           </a:ln>
         </p:spPr>
@@ -8095,20 +8495,51 @@
       </p:sp>
       <p:sp>
         <p:nvSpPr>
-          <p:cNvPr id="9" name="번호 2"/>
+          <p:cNvPr id="12" name="위쪽 띠"/>
           <p:cNvSpPr/>
           <p:nvPr/>
         </p:nvSpPr>
         <p:spPr>
           <a:xfrm>
-            <a:off x="4566818" y="1783080"/>
-            <a:ext cx="457200" cy="457200"/>
-          </a:xfrm>
-          <a:prstGeom prst="ellipse">
+            <a:off x="4362602" y="1609344"/>
+            <a:ext cx="3466490" cy="82296"/>
+          </a:xfrm>
+          <a:prstGeom prst="rect">
             <a:avLst/>
           </a:prstGeom>
           <a:solidFill>
-            <a:srgbClr val="26C54E"/>
+            <a:srgbClr val="EAD07B"/>
+          </a:solidFill>
+          <a:ln>
+            <a:noFill/>
+          </a:ln>
+        </p:spPr>
+        <p:txBody>
+          <a:bodyPr rtlCol="0" anchor="ctr"/>
+          <a:lstStyle/>
+          <a:p>
+            <a:pPr algn="ctr"/>
+          </a:p>
+        </p:txBody>
+      </p:sp>
+      <p:sp>
+        <p:nvSpPr>
+          <p:cNvPr id="13" name="번호 2"/>
+          <p:cNvSpPr/>
+          <p:nvPr/>
+        </p:nvSpPr>
+        <p:spPr>
+          <a:xfrm>
+            <a:off x="4536338" y="1783080"/>
+            <a:ext cx="457200" cy="457200"/>
+          </a:xfrm>
+          <a:prstGeom prst="roundRect">
+            <a:avLst>
+              <a:gd name="adj" fmla="val 25000"/>
+            </a:avLst>
+          </a:prstGeom>
+          <a:solidFill>
+            <a:srgbClr val="EAD07B"/>
           </a:solidFill>
           <a:ln>
             <a:noFill/>
@@ -8128,7 +8559,7 @@
             <a:r>
               <a:rPr sz="1600" b="1" i="0">
                 <a:solidFill>
-                  <a:srgbClr val="FFFFFF"/>
+                  <a:srgbClr val="26231F"/>
                 </a:solidFill>
               </a:rPr>
               <a:t>2</a:t>
@@ -8138,14 +8569,14 @@
       </p:sp>
       <p:sp>
         <p:nvSpPr>
-          <p:cNvPr id="10" name="TextBox 9"/>
+          <p:cNvPr id="14" name="TextBox 13"/>
           <p:cNvSpPr txBox="1"/>
           <p:nvPr/>
         </p:nvSpPr>
         <p:spPr>
           <a:xfrm>
-            <a:off x="4521098" y="2377440"/>
-            <a:ext cx="3149498" cy="640080"/>
+            <a:off x="4490618" y="2377440"/>
+            <a:ext cx="3210458" cy="640080"/>
           </a:xfrm>
           <a:prstGeom prst="rect">
             <a:avLst/>
@@ -8166,7 +8597,7 @@
             <a:r>
               <a:rPr sz="1700" b="1" i="0">
                 <a:solidFill>
-                  <a:srgbClr val="115F25"/>
+                  <a:srgbClr val="494127"/>
                 </a:solidFill>
               </a:rPr>
               <a:t>연 보험료 합계</a:t>
@@ -8176,14 +8607,14 @@
       </p:sp>
       <p:sp>
         <p:nvSpPr>
-          <p:cNvPr id="11" name="TextBox 10"/>
+          <p:cNvPr id="15" name="TextBox 14"/>
           <p:cNvSpPr txBox="1"/>
           <p:nvPr/>
         </p:nvSpPr>
         <p:spPr>
           <a:xfrm>
-            <a:off x="4521098" y="3063240"/>
-            <a:ext cx="3149498" cy="1325880"/>
+            <a:off x="4490618" y="3063240"/>
+            <a:ext cx="3210458" cy="1325880"/>
           </a:xfrm>
           <a:prstGeom prst="rect">
             <a:avLst/>
@@ -8204,7 +8635,7 @@
             <a:r>
               <a:rPr sz="3000" b="0" i="0">
                 <a:solidFill>
-                  <a:srgbClr val="2B2B2B"/>
+                  <a:srgbClr val="26231F"/>
                 </a:solidFill>
               </a:rPr>
               <a:t>0원</a:t>
@@ -8214,26 +8645,26 @@
       </p:sp>
       <p:sp>
         <p:nvSpPr>
-          <p:cNvPr id="12" name="카드 3"/>
+          <p:cNvPr id="16" name="카드 3"/>
           <p:cNvSpPr/>
           <p:nvPr/>
         </p:nvSpPr>
         <p:spPr>
           <a:xfrm>
-            <a:off x="8036356" y="1600200"/>
-            <a:ext cx="3423818" cy="2926080"/>
+            <a:off x="8066836" y="1600200"/>
+            <a:ext cx="3484778" cy="2926080"/>
           </a:xfrm>
           <a:prstGeom prst="roundRect">
             <a:avLst>
-              <a:gd name="adj" fmla="val 8000"/>
+              <a:gd name="adj" fmla="val 3000"/>
             </a:avLst>
           </a:prstGeom>
           <a:solidFill>
-            <a:srgbClr val="EEFCF1"/>
+            <a:srgbClr val="FFFFFF"/>
           </a:solidFill>
-          <a:ln w="15875">
+          <a:ln w="9525">
             <a:solidFill>
-              <a:srgbClr val="D1FADC"/>
+              <a:srgbClr val="FAF1D1"/>
             </a:solidFill>
           </a:ln>
         </p:spPr>
@@ -8247,20 +8678,51 @@
       </p:sp>
       <p:sp>
         <p:nvSpPr>
-          <p:cNvPr id="13" name="번호 3"/>
+          <p:cNvPr id="17" name="위쪽 띠"/>
           <p:cNvSpPr/>
           <p:nvPr/>
         </p:nvSpPr>
         <p:spPr>
           <a:xfrm>
-            <a:off x="8219236" y="1783080"/>
-            <a:ext cx="457200" cy="457200"/>
-          </a:xfrm>
-          <a:prstGeom prst="ellipse">
+            <a:off x="8075980" y="1609344"/>
+            <a:ext cx="3466490" cy="82296"/>
+          </a:xfrm>
+          <a:prstGeom prst="rect">
             <a:avLst/>
           </a:prstGeom>
           <a:solidFill>
-            <a:srgbClr val="26C54E"/>
+            <a:srgbClr val="EAD07B"/>
+          </a:solidFill>
+          <a:ln>
+            <a:noFill/>
+          </a:ln>
+        </p:spPr>
+        <p:txBody>
+          <a:bodyPr rtlCol="0" anchor="ctr"/>
+          <a:lstStyle/>
+          <a:p>
+            <a:pPr algn="ctr"/>
+          </a:p>
+        </p:txBody>
+      </p:sp>
+      <p:sp>
+        <p:nvSpPr>
+          <p:cNvPr id="18" name="번호 3"/>
+          <p:cNvSpPr/>
+          <p:nvPr/>
+        </p:nvSpPr>
+        <p:spPr>
+          <a:xfrm>
+            <a:off x="8249716" y="1783080"/>
+            <a:ext cx="457200" cy="457200"/>
+          </a:xfrm>
+          <a:prstGeom prst="roundRect">
+            <a:avLst>
+              <a:gd name="adj" fmla="val 25000"/>
+            </a:avLst>
+          </a:prstGeom>
+          <a:solidFill>
+            <a:srgbClr val="EAD07B"/>
           </a:solidFill>
           <a:ln>
             <a:noFill/>
@@ -8280,7 +8742,7 @@
             <a:r>
               <a:rPr sz="1600" b="1" i="0">
                 <a:solidFill>
-                  <a:srgbClr val="FFFFFF"/>
+                  <a:srgbClr val="26231F"/>
                 </a:solidFill>
               </a:rPr>
               <a:t>3</a:t>
@@ -8290,14 +8752,14 @@
       </p:sp>
       <p:sp>
         <p:nvSpPr>
-          <p:cNvPr id="14" name="TextBox 13"/>
+          <p:cNvPr id="19" name="TextBox 18"/>
           <p:cNvSpPr txBox="1"/>
           <p:nvPr/>
         </p:nvSpPr>
         <p:spPr>
           <a:xfrm>
-            <a:off x="8173516" y="2377440"/>
-            <a:ext cx="3149498" cy="640080"/>
+            <a:off x="8203996" y="2377440"/>
+            <a:ext cx="3210458" cy="640080"/>
           </a:xfrm>
           <a:prstGeom prst="rect">
             <a:avLst/>
@@ -8318,7 +8780,7 @@
             <a:r>
               <a:rPr sz="1700" b="1" i="0">
                 <a:solidFill>
-                  <a:srgbClr val="115F25"/>
+                  <a:srgbClr val="494127"/>
                 </a:solidFill>
               </a:rPr>
               <a:t>월 소득 대비</a:t>
@@ -8328,14 +8790,14 @@
       </p:sp>
       <p:sp>
         <p:nvSpPr>
-          <p:cNvPr id="15" name="TextBox 14"/>
+          <p:cNvPr id="20" name="TextBox 19"/>
           <p:cNvSpPr txBox="1"/>
           <p:nvPr/>
         </p:nvSpPr>
         <p:spPr>
           <a:xfrm>
-            <a:off x="8173516" y="3063240"/>
-            <a:ext cx="3149498" cy="1325880"/>
+            <a:off x="8203996" y="3063240"/>
+            <a:ext cx="3210458" cy="1325880"/>
           </a:xfrm>
           <a:prstGeom prst="rect">
             <a:avLst/>
@@ -8356,7 +8818,7 @@
             <a:r>
               <a:rPr sz="3000" b="0" i="0">
                 <a:solidFill>
-                  <a:srgbClr val="2B2B2B"/>
+                  <a:srgbClr val="26231F"/>
                 </a:solidFill>
               </a:rPr>
               <a:t>0 %</a:t>
@@ -8366,14 +8828,14 @@
       </p:sp>
       <p:sp>
         <p:nvSpPr>
-          <p:cNvPr id="16" name="안내"/>
+          <p:cNvPr id="21" name="안내"/>
           <p:cNvSpPr txBox="1"/>
           <p:nvPr/>
         </p:nvSpPr>
         <p:spPr>
           <a:xfrm>
-            <a:off x="731520" y="4709160"/>
-            <a:ext cx="10728655" cy="365760"/>
+            <a:off x="640080" y="4709160"/>
+            <a:ext cx="10911535" cy="365760"/>
           </a:xfrm>
           <a:prstGeom prst="rect">
             <a:avLst/>
@@ -8416,7 +8878,7 @@
     <p:bg>
       <p:bgPr>
         <a:solidFill>
-          <a:srgbClr val="26C54E"/>
+          <a:srgbClr val="FFFFFF"/>
         </a:solidFill>
         <a:effectLst/>
       </p:bgPr>
@@ -8436,16 +8898,81 @@
         </p:nvSpPr>
         <p:spPr>
           <a:xfrm>
-            <a:off x="274320" y="274320"/>
-            <a:ext cx="11643055" cy="6309360"/>
-          </a:xfrm>
-          <a:prstGeom prst="roundRect">
-            <a:avLst>
-              <a:gd name="adj" fmla="val 3500"/>
-            </a:avLst>
+            <a:off x="640080" y="6400800"/>
+            <a:ext cx="10911535" cy="10972"/>
+          </a:xfrm>
+          <a:prstGeom prst="rect">
+            <a:avLst/>
           </a:prstGeom>
           <a:solidFill>
-            <a:srgbClr val="FFFFFF"/>
+            <a:srgbClr val="26231F"/>
+          </a:solidFill>
+          <a:ln>
+            <a:noFill/>
+          </a:ln>
+        </p:spPr>
+        <p:txBody>
+          <a:bodyPr rtlCol="0" anchor="ctr"/>
+          <a:lstStyle/>
+          <a:p>
+            <a:pPr algn="ctr"/>
+          </a:p>
+        </p:txBody>
+      </p:sp>
+      <p:sp>
+        <p:nvSpPr>
+          <p:cNvPr id="4" name="하단 라벨"/>
+          <p:cNvSpPr txBox="1"/>
+          <p:nvPr/>
+        </p:nvSpPr>
+        <p:spPr>
+          <a:xfrm>
+            <a:off x="640080" y="6437376"/>
+            <a:ext cx="5486400" cy="274320"/>
+          </a:xfrm>
+          <a:prstGeom prst="rect">
+            <a:avLst/>
+          </a:prstGeom>
+          <a:noFill/>
+        </p:spPr>
+        <p:txBody>
+          <a:bodyPr wrap="square" lIns="54864" rIns="54864" tIns="27432" bIns="27432" anchor="ctr">
+            <a:noAutofit/>
+          </a:bodyPr>
+          <a:lstStyle/>
+          <a:p>
+            <a:pPr algn="l">
+              <a:lnSpc>
+                <a:spcPct val="115000"/>
+              </a:lnSpc>
+            </a:pPr>
+            <a:r>
+              <a:rPr sz="900" b="1" i="0" spc="250">
+                <a:solidFill>
+                  <a:srgbClr val="26231F"/>
+                </a:solidFill>
+              </a:rPr>
+              <a:t>INSURANCE CHECK</a:t>
+            </a:r>
+          </a:p>
+        </p:txBody>
+      </p:sp>
+      <p:sp>
+        <p:nvSpPr>
+          <p:cNvPr id="5" name="포인트"/>
+          <p:cNvSpPr/>
+          <p:nvPr/>
+        </p:nvSpPr>
+        <p:spPr>
+          <a:xfrm>
+            <a:off x="11213287" y="6473952"/>
+            <a:ext cx="219456" cy="219456"/>
+          </a:xfrm>
+          <a:prstGeom prst="ellipse">
+            <a:avLst/>
+          </a:prstGeom>
+          <a:solidFill>
+            <a:srgbClr val="EAD07B"/>
           </a:solidFill>
           <a:ln>
             <a:noFill/>
@@ -8471,8 +8998,8 @@
         </p:nvSpPr>
         <p:spPr>
           <a:xfrm>
-            <a:off x="731520" y="548640"/>
-            <a:ext cx="9448495" cy="868680"/>
+            <a:off x="640080" y="502920"/>
+            <a:ext cx="10911535" cy="914400"/>
           </a:xfrm>
         </p:spPr>
         <p:txBody>
@@ -8489,7 +9016,7 @@
             <a:r>
               <a:rPr sz="3000" b="1" i="0">
                 <a:solidFill>
-                  <a:srgbClr val="115F25"/>
+                  <a:srgbClr val="26231F"/>
                 </a:solidFill>
               </a:rPr>
               <a:t>점검 메모와 다음 할 일</a:t>
@@ -8499,26 +9026,26 @@
       </p:sp>
       <p:sp>
         <p:nvSpPr>
-          <p:cNvPr id="4" name="카드 1"/>
+          <p:cNvPr id="6" name="카드 1"/>
           <p:cNvSpPr/>
           <p:nvPr/>
         </p:nvSpPr>
         <p:spPr>
           <a:xfrm>
-            <a:off x="731520" y="1600200"/>
-            <a:ext cx="3423818" cy="3977639"/>
+            <a:off x="640080" y="1600200"/>
+            <a:ext cx="3484778" cy="3931920"/>
           </a:xfrm>
           <a:prstGeom prst="roundRect">
             <a:avLst>
-              <a:gd name="adj" fmla="val 8000"/>
+              <a:gd name="adj" fmla="val 3000"/>
             </a:avLst>
           </a:prstGeom>
           <a:solidFill>
-            <a:srgbClr val="EEFCF1"/>
+            <a:srgbClr val="FFFFFF"/>
           </a:solidFill>
-          <a:ln w="15875">
+          <a:ln w="9525">
             <a:solidFill>
-              <a:srgbClr val="D1FADC"/>
+              <a:srgbClr val="FAF1D1"/>
             </a:solidFill>
           </a:ln>
         </p:spPr>
@@ -8532,20 +9059,51 @@
       </p:sp>
       <p:sp>
         <p:nvSpPr>
-          <p:cNvPr id="5" name="번호 1"/>
+          <p:cNvPr id="7" name="위쪽 띠"/>
           <p:cNvSpPr/>
           <p:nvPr/>
         </p:nvSpPr>
         <p:spPr>
           <a:xfrm>
-            <a:off x="914400" y="1783080"/>
-            <a:ext cx="457200" cy="457200"/>
-          </a:xfrm>
-          <a:prstGeom prst="ellipse">
+            <a:off x="649224" y="1609344"/>
+            <a:ext cx="3466490" cy="82296"/>
+          </a:xfrm>
+          <a:prstGeom prst="rect">
             <a:avLst/>
           </a:prstGeom>
           <a:solidFill>
-            <a:srgbClr val="26C54E"/>
+            <a:srgbClr val="EAD07B"/>
+          </a:solidFill>
+          <a:ln>
+            <a:noFill/>
+          </a:ln>
+        </p:spPr>
+        <p:txBody>
+          <a:bodyPr rtlCol="0" anchor="ctr"/>
+          <a:lstStyle/>
+          <a:p>
+            <a:pPr algn="ctr"/>
+          </a:p>
+        </p:txBody>
+      </p:sp>
+      <p:sp>
+        <p:nvSpPr>
+          <p:cNvPr id="8" name="번호 1"/>
+          <p:cNvSpPr/>
+          <p:nvPr/>
+        </p:nvSpPr>
+        <p:spPr>
+          <a:xfrm>
+            <a:off x="822959" y="1783080"/>
+            <a:ext cx="457200" cy="457200"/>
+          </a:xfrm>
+          <a:prstGeom prst="roundRect">
+            <a:avLst>
+              <a:gd name="adj" fmla="val 25000"/>
+            </a:avLst>
+          </a:prstGeom>
+          <a:solidFill>
+            <a:srgbClr val="EAD07B"/>
           </a:solidFill>
           <a:ln>
             <a:noFill/>
@@ -8565,7 +9123,7 @@
             <a:r>
               <a:rPr sz="1600" b="1" i="0">
                 <a:solidFill>
-                  <a:srgbClr val="FFFFFF"/>
+                  <a:srgbClr val="26231F"/>
                 </a:solidFill>
               </a:rPr>
               <a:t>1</a:t>
@@ -8575,14 +9133,14 @@
       </p:sp>
       <p:sp>
         <p:nvSpPr>
-          <p:cNvPr id="6" name="TextBox 5"/>
+          <p:cNvPr id="9" name="TextBox 8"/>
           <p:cNvSpPr txBox="1"/>
           <p:nvPr/>
         </p:nvSpPr>
         <p:spPr>
           <a:xfrm>
-            <a:off x="868680" y="2377440"/>
-            <a:ext cx="3149498" cy="640080"/>
+            <a:off x="777240" y="2377440"/>
+            <a:ext cx="3210458" cy="640080"/>
           </a:xfrm>
           <a:prstGeom prst="rect">
             <a:avLst/>
@@ -8603,7 +9161,7 @@
             <a:r>
               <a:rPr sz="1800" b="1" i="0">
                 <a:solidFill>
-                  <a:srgbClr val="115F25"/>
+                  <a:srgbClr val="494127"/>
                 </a:solidFill>
               </a:rPr>
               <a:t>확인할 것</a:t>
@@ -8613,14 +9171,14 @@
       </p:sp>
       <p:sp>
         <p:nvSpPr>
-          <p:cNvPr id="7" name="TextBox 6"/>
+          <p:cNvPr id="10" name="TextBox 9"/>
           <p:cNvSpPr txBox="1"/>
           <p:nvPr/>
         </p:nvSpPr>
         <p:spPr>
           <a:xfrm>
-            <a:off x="868680" y="3063240"/>
-            <a:ext cx="3149498" cy="2377439"/>
+            <a:off x="777240" y="3063240"/>
+            <a:ext cx="3210458" cy="2331720"/>
           </a:xfrm>
           <a:prstGeom prst="rect">
             <a:avLst/>
@@ -8641,7 +9199,7 @@
             <a:r>
               <a:rPr sz="1500" b="0" i="0">
                 <a:solidFill>
-                  <a:srgbClr val="2B2B2B"/>
+                  <a:srgbClr val="26231F"/>
                 </a:solidFill>
               </a:rPr>
               <a:t>내용을 입력하세요</a:t>
@@ -8651,26 +9209,26 @@
       </p:sp>
       <p:sp>
         <p:nvSpPr>
-          <p:cNvPr id="8" name="카드 2"/>
+          <p:cNvPr id="11" name="카드 2"/>
           <p:cNvSpPr/>
           <p:nvPr/>
         </p:nvSpPr>
         <p:spPr>
           <a:xfrm>
-            <a:off x="4383938" y="1600200"/>
-            <a:ext cx="3423818" cy="3977639"/>
+            <a:off x="4353458" y="1600200"/>
+            <a:ext cx="3484778" cy="3931920"/>
           </a:xfrm>
           <a:prstGeom prst="roundRect">
             <a:avLst>
-              <a:gd name="adj" fmla="val 8000"/>
+              <a:gd name="adj" fmla="val 3000"/>
             </a:avLst>
           </a:prstGeom>
           <a:solidFill>
-            <a:srgbClr val="EEFCF1"/>
+            <a:srgbClr val="FFFFFF"/>
           </a:solidFill>
-          <a:ln w="15875">
+          <a:ln w="9525">
             <a:solidFill>
-              <a:srgbClr val="D1FADC"/>
+              <a:srgbClr val="FAF1D1"/>
             </a:solidFill>
           </a:ln>
         </p:spPr>
@@ -8684,20 +9242,51 @@
       </p:sp>
       <p:sp>
         <p:nvSpPr>
-          <p:cNvPr id="9" name="번호 2"/>
+          <p:cNvPr id="12" name="위쪽 띠"/>
           <p:cNvSpPr/>
           <p:nvPr/>
         </p:nvSpPr>
         <p:spPr>
           <a:xfrm>
-            <a:off x="4566818" y="1783080"/>
-            <a:ext cx="457200" cy="457200"/>
-          </a:xfrm>
-          <a:prstGeom prst="ellipse">
+            <a:off x="4362602" y="1609344"/>
+            <a:ext cx="3466490" cy="82296"/>
+          </a:xfrm>
+          <a:prstGeom prst="rect">
             <a:avLst/>
           </a:prstGeom>
           <a:solidFill>
-            <a:srgbClr val="26C54E"/>
+            <a:srgbClr val="EAD07B"/>
+          </a:solidFill>
+          <a:ln>
+            <a:noFill/>
+          </a:ln>
+        </p:spPr>
+        <p:txBody>
+          <a:bodyPr rtlCol="0" anchor="ctr"/>
+          <a:lstStyle/>
+          <a:p>
+            <a:pPr algn="ctr"/>
+          </a:p>
+        </p:txBody>
+      </p:sp>
+      <p:sp>
+        <p:nvSpPr>
+          <p:cNvPr id="13" name="번호 2"/>
+          <p:cNvSpPr/>
+          <p:nvPr/>
+        </p:nvSpPr>
+        <p:spPr>
+          <a:xfrm>
+            <a:off x="4536338" y="1783080"/>
+            <a:ext cx="457200" cy="457200"/>
+          </a:xfrm>
+          <a:prstGeom prst="roundRect">
+            <a:avLst>
+              <a:gd name="adj" fmla="val 25000"/>
+            </a:avLst>
+          </a:prstGeom>
+          <a:solidFill>
+            <a:srgbClr val="EAD07B"/>
           </a:solidFill>
           <a:ln>
             <a:noFill/>
@@ -8717,7 +9306,7 @@
             <a:r>
               <a:rPr sz="1600" b="1" i="0">
                 <a:solidFill>
-                  <a:srgbClr val="FFFFFF"/>
+                  <a:srgbClr val="26231F"/>
                 </a:solidFill>
               </a:rPr>
               <a:t>2</a:t>
@@ -8727,14 +9316,14 @@
       </p:sp>
       <p:sp>
         <p:nvSpPr>
-          <p:cNvPr id="10" name="TextBox 9"/>
+          <p:cNvPr id="14" name="TextBox 13"/>
           <p:cNvSpPr txBox="1"/>
           <p:nvPr/>
         </p:nvSpPr>
         <p:spPr>
           <a:xfrm>
-            <a:off x="4521098" y="2377440"/>
-            <a:ext cx="3149498" cy="640080"/>
+            <a:off x="4490618" y="2377440"/>
+            <a:ext cx="3210458" cy="640080"/>
           </a:xfrm>
           <a:prstGeom prst="rect">
             <a:avLst/>
@@ -8755,7 +9344,7 @@
             <a:r>
               <a:rPr sz="1800" b="1" i="0">
                 <a:solidFill>
-                  <a:srgbClr val="115F25"/>
+                  <a:srgbClr val="494127"/>
                 </a:solidFill>
               </a:rPr>
               <a:t>문의할 것</a:t>
@@ -8765,14 +9354,14 @@
       </p:sp>
       <p:sp>
         <p:nvSpPr>
-          <p:cNvPr id="11" name="TextBox 10"/>
+          <p:cNvPr id="15" name="TextBox 14"/>
           <p:cNvSpPr txBox="1"/>
           <p:nvPr/>
         </p:nvSpPr>
         <p:spPr>
           <a:xfrm>
-            <a:off x="4521098" y="3063240"/>
-            <a:ext cx="3149498" cy="2377439"/>
+            <a:off x="4490618" y="3063240"/>
+            <a:ext cx="3210458" cy="2331720"/>
           </a:xfrm>
           <a:prstGeom prst="rect">
             <a:avLst/>
@@ -8793,7 +9382,7 @@
             <a:r>
               <a:rPr sz="1500" b="0" i="0">
                 <a:solidFill>
-                  <a:srgbClr val="2B2B2B"/>
+                  <a:srgbClr val="26231F"/>
                 </a:solidFill>
               </a:rPr>
               <a:t>내용을 입력하세요</a:t>
@@ -8803,26 +9392,26 @@
       </p:sp>
       <p:sp>
         <p:nvSpPr>
-          <p:cNvPr id="12" name="카드 3"/>
+          <p:cNvPr id="16" name="카드 3"/>
           <p:cNvSpPr/>
           <p:nvPr/>
         </p:nvSpPr>
         <p:spPr>
           <a:xfrm>
-            <a:off x="8036356" y="1600200"/>
-            <a:ext cx="3423818" cy="3977639"/>
+            <a:off x="8066836" y="1600200"/>
+            <a:ext cx="3484778" cy="3931920"/>
           </a:xfrm>
           <a:prstGeom prst="roundRect">
             <a:avLst>
-              <a:gd name="adj" fmla="val 8000"/>
+              <a:gd name="adj" fmla="val 3000"/>
             </a:avLst>
           </a:prstGeom>
           <a:solidFill>
-            <a:srgbClr val="EEFCF1"/>
+            <a:srgbClr val="FFFFFF"/>
           </a:solidFill>
-          <a:ln w="15875">
+          <a:ln w="9525">
             <a:solidFill>
-              <a:srgbClr val="D1FADC"/>
+              <a:srgbClr val="FAF1D1"/>
             </a:solidFill>
           </a:ln>
         </p:spPr>
@@ -8836,20 +9425,51 @@
       </p:sp>
       <p:sp>
         <p:nvSpPr>
-          <p:cNvPr id="13" name="번호 3"/>
+          <p:cNvPr id="17" name="위쪽 띠"/>
           <p:cNvSpPr/>
           <p:nvPr/>
         </p:nvSpPr>
         <p:spPr>
           <a:xfrm>
-            <a:off x="8219236" y="1783080"/>
-            <a:ext cx="457200" cy="457200"/>
-          </a:xfrm>
-          <a:prstGeom prst="ellipse">
+            <a:off x="8075980" y="1609344"/>
+            <a:ext cx="3466490" cy="82296"/>
+          </a:xfrm>
+          <a:prstGeom prst="rect">
             <a:avLst/>
           </a:prstGeom>
           <a:solidFill>
-            <a:srgbClr val="26C54E"/>
+            <a:srgbClr val="EAD07B"/>
+          </a:solidFill>
+          <a:ln>
+            <a:noFill/>
+          </a:ln>
+        </p:spPr>
+        <p:txBody>
+          <a:bodyPr rtlCol="0" anchor="ctr"/>
+          <a:lstStyle/>
+          <a:p>
+            <a:pPr algn="ctr"/>
+          </a:p>
+        </p:txBody>
+      </p:sp>
+      <p:sp>
+        <p:nvSpPr>
+          <p:cNvPr id="18" name="번호 3"/>
+          <p:cNvSpPr/>
+          <p:nvPr/>
+        </p:nvSpPr>
+        <p:spPr>
+          <a:xfrm>
+            <a:off x="8249716" y="1783080"/>
+            <a:ext cx="457200" cy="457200"/>
+          </a:xfrm>
+          <a:prstGeom prst="roundRect">
+            <a:avLst>
+              <a:gd name="adj" fmla="val 25000"/>
+            </a:avLst>
+          </a:prstGeom>
+          <a:solidFill>
+            <a:srgbClr val="EAD07B"/>
           </a:solidFill>
           <a:ln>
             <a:noFill/>
@@ -8869,7 +9489,7 @@
             <a:r>
               <a:rPr sz="1600" b="1" i="0">
                 <a:solidFill>
-                  <a:srgbClr val="FFFFFF"/>
+                  <a:srgbClr val="26231F"/>
                 </a:solidFill>
               </a:rPr>
               <a:t>3</a:t>
@@ -8879,14 +9499,14 @@
       </p:sp>
       <p:sp>
         <p:nvSpPr>
-          <p:cNvPr id="14" name="TextBox 13"/>
+          <p:cNvPr id="19" name="TextBox 18"/>
           <p:cNvSpPr txBox="1"/>
           <p:nvPr/>
         </p:nvSpPr>
         <p:spPr>
           <a:xfrm>
-            <a:off x="8173516" y="2377440"/>
-            <a:ext cx="3149498" cy="640080"/>
+            <a:off x="8203996" y="2377440"/>
+            <a:ext cx="3210458" cy="640080"/>
           </a:xfrm>
           <a:prstGeom prst="rect">
             <a:avLst/>
@@ -8907,7 +9527,7 @@
             <a:r>
               <a:rPr sz="1800" b="1" i="0">
                 <a:solidFill>
-                  <a:srgbClr val="115F25"/>
+                  <a:srgbClr val="494127"/>
                 </a:solidFill>
               </a:rPr>
               <a:t>정리할 날짜</a:t>
@@ -8917,14 +9537,14 @@
       </p:sp>
       <p:sp>
         <p:nvSpPr>
-          <p:cNvPr id="15" name="TextBox 14"/>
+          <p:cNvPr id="20" name="TextBox 19"/>
           <p:cNvSpPr txBox="1"/>
           <p:nvPr/>
         </p:nvSpPr>
         <p:spPr>
           <a:xfrm>
-            <a:off x="8173516" y="3063240"/>
-            <a:ext cx="3149498" cy="2377439"/>
+            <a:off x="8203996" y="3063240"/>
+            <a:ext cx="3210458" cy="2331720"/>
           </a:xfrm>
           <a:prstGeom prst="rect">
             <a:avLst/>
@@ -8945,7 +9565,7 @@
             <a:r>
               <a:rPr sz="1500" b="0" i="0">
                 <a:solidFill>
-                  <a:srgbClr val="2B2B2B"/>
+                  <a:srgbClr val="26231F"/>
                 </a:solidFill>
               </a:rPr>
               <a:t>내용을 입력하세요</a:t>
@@ -8955,14 +9575,14 @@
       </p:sp>
       <p:sp>
         <p:nvSpPr>
-          <p:cNvPr id="16" name="안내 문구"/>
+          <p:cNvPr id="21" name="안내 문구"/>
           <p:cNvSpPr txBox="1"/>
           <p:nvPr/>
         </p:nvSpPr>
         <p:spPr>
           <a:xfrm>
-            <a:off x="731520" y="5669280"/>
-            <a:ext cx="10728655" cy="548640"/>
+            <a:off x="640080" y="5623560"/>
+            <a:ext cx="10911535" cy="548640"/>
           </a:xfrm>
           <a:prstGeom prst="rect">
             <a:avLst/>
@@ -9010,34 +9630,34 @@
         <a:sysClr val="window" lastClr="FFFFFF"/>
       </a:lt1>
       <a:dk2>
-        <a:srgbClr val="115F25"/>
+        <a:srgbClr val="494127"/>
       </a:dk2>
       <a:lt2>
-        <a:srgbClr val="EEFCF1"/>
+        <a:srgbClr val="FDF8EA"/>
       </a:lt2>
       <a:accent1>
-        <a:srgbClr val="26C54E"/>
+        <a:srgbClr val="EAD07B"/>
       </a:accent1>
       <a:accent2>
-        <a:srgbClr val="209DB6"/>
+        <a:srgbClr val="DCEF9F"/>
       </a:accent2>
       <a:accent3>
-        <a:srgbClr val="115F25"/>
+        <a:srgbClr val="494127"/>
       </a:accent3>
       <a:accent4>
-        <a:srgbClr val="D1FADC"/>
+        <a:srgbClr val="FAF1D1"/>
       </a:accent4>
       <a:accent5>
-        <a:srgbClr val="23B182"/>
+        <a:srgbClr val="E3E08D"/>
       </a:accent5>
       <a:accent6>
-        <a:srgbClr val="709F7C"/>
+        <a:srgbClr val="928D7D"/>
       </a:accent6>
       <a:hlink>
-        <a:srgbClr val="26C54E"/>
+        <a:srgbClr val="EAD07B"/>
       </a:hlink>
       <a:folHlink>
-        <a:srgbClr val="115F25"/>
+        <a:srgbClr val="494127"/>
       </a:folHlink>
     </a:clrScheme>
     <a:fontScheme name="Office">
